--- a/.lessons/25 Fundamental HTTP Session/3 Storing Data at Session/1.pptx
+++ b/.lessons/25 Fundamental HTTP Session/3 Storing Data at Session/1.pptx
@@ -8,6 +8,14 @@
     <p:sldId id="402" r:id="rId2"/>
     <p:sldId id="403" r:id="rId3"/>
     <p:sldId id="400" r:id="rId4"/>
+    <p:sldId id="404" r:id="rId5"/>
+    <p:sldId id="408" r:id="rId6"/>
+    <p:sldId id="405" r:id="rId7"/>
+    <p:sldId id="406" r:id="rId8"/>
+    <p:sldId id="407" r:id="rId9"/>
+    <p:sldId id="409" r:id="rId10"/>
+    <p:sldId id="410" r:id="rId11"/>
+    <p:sldId id="411" r:id="rId12"/>
   </p:sldIdLst>
   <p:sldSz cx="12192000" cy="6858000"/>
   <p:notesSz cx="6858000" cy="9144000"/>
@@ -261,7 +269,7 @@
           <a:p>
             <a:fld id="{3E102D2E-813C-461C-9963-687A650C48C0}" type="datetimeFigureOut">
               <a:rPr lang="en-US" smtClean="0"/>
-              <a:t>5/23/2025</a:t>
+              <a:t>5/27/2025</a:t>
             </a:fld>
             <a:endParaRPr lang="en-US"/>
           </a:p>
@@ -459,7 +467,7 @@
           <a:p>
             <a:fld id="{3E102D2E-813C-461C-9963-687A650C48C0}" type="datetimeFigureOut">
               <a:rPr lang="en-US" smtClean="0"/>
-              <a:t>5/23/2025</a:t>
+              <a:t>5/27/2025</a:t>
             </a:fld>
             <a:endParaRPr lang="en-US"/>
           </a:p>
@@ -667,7 +675,7 @@
           <a:p>
             <a:fld id="{3E102D2E-813C-461C-9963-687A650C48C0}" type="datetimeFigureOut">
               <a:rPr lang="en-US" smtClean="0"/>
-              <a:t>5/23/2025</a:t>
+              <a:t>5/27/2025</a:t>
             </a:fld>
             <a:endParaRPr lang="en-US"/>
           </a:p>
@@ -865,7 +873,7 @@
           <a:p>
             <a:fld id="{3E102D2E-813C-461C-9963-687A650C48C0}" type="datetimeFigureOut">
               <a:rPr lang="en-US" smtClean="0"/>
-              <a:t>5/23/2025</a:t>
+              <a:t>5/27/2025</a:t>
             </a:fld>
             <a:endParaRPr lang="en-US"/>
           </a:p>
@@ -1140,7 +1148,7 @@
           <a:p>
             <a:fld id="{3E102D2E-813C-461C-9963-687A650C48C0}" type="datetimeFigureOut">
               <a:rPr lang="en-US" smtClean="0"/>
-              <a:t>5/23/2025</a:t>
+              <a:t>5/27/2025</a:t>
             </a:fld>
             <a:endParaRPr lang="en-US"/>
           </a:p>
@@ -1405,7 +1413,7 @@
           <a:p>
             <a:fld id="{3E102D2E-813C-461C-9963-687A650C48C0}" type="datetimeFigureOut">
               <a:rPr lang="en-US" smtClean="0"/>
-              <a:t>5/23/2025</a:t>
+              <a:t>5/27/2025</a:t>
             </a:fld>
             <a:endParaRPr lang="en-US"/>
           </a:p>
@@ -1817,7 +1825,7 @@
           <a:p>
             <a:fld id="{3E102D2E-813C-461C-9963-687A650C48C0}" type="datetimeFigureOut">
               <a:rPr lang="en-US" smtClean="0"/>
-              <a:t>5/23/2025</a:t>
+              <a:t>5/27/2025</a:t>
             </a:fld>
             <a:endParaRPr lang="en-US"/>
           </a:p>
@@ -1958,7 +1966,7 @@
           <a:p>
             <a:fld id="{3E102D2E-813C-461C-9963-687A650C48C0}" type="datetimeFigureOut">
               <a:rPr lang="en-US" smtClean="0"/>
-              <a:t>5/23/2025</a:t>
+              <a:t>5/27/2025</a:t>
             </a:fld>
             <a:endParaRPr lang="en-US"/>
           </a:p>
@@ -2071,7 +2079,7 @@
           <a:p>
             <a:fld id="{3E102D2E-813C-461C-9963-687A650C48C0}" type="datetimeFigureOut">
               <a:rPr lang="en-US" smtClean="0"/>
-              <a:t>5/23/2025</a:t>
+              <a:t>5/27/2025</a:t>
             </a:fld>
             <a:endParaRPr lang="en-US"/>
           </a:p>
@@ -2382,7 +2390,7 @@
           <a:p>
             <a:fld id="{3E102D2E-813C-461C-9963-687A650C48C0}" type="datetimeFigureOut">
               <a:rPr lang="en-US" smtClean="0"/>
-              <a:t>5/23/2025</a:t>
+              <a:t>5/27/2025</a:t>
             </a:fld>
             <a:endParaRPr lang="en-US"/>
           </a:p>
@@ -2670,7 +2678,7 @@
           <a:p>
             <a:fld id="{3E102D2E-813C-461C-9963-687A650C48C0}" type="datetimeFigureOut">
               <a:rPr lang="en-US" smtClean="0"/>
-              <a:t>5/23/2025</a:t>
+              <a:t>5/27/2025</a:t>
             </a:fld>
             <a:endParaRPr lang="en-US"/>
           </a:p>
@@ -2911,7 +2919,7 @@
           <a:p>
             <a:fld id="{3E102D2E-813C-461C-9963-687A650C48C0}" type="datetimeFigureOut">
               <a:rPr lang="en-US" smtClean="0"/>
-              <a:t>5/23/2025</a:t>
+              <a:t>5/27/2025</a:t>
             </a:fld>
             <a:endParaRPr lang="en-US"/>
           </a:p>
@@ -3348,6 +3356,1402 @@
         </p:nvSpPr>
         <p:spPr>
           <a:xfrm>
+            <a:off x="217715" y="255046"/>
+            <a:ext cx="7988824" cy="6020302"/>
+          </a:xfrm>
+          <a:prstGeom prst="rect">
+            <a:avLst/>
+          </a:prstGeom>
+          <a:noFill/>
+        </p:spPr>
+        <p:txBody>
+          <a:bodyPr wrap="square">
+            <a:spAutoFit/>
+          </a:bodyPr>
+          <a:lstStyle/>
+          <a:p>
+            <a:pPr>
+              <a:lnSpc>
+                <a:spcPct val="150000"/>
+              </a:lnSpc>
+              <a:buNone/>
+            </a:pPr>
+            <a:r>
+              <a:rPr kumimoji="0" lang="en-US" altLang="en-US" sz="1100" b="1" i="0" u="none" strike="noStrike" cap="none" normalizeH="0" baseline="0">
+                <a:ln>
+                  <a:noFill/>
+                </a:ln>
+                <a:solidFill>
+                  <a:srgbClr val="FF0000"/>
+                </a:solidFill>
+                <a:effectLst/>
+                <a:latin typeface="Arial" panose="020B0604020202020204" pitchFamily="34" charset="0"/>
+              </a:rPr>
+              <a:t>Storing Data at Session in Laravel</a:t>
+            </a:r>
+          </a:p>
+          <a:p>
+            <a:pPr>
+              <a:lnSpc>
+                <a:spcPct val="150000"/>
+              </a:lnSpc>
+              <a:buNone/>
+            </a:pPr>
+            <a:endParaRPr kumimoji="0" lang="en-US" altLang="en-US" sz="1100" b="0" i="0" u="none" strike="noStrike" cap="none" normalizeH="0" baseline="0">
+              <a:ln>
+                <a:noFill/>
+              </a:ln>
+              <a:solidFill>
+                <a:schemeClr val="tx1"/>
+              </a:solidFill>
+              <a:effectLst/>
+              <a:latin typeface="Arial" panose="020B0604020202020204" pitchFamily="34" charset="0"/>
+            </a:endParaRPr>
+          </a:p>
+          <a:p>
+            <a:pPr>
+              <a:lnSpc>
+                <a:spcPct val="150000"/>
+              </a:lnSpc>
+              <a:buNone/>
+            </a:pPr>
+            <a:r>
+              <a:rPr kumimoji="0" lang="en-US" altLang="en-US" sz="1100" b="0" i="0" u="none" strike="noStrike" cap="none" normalizeH="0" baseline="0">
+                <a:ln>
+                  <a:noFill/>
+                </a:ln>
+                <a:solidFill>
+                  <a:schemeClr val="tx1"/>
+                </a:solidFill>
+                <a:effectLst/>
+                <a:latin typeface="Arial" panose="020B0604020202020204" pitchFamily="34" charset="0"/>
+              </a:rPr>
+              <a:t>Laravel sessiyaya məlumat saxlamaq üçün bir neçə üsul təqdim edir. Ən çox istifadə olunan metodlar:</a:t>
+            </a:r>
+          </a:p>
+          <a:p>
+            <a:pPr>
+              <a:lnSpc>
+                <a:spcPct val="150000"/>
+              </a:lnSpc>
+              <a:buNone/>
+            </a:pPr>
+            <a:endParaRPr lang="en-US" altLang="en-US" sz="1100">
+              <a:latin typeface="Arial" panose="020B0604020202020204" pitchFamily="34" charset="0"/>
+            </a:endParaRPr>
+          </a:p>
+          <a:p>
+            <a:pPr marL="285750" indent="-285750">
+              <a:lnSpc>
+                <a:spcPct val="150000"/>
+              </a:lnSpc>
+              <a:buFont typeface="Arial" panose="020B0604020202020204" pitchFamily="34" charset="0"/>
+              <a:buChar char="•"/>
+            </a:pPr>
+            <a:r>
+              <a:rPr kumimoji="0" lang="en-US" altLang="en-US" sz="1100" b="1" i="0" u="none" strike="noStrike" cap="none" normalizeH="0" baseline="0">
+                <a:ln>
+                  <a:noFill/>
+                </a:ln>
+                <a:solidFill>
+                  <a:schemeClr val="tx1"/>
+                </a:solidFill>
+                <a:effectLst/>
+                <a:latin typeface="Arial" panose="020B0604020202020204" pitchFamily="34" charset="0"/>
+              </a:rPr>
+              <a:t>$request</a:t>
+            </a:r>
+            <a:r>
+              <a:rPr kumimoji="0" lang="en-US" altLang="en-US" sz="1100" b="1" i="0" u="none" strike="noStrike" cap="none" normalizeH="0" baseline="0">
+                <a:ln>
+                  <a:noFill/>
+                </a:ln>
+                <a:solidFill>
+                  <a:srgbClr val="FF0000"/>
+                </a:solidFill>
+                <a:effectLst/>
+                <a:latin typeface="Arial" panose="020B0604020202020204" pitchFamily="34" charset="0"/>
+              </a:rPr>
+              <a:t>-&gt;</a:t>
+            </a:r>
+            <a:r>
+              <a:rPr kumimoji="0" lang="en-US" altLang="en-US" sz="1100" b="1" i="0" u="none" strike="noStrike" cap="none" normalizeH="0" baseline="0">
+                <a:ln>
+                  <a:noFill/>
+                </a:ln>
+                <a:solidFill>
+                  <a:srgbClr val="00B050"/>
+                </a:solidFill>
+                <a:effectLst/>
+                <a:latin typeface="Arial" panose="020B0604020202020204" pitchFamily="34" charset="0"/>
+              </a:rPr>
+              <a:t>session()</a:t>
+            </a:r>
+            <a:r>
+              <a:rPr kumimoji="0" lang="en-US" altLang="en-US" sz="1100" b="1" i="0" u="none" strike="noStrike" cap="none" normalizeH="0" baseline="0">
+                <a:ln>
+                  <a:noFill/>
+                </a:ln>
+                <a:solidFill>
+                  <a:srgbClr val="FF0000"/>
+                </a:solidFill>
+                <a:effectLst/>
+                <a:latin typeface="Arial" panose="020B0604020202020204" pitchFamily="34" charset="0"/>
+              </a:rPr>
+              <a:t>-&gt;</a:t>
+            </a:r>
+            <a:r>
+              <a:rPr kumimoji="0" lang="en-US" altLang="en-US" sz="1100" b="1" i="0" u="none" strike="noStrike" cap="none" normalizeH="0" baseline="0">
+                <a:ln>
+                  <a:noFill/>
+                </a:ln>
+                <a:solidFill>
+                  <a:srgbClr val="00B050"/>
+                </a:solidFill>
+                <a:effectLst/>
+                <a:latin typeface="Arial" panose="020B0604020202020204" pitchFamily="34" charset="0"/>
+              </a:rPr>
+              <a:t>put(</a:t>
+            </a:r>
+            <a:r>
+              <a:rPr kumimoji="0" lang="en-US" altLang="en-US" sz="1100" b="1" i="0" u="none" strike="noStrike" cap="none" normalizeH="0" baseline="0">
+                <a:ln>
+                  <a:noFill/>
+                </a:ln>
+                <a:effectLst/>
+                <a:latin typeface="Arial" panose="020B0604020202020204" pitchFamily="34" charset="0"/>
+              </a:rPr>
+              <a:t>'</a:t>
+            </a:r>
+            <a:r>
+              <a:rPr kumimoji="0" lang="en-US" altLang="en-US" sz="1100" b="1" i="0" u="none" strike="noStrike" cap="none" normalizeH="0" baseline="0">
+                <a:ln>
+                  <a:noFill/>
+                </a:ln>
+                <a:solidFill>
+                  <a:schemeClr val="accent2"/>
+                </a:solidFill>
+                <a:effectLst/>
+                <a:latin typeface="Arial" panose="020B0604020202020204" pitchFamily="34" charset="0"/>
+              </a:rPr>
+              <a:t>key</a:t>
+            </a:r>
+            <a:r>
+              <a:rPr kumimoji="0" lang="en-US" altLang="en-US" sz="1100" b="1" i="0" u="none" strike="noStrike" cap="none" normalizeH="0" baseline="0">
+                <a:ln>
+                  <a:noFill/>
+                </a:ln>
+                <a:effectLst/>
+                <a:latin typeface="Arial" panose="020B0604020202020204" pitchFamily="34" charset="0"/>
+              </a:rPr>
+              <a:t>'</a:t>
+            </a:r>
+            <a:r>
+              <a:rPr kumimoji="0" lang="en-US" altLang="en-US" sz="1100" b="1" i="0" u="none" strike="noStrike" cap="none" normalizeH="0" baseline="0">
+                <a:ln>
+                  <a:noFill/>
+                </a:ln>
+                <a:solidFill>
+                  <a:schemeClr val="tx1"/>
+                </a:solidFill>
+                <a:effectLst/>
+                <a:latin typeface="Arial" panose="020B0604020202020204" pitchFamily="34" charset="0"/>
+              </a:rPr>
+              <a:t>,</a:t>
+            </a:r>
+            <a:r>
+              <a:rPr kumimoji="0" lang="en-US" altLang="en-US" sz="1100" b="0" i="0" u="none" strike="noStrike" cap="none" normalizeH="0" baseline="0">
+                <a:ln>
+                  <a:noFill/>
+                </a:ln>
+                <a:solidFill>
+                  <a:schemeClr val="tx1"/>
+                </a:solidFill>
+                <a:effectLst/>
+                <a:latin typeface="Arial" panose="020B0604020202020204" pitchFamily="34" charset="0"/>
+              </a:rPr>
+              <a:t> </a:t>
+            </a:r>
+            <a:r>
+              <a:rPr kumimoji="0" lang="en-US" altLang="en-US" sz="1100" b="1" i="0" u="none" strike="noStrike" cap="none" normalizeH="0" baseline="0">
+                <a:ln>
+                  <a:noFill/>
+                </a:ln>
+                <a:effectLst/>
+                <a:latin typeface="Arial" panose="020B0604020202020204" pitchFamily="34" charset="0"/>
+              </a:rPr>
+              <a:t>'</a:t>
+            </a:r>
+            <a:r>
+              <a:rPr kumimoji="0" lang="en-US" altLang="en-US" sz="1100" b="1" i="0" u="none" strike="noStrike" cap="none" normalizeH="0" baseline="0">
+                <a:ln>
+                  <a:noFill/>
+                </a:ln>
+                <a:solidFill>
+                  <a:srgbClr val="7030A0"/>
+                </a:solidFill>
+                <a:effectLst/>
+                <a:latin typeface="Arial" panose="020B0604020202020204" pitchFamily="34" charset="0"/>
+              </a:rPr>
+              <a:t>value</a:t>
+            </a:r>
+            <a:r>
+              <a:rPr kumimoji="0" lang="en-US" altLang="en-US" sz="1100" b="1" i="0" u="none" strike="noStrike" cap="none" normalizeH="0" baseline="0">
+                <a:ln>
+                  <a:noFill/>
+                </a:ln>
+                <a:effectLst/>
+                <a:latin typeface="Arial" panose="020B0604020202020204" pitchFamily="34" charset="0"/>
+              </a:rPr>
+              <a:t>'</a:t>
+            </a:r>
+            <a:r>
+              <a:rPr kumimoji="0" lang="en-US" altLang="en-US" sz="1100" b="1" i="0" u="none" strike="noStrike" cap="none" normalizeH="0" baseline="0">
+                <a:ln>
+                  <a:noFill/>
+                </a:ln>
+                <a:solidFill>
+                  <a:srgbClr val="00B050"/>
+                </a:solidFill>
+                <a:effectLst/>
+                <a:latin typeface="Arial" panose="020B0604020202020204" pitchFamily="34" charset="0"/>
+              </a:rPr>
+              <a:t>)</a:t>
+            </a:r>
+          </a:p>
+          <a:p>
+            <a:pPr marL="285750" indent="-285750">
+              <a:lnSpc>
+                <a:spcPct val="150000"/>
+              </a:lnSpc>
+              <a:buFont typeface="Arial" panose="020B0604020202020204" pitchFamily="34" charset="0"/>
+              <a:buChar char="•"/>
+            </a:pPr>
+            <a:endParaRPr lang="en-US" altLang="en-US" sz="1100" b="1">
+              <a:latin typeface="Arial" panose="020B0604020202020204" pitchFamily="34" charset="0"/>
+            </a:endParaRPr>
+          </a:p>
+          <a:p>
+            <a:pPr marL="285750" indent="-285750">
+              <a:lnSpc>
+                <a:spcPct val="150000"/>
+              </a:lnSpc>
+              <a:buFont typeface="Arial" panose="020B0604020202020204" pitchFamily="34" charset="0"/>
+              <a:buChar char="•"/>
+            </a:pPr>
+            <a:r>
+              <a:rPr kumimoji="0" lang="en-US" altLang="en-US" sz="1100" b="1" i="0" u="none" strike="noStrike" cap="none" normalizeH="0" baseline="0">
+                <a:ln>
+                  <a:noFill/>
+                </a:ln>
+                <a:solidFill>
+                  <a:schemeClr val="tx1"/>
+                </a:solidFill>
+                <a:effectLst/>
+                <a:latin typeface="Arial" panose="020B0604020202020204" pitchFamily="34" charset="0"/>
+              </a:rPr>
+              <a:t>$request</a:t>
+            </a:r>
+            <a:r>
+              <a:rPr kumimoji="0" lang="en-US" altLang="en-US" sz="1100" b="1" i="0" u="none" strike="noStrike" cap="none" normalizeH="0" baseline="0">
+                <a:ln>
+                  <a:noFill/>
+                </a:ln>
+                <a:solidFill>
+                  <a:srgbClr val="FF0000"/>
+                </a:solidFill>
+                <a:effectLst/>
+                <a:latin typeface="Arial" panose="020B0604020202020204" pitchFamily="34" charset="0"/>
+              </a:rPr>
+              <a:t>-&gt;</a:t>
+            </a:r>
+            <a:r>
+              <a:rPr kumimoji="0" lang="en-US" altLang="en-US" sz="1100" b="1" i="0" u="none" strike="noStrike" cap="none" normalizeH="0" baseline="0">
+                <a:ln>
+                  <a:noFill/>
+                </a:ln>
+                <a:solidFill>
+                  <a:srgbClr val="00B050"/>
+                </a:solidFill>
+                <a:effectLst/>
+                <a:latin typeface="Arial" panose="020B0604020202020204" pitchFamily="34" charset="0"/>
+              </a:rPr>
+              <a:t>session()</a:t>
+            </a:r>
+            <a:r>
+              <a:rPr kumimoji="0" lang="en-US" altLang="en-US" sz="1100" b="1" i="0" u="none" strike="noStrike" cap="none" normalizeH="0" baseline="0">
+                <a:ln>
+                  <a:noFill/>
+                </a:ln>
+                <a:solidFill>
+                  <a:srgbClr val="FF0000"/>
+                </a:solidFill>
+                <a:effectLst/>
+                <a:latin typeface="Arial" panose="020B0604020202020204" pitchFamily="34" charset="0"/>
+              </a:rPr>
+              <a:t>-&gt;</a:t>
+            </a:r>
+            <a:r>
+              <a:rPr kumimoji="0" lang="en-US" altLang="en-US" sz="1100" b="1" i="0" u="none" strike="noStrike" cap="none" normalizeH="0" baseline="0">
+                <a:ln>
+                  <a:noFill/>
+                </a:ln>
+                <a:solidFill>
+                  <a:srgbClr val="00B050"/>
+                </a:solidFill>
+                <a:effectLst/>
+                <a:latin typeface="Arial" panose="020B0604020202020204" pitchFamily="34" charset="0"/>
+              </a:rPr>
+              <a:t>put(</a:t>
+            </a:r>
+            <a:r>
+              <a:rPr kumimoji="0" lang="en-US" altLang="en-US" sz="1100" b="1" i="0" u="none" strike="noStrike" cap="none" normalizeH="0" baseline="0">
+                <a:ln>
+                  <a:noFill/>
+                </a:ln>
+                <a:solidFill>
+                  <a:schemeClr val="tx1"/>
+                </a:solidFill>
+                <a:effectLst/>
+                <a:latin typeface="Arial" panose="020B0604020202020204" pitchFamily="34" charset="0"/>
+              </a:rPr>
+              <a:t>[</a:t>
+            </a:r>
+            <a:r>
+              <a:rPr kumimoji="0" lang="en-US" altLang="en-US" sz="1100" b="0" i="0" u="none" strike="noStrike" cap="none" normalizeH="0" baseline="0">
+                <a:ln>
+                  <a:noFill/>
+                </a:ln>
+                <a:solidFill>
+                  <a:schemeClr val="tx1"/>
+                </a:solidFill>
+                <a:effectLst/>
+                <a:latin typeface="Arial" panose="020B0604020202020204" pitchFamily="34" charset="0"/>
+              </a:rPr>
+              <a:t>  </a:t>
+            </a:r>
+            <a:r>
+              <a:rPr kumimoji="0" lang="en-US" altLang="en-US" sz="1100" b="1" i="0" u="none" strike="noStrike" cap="none" normalizeH="0" baseline="0">
+                <a:ln>
+                  <a:noFill/>
+                </a:ln>
+                <a:effectLst/>
+                <a:latin typeface="Arial" panose="020B0604020202020204" pitchFamily="34" charset="0"/>
+              </a:rPr>
+              <a:t>'</a:t>
+            </a:r>
+            <a:r>
+              <a:rPr kumimoji="0" lang="en-US" altLang="en-US" sz="1100" b="1" i="0" u="none" strike="noStrike" cap="none" normalizeH="0" baseline="0">
+                <a:ln>
+                  <a:noFill/>
+                </a:ln>
+                <a:solidFill>
+                  <a:schemeClr val="accent2"/>
+                </a:solidFill>
+                <a:effectLst/>
+                <a:latin typeface="Arial" panose="020B0604020202020204" pitchFamily="34" charset="0"/>
+              </a:rPr>
+              <a:t>key1</a:t>
+            </a:r>
+            <a:r>
+              <a:rPr kumimoji="0" lang="en-US" altLang="en-US" sz="1100" b="1" i="0" u="none" strike="noStrike" cap="none" normalizeH="0" baseline="0">
+                <a:ln>
+                  <a:noFill/>
+                </a:ln>
+                <a:effectLst/>
+                <a:latin typeface="Arial" panose="020B0604020202020204" pitchFamily="34" charset="0"/>
+              </a:rPr>
+              <a:t>' </a:t>
+            </a:r>
+            <a:r>
+              <a:rPr kumimoji="0" lang="en-US" altLang="en-US" sz="1100" b="1" i="0" u="none" strike="noStrike" cap="none" normalizeH="0" baseline="0">
+                <a:ln>
+                  <a:noFill/>
+                </a:ln>
+                <a:solidFill>
+                  <a:srgbClr val="FF0000"/>
+                </a:solidFill>
+                <a:effectLst/>
+                <a:latin typeface="Arial" panose="020B0604020202020204" pitchFamily="34" charset="0"/>
+              </a:rPr>
+              <a:t>=&gt;</a:t>
+            </a:r>
+            <a:r>
+              <a:rPr kumimoji="0" lang="en-US" altLang="en-US" sz="1100" b="0" i="0" u="none" strike="noStrike" cap="none" normalizeH="0" baseline="0">
+                <a:ln>
+                  <a:noFill/>
+                </a:ln>
+                <a:solidFill>
+                  <a:schemeClr val="tx1"/>
+                </a:solidFill>
+                <a:effectLst/>
+                <a:latin typeface="Arial" panose="020B0604020202020204" pitchFamily="34" charset="0"/>
+              </a:rPr>
+              <a:t> </a:t>
+            </a:r>
+            <a:r>
+              <a:rPr kumimoji="0" lang="en-US" altLang="en-US" sz="1100" b="1" i="0" u="none" strike="noStrike" cap="none" normalizeH="0" baseline="0">
+                <a:ln>
+                  <a:noFill/>
+                </a:ln>
+                <a:effectLst/>
+                <a:latin typeface="Arial" panose="020B0604020202020204" pitchFamily="34" charset="0"/>
+              </a:rPr>
+              <a:t>'</a:t>
+            </a:r>
+            <a:r>
+              <a:rPr kumimoji="0" lang="en-US" altLang="en-US" sz="1100" b="1" i="0" u="none" strike="noStrike" cap="none" normalizeH="0" baseline="0">
+                <a:ln>
+                  <a:noFill/>
+                </a:ln>
+                <a:solidFill>
+                  <a:srgbClr val="7030A0"/>
+                </a:solidFill>
+                <a:effectLst/>
+                <a:latin typeface="Arial" panose="020B0604020202020204" pitchFamily="34" charset="0"/>
+              </a:rPr>
+              <a:t>val1</a:t>
+            </a:r>
+            <a:r>
+              <a:rPr kumimoji="0" lang="en-US" altLang="en-US" sz="1100" b="1" i="0" u="none" strike="noStrike" cap="none" normalizeH="0" baseline="0">
+                <a:ln>
+                  <a:noFill/>
+                </a:ln>
+                <a:effectLst/>
+                <a:latin typeface="Arial" panose="020B0604020202020204" pitchFamily="34" charset="0"/>
+              </a:rPr>
+              <a:t>'</a:t>
+            </a:r>
+            <a:r>
+              <a:rPr kumimoji="0" lang="en-US" altLang="en-US" sz="1100" b="1" i="0" u="none" strike="noStrike" cap="none" normalizeH="0" baseline="0">
+                <a:ln>
+                  <a:noFill/>
+                </a:ln>
+                <a:solidFill>
+                  <a:schemeClr val="tx1"/>
+                </a:solidFill>
+                <a:effectLst/>
+                <a:latin typeface="Arial" panose="020B0604020202020204" pitchFamily="34" charset="0"/>
+              </a:rPr>
+              <a:t>, </a:t>
+            </a:r>
+            <a:r>
+              <a:rPr kumimoji="0" lang="en-US" altLang="en-US" sz="1100" b="0" i="0" u="none" strike="noStrike" cap="none" normalizeH="0" baseline="0">
+                <a:ln>
+                  <a:noFill/>
+                </a:ln>
+                <a:solidFill>
+                  <a:schemeClr val="tx1"/>
+                </a:solidFill>
+                <a:effectLst/>
+                <a:latin typeface="Arial" panose="020B0604020202020204" pitchFamily="34" charset="0"/>
+              </a:rPr>
+              <a:t>  </a:t>
+            </a:r>
+            <a:r>
+              <a:rPr kumimoji="0" lang="en-US" altLang="en-US" sz="1100" b="1" i="0" u="none" strike="noStrike" cap="none" normalizeH="0" baseline="0">
+                <a:ln>
+                  <a:noFill/>
+                </a:ln>
+                <a:effectLst/>
+                <a:latin typeface="Arial" panose="020B0604020202020204" pitchFamily="34" charset="0"/>
+              </a:rPr>
+              <a:t>'</a:t>
+            </a:r>
+            <a:r>
+              <a:rPr kumimoji="0" lang="en-US" altLang="en-US" sz="1100" b="1" i="0" u="none" strike="noStrike" cap="none" normalizeH="0" baseline="0">
+                <a:ln>
+                  <a:noFill/>
+                </a:ln>
+                <a:solidFill>
+                  <a:schemeClr val="accent2"/>
+                </a:solidFill>
+                <a:effectLst/>
+                <a:latin typeface="Arial" panose="020B0604020202020204" pitchFamily="34" charset="0"/>
+              </a:rPr>
+              <a:t>key2</a:t>
+            </a:r>
+            <a:r>
+              <a:rPr kumimoji="0" lang="en-US" altLang="en-US" sz="1100" b="1" i="0" u="none" strike="noStrike" cap="none" normalizeH="0" baseline="0">
+                <a:ln>
+                  <a:noFill/>
+                </a:ln>
+                <a:effectLst/>
+                <a:latin typeface="Arial" panose="020B0604020202020204" pitchFamily="34" charset="0"/>
+              </a:rPr>
+              <a:t>'</a:t>
+            </a:r>
+            <a:r>
+              <a:rPr kumimoji="0" lang="en-US" altLang="en-US" sz="1100" b="0" i="0" u="none" strike="noStrike" cap="none" normalizeH="0" baseline="0">
+                <a:ln>
+                  <a:noFill/>
+                </a:ln>
+                <a:solidFill>
+                  <a:schemeClr val="tx1"/>
+                </a:solidFill>
+                <a:effectLst/>
+                <a:latin typeface="Arial" panose="020B0604020202020204" pitchFamily="34" charset="0"/>
+              </a:rPr>
+              <a:t> </a:t>
+            </a:r>
+            <a:r>
+              <a:rPr kumimoji="0" lang="en-US" altLang="en-US" sz="1100" b="1" i="0" u="none" strike="noStrike" cap="none" normalizeH="0" baseline="0">
+                <a:ln>
+                  <a:noFill/>
+                </a:ln>
+                <a:solidFill>
+                  <a:srgbClr val="FF0000"/>
+                </a:solidFill>
+                <a:effectLst/>
+                <a:latin typeface="Arial" panose="020B0604020202020204" pitchFamily="34" charset="0"/>
+              </a:rPr>
+              <a:t>=&gt;</a:t>
+            </a:r>
+            <a:r>
+              <a:rPr kumimoji="0" lang="en-US" altLang="en-US" sz="1100" b="0" i="0" u="none" strike="noStrike" cap="none" normalizeH="0" baseline="0">
+                <a:ln>
+                  <a:noFill/>
+                </a:ln>
+                <a:solidFill>
+                  <a:schemeClr val="tx1"/>
+                </a:solidFill>
+                <a:effectLst/>
+                <a:latin typeface="Arial" panose="020B0604020202020204" pitchFamily="34" charset="0"/>
+              </a:rPr>
+              <a:t> </a:t>
+            </a:r>
+            <a:r>
+              <a:rPr kumimoji="0" lang="en-US" altLang="en-US" sz="1100" b="1" i="0" u="none" strike="noStrike" cap="none" normalizeH="0" baseline="0">
+                <a:ln>
+                  <a:noFill/>
+                </a:ln>
+                <a:effectLst/>
+                <a:latin typeface="Arial" panose="020B0604020202020204" pitchFamily="34" charset="0"/>
+              </a:rPr>
+              <a:t>'</a:t>
+            </a:r>
+            <a:r>
+              <a:rPr kumimoji="0" lang="en-US" altLang="en-US" sz="1100" b="1" i="0" u="none" strike="noStrike" cap="none" normalizeH="0" baseline="0">
+                <a:ln>
+                  <a:noFill/>
+                </a:ln>
+                <a:solidFill>
+                  <a:srgbClr val="7030A0"/>
+                </a:solidFill>
+                <a:effectLst/>
+                <a:latin typeface="Arial" panose="020B0604020202020204" pitchFamily="34" charset="0"/>
+              </a:rPr>
+              <a:t>val2</a:t>
+            </a:r>
+            <a:r>
+              <a:rPr kumimoji="0" lang="en-US" altLang="en-US" sz="1100" b="1" i="0" u="none" strike="noStrike" cap="none" normalizeH="0" baseline="0">
+                <a:ln>
+                  <a:noFill/>
+                </a:ln>
+                <a:effectLst/>
+                <a:latin typeface="Arial" panose="020B0604020202020204" pitchFamily="34" charset="0"/>
+              </a:rPr>
+              <a:t>'</a:t>
+            </a:r>
+            <a:r>
+              <a:rPr kumimoji="0" lang="en-US" altLang="en-US" sz="1100" b="0" i="0" u="none" strike="noStrike" cap="none" normalizeH="0" baseline="0">
+                <a:ln>
+                  <a:noFill/>
+                </a:ln>
+                <a:solidFill>
+                  <a:schemeClr val="tx1"/>
+                </a:solidFill>
+                <a:effectLst/>
+                <a:latin typeface="Arial" panose="020B0604020202020204" pitchFamily="34" charset="0"/>
+              </a:rPr>
+              <a:t> </a:t>
+            </a:r>
+            <a:r>
+              <a:rPr kumimoji="0" lang="en-US" altLang="en-US" sz="1100" b="1" i="0" u="none" strike="noStrike" cap="none" normalizeH="0" baseline="0">
+                <a:ln>
+                  <a:noFill/>
+                </a:ln>
+                <a:solidFill>
+                  <a:schemeClr val="tx1"/>
+                </a:solidFill>
+                <a:effectLst/>
+                <a:latin typeface="Arial" panose="020B0604020202020204" pitchFamily="34" charset="0"/>
+              </a:rPr>
+              <a:t>]</a:t>
+            </a:r>
+            <a:r>
+              <a:rPr kumimoji="0" lang="en-US" altLang="en-US" sz="1100" b="1" i="0" u="none" strike="noStrike" cap="none" normalizeH="0" baseline="0">
+                <a:ln>
+                  <a:noFill/>
+                </a:ln>
+                <a:solidFill>
+                  <a:srgbClr val="00B050"/>
+                </a:solidFill>
+                <a:effectLst/>
+                <a:latin typeface="Arial" panose="020B0604020202020204" pitchFamily="34" charset="0"/>
+              </a:rPr>
+              <a:t>)</a:t>
+            </a:r>
+          </a:p>
+          <a:p>
+            <a:pPr marL="285750" indent="-285750">
+              <a:lnSpc>
+                <a:spcPct val="150000"/>
+              </a:lnSpc>
+              <a:buFont typeface="Arial" panose="020B0604020202020204" pitchFamily="34" charset="0"/>
+              <a:buChar char="•"/>
+            </a:pPr>
+            <a:endParaRPr kumimoji="0" lang="en-US" altLang="en-US" sz="1100" b="0" i="0" u="none" strike="noStrike" cap="none" normalizeH="0" baseline="0">
+              <a:ln>
+                <a:noFill/>
+              </a:ln>
+              <a:solidFill>
+                <a:schemeClr val="tx1"/>
+              </a:solidFill>
+              <a:effectLst/>
+              <a:latin typeface="Arial" panose="020B0604020202020204" pitchFamily="34" charset="0"/>
+            </a:endParaRPr>
+          </a:p>
+          <a:p>
+            <a:pPr marL="285750" indent="-285750">
+              <a:lnSpc>
+                <a:spcPct val="150000"/>
+              </a:lnSpc>
+              <a:buFont typeface="Arial" panose="020B0604020202020204" pitchFamily="34" charset="0"/>
+              <a:buChar char="•"/>
+            </a:pPr>
+            <a:r>
+              <a:rPr kumimoji="0" lang="en-US" altLang="en-US" sz="1100" b="1" i="0" u="none" strike="noStrike" cap="none" normalizeH="0" baseline="0">
+                <a:ln>
+                  <a:noFill/>
+                </a:ln>
+                <a:solidFill>
+                  <a:srgbClr val="00B050"/>
+                </a:solidFill>
+                <a:effectLst/>
+                <a:latin typeface="Arial" panose="020B0604020202020204" pitchFamily="34" charset="0"/>
+              </a:rPr>
+              <a:t>session(</a:t>
+            </a:r>
+            <a:r>
+              <a:rPr kumimoji="0" lang="en-US" altLang="en-US" sz="1100" b="1" i="0" u="none" strike="noStrike" cap="none" normalizeH="0" baseline="0">
+                <a:ln>
+                  <a:noFill/>
+                </a:ln>
+                <a:solidFill>
+                  <a:schemeClr val="tx1"/>
+                </a:solidFill>
+                <a:effectLst/>
+                <a:latin typeface="Arial" panose="020B0604020202020204" pitchFamily="34" charset="0"/>
+              </a:rPr>
+              <a:t>[ </a:t>
+            </a:r>
+            <a:r>
+              <a:rPr kumimoji="0" lang="en-US" altLang="en-US" sz="1100" b="1" i="0" u="none" strike="noStrike" cap="none" normalizeH="0" baseline="0">
+                <a:ln>
+                  <a:noFill/>
+                </a:ln>
+                <a:effectLst/>
+                <a:latin typeface="Arial" panose="020B0604020202020204" pitchFamily="34" charset="0"/>
+              </a:rPr>
+              <a:t>'</a:t>
+            </a:r>
+            <a:r>
+              <a:rPr kumimoji="0" lang="en-US" altLang="en-US" sz="1100" b="1" i="0" u="none" strike="noStrike" cap="none" normalizeH="0" baseline="0">
+                <a:ln>
+                  <a:noFill/>
+                </a:ln>
+                <a:solidFill>
+                  <a:schemeClr val="accent2"/>
+                </a:solidFill>
+                <a:effectLst/>
+                <a:latin typeface="Arial" panose="020B0604020202020204" pitchFamily="34" charset="0"/>
+              </a:rPr>
+              <a:t>key</a:t>
+            </a:r>
+            <a:r>
+              <a:rPr kumimoji="0" lang="en-US" altLang="en-US" sz="1100" b="1" i="0" u="none" strike="noStrike" cap="none" normalizeH="0" baseline="0">
+                <a:ln>
+                  <a:noFill/>
+                </a:ln>
+                <a:effectLst/>
+                <a:latin typeface="Arial" panose="020B0604020202020204" pitchFamily="34" charset="0"/>
+              </a:rPr>
+              <a:t>’ </a:t>
+            </a:r>
+            <a:r>
+              <a:rPr kumimoji="0" lang="en-US" altLang="en-US" sz="1100" b="1" i="0" u="none" strike="noStrike" cap="none" normalizeH="0" baseline="0">
+                <a:ln>
+                  <a:noFill/>
+                </a:ln>
+                <a:solidFill>
+                  <a:srgbClr val="FF0000"/>
+                </a:solidFill>
+                <a:effectLst/>
+                <a:latin typeface="Arial" panose="020B0604020202020204" pitchFamily="34" charset="0"/>
+              </a:rPr>
+              <a:t>=&gt;</a:t>
+            </a:r>
+            <a:r>
+              <a:rPr kumimoji="0" lang="en-US" altLang="en-US" sz="1100" b="0" i="0" u="none" strike="noStrike" cap="none" normalizeH="0" baseline="0">
+                <a:ln>
+                  <a:noFill/>
+                </a:ln>
+                <a:solidFill>
+                  <a:schemeClr val="tx1"/>
+                </a:solidFill>
+                <a:effectLst/>
+                <a:latin typeface="Arial" panose="020B0604020202020204" pitchFamily="34" charset="0"/>
+              </a:rPr>
+              <a:t> </a:t>
+            </a:r>
+            <a:r>
+              <a:rPr kumimoji="0" lang="en-US" altLang="en-US" sz="1100" b="1" i="0" u="none" strike="noStrike" cap="none" normalizeH="0" baseline="0">
+                <a:ln>
+                  <a:noFill/>
+                </a:ln>
+                <a:effectLst/>
+                <a:latin typeface="Arial" panose="020B0604020202020204" pitchFamily="34" charset="0"/>
+              </a:rPr>
+              <a:t>'</a:t>
+            </a:r>
+            <a:r>
+              <a:rPr kumimoji="0" lang="en-US" altLang="en-US" sz="1100" b="1" i="0" u="none" strike="noStrike" cap="none" normalizeH="0" baseline="0">
+                <a:ln>
+                  <a:noFill/>
+                </a:ln>
+                <a:solidFill>
+                  <a:srgbClr val="7030A0"/>
+                </a:solidFill>
+                <a:effectLst/>
+                <a:latin typeface="Arial" panose="020B0604020202020204" pitchFamily="34" charset="0"/>
+              </a:rPr>
+              <a:t>value</a:t>
+            </a:r>
+            <a:r>
+              <a:rPr kumimoji="0" lang="en-US" altLang="en-US" sz="1100" b="1" i="0" u="none" strike="noStrike" cap="none" normalizeH="0" baseline="0">
+                <a:ln>
+                  <a:noFill/>
+                </a:ln>
+                <a:effectLst/>
+                <a:latin typeface="Arial" panose="020B0604020202020204" pitchFamily="34" charset="0"/>
+              </a:rPr>
+              <a:t>'</a:t>
+            </a:r>
+            <a:r>
+              <a:rPr kumimoji="0" lang="en-US" altLang="en-US" sz="1100" b="1" i="0" u="none" strike="noStrike" cap="none" normalizeH="0" baseline="0">
+                <a:ln>
+                  <a:noFill/>
+                </a:ln>
+                <a:solidFill>
+                  <a:schemeClr val="tx1"/>
+                </a:solidFill>
+                <a:effectLst/>
+                <a:latin typeface="Arial" panose="020B0604020202020204" pitchFamily="34" charset="0"/>
+              </a:rPr>
+              <a:t> ]</a:t>
+            </a:r>
+            <a:r>
+              <a:rPr kumimoji="0" lang="en-US" altLang="en-US" sz="1100" b="1" i="0" u="none" strike="noStrike" cap="none" normalizeH="0" baseline="0">
+                <a:ln>
+                  <a:noFill/>
+                </a:ln>
+                <a:solidFill>
+                  <a:srgbClr val="00B050"/>
+                </a:solidFill>
+                <a:effectLst/>
+                <a:latin typeface="Arial" panose="020B0604020202020204" pitchFamily="34" charset="0"/>
+              </a:rPr>
+              <a:t>)</a:t>
+            </a:r>
+            <a:r>
+              <a:rPr kumimoji="0" lang="en-US" altLang="en-US" sz="1100" b="0" i="0" u="none" strike="noStrike" cap="none" normalizeH="0" baseline="0">
+                <a:ln>
+                  <a:noFill/>
+                </a:ln>
+                <a:solidFill>
+                  <a:schemeClr val="tx1"/>
+                </a:solidFill>
+                <a:effectLst/>
+                <a:latin typeface="Arial" panose="020B0604020202020204" pitchFamily="34" charset="0"/>
+              </a:rPr>
+              <a:t> — qlobal helper</a:t>
+            </a:r>
+          </a:p>
+          <a:p>
+            <a:pPr marL="285750" indent="-285750">
+              <a:lnSpc>
+                <a:spcPct val="150000"/>
+              </a:lnSpc>
+              <a:buFont typeface="Arial" panose="020B0604020202020204" pitchFamily="34" charset="0"/>
+              <a:buChar char="•"/>
+            </a:pPr>
+            <a:endParaRPr lang="en-US" altLang="en-US" sz="1100">
+              <a:latin typeface="Arial" panose="020B0604020202020204" pitchFamily="34" charset="0"/>
+            </a:endParaRPr>
+          </a:p>
+          <a:p>
+            <a:pPr>
+              <a:lnSpc>
+                <a:spcPct val="150000"/>
+              </a:lnSpc>
+            </a:pPr>
+            <a:endParaRPr kumimoji="0" lang="en-US" altLang="en-US" sz="1100" b="0" i="0" u="none" strike="noStrike" cap="none" normalizeH="0" baseline="0">
+              <a:ln>
+                <a:noFill/>
+              </a:ln>
+              <a:solidFill>
+                <a:schemeClr val="tx1"/>
+              </a:solidFill>
+              <a:effectLst/>
+              <a:latin typeface="Arial" panose="020B0604020202020204" pitchFamily="34" charset="0"/>
+            </a:endParaRPr>
+          </a:p>
+          <a:p>
+            <a:pPr>
+              <a:lnSpc>
+                <a:spcPct val="150000"/>
+              </a:lnSpc>
+            </a:pPr>
+            <a:endParaRPr lang="en-US" altLang="en-US" sz="1100">
+              <a:latin typeface="Arial" panose="020B0604020202020204" pitchFamily="34" charset="0"/>
+            </a:endParaRPr>
+          </a:p>
+          <a:p>
+            <a:pPr>
+              <a:lnSpc>
+                <a:spcPct val="150000"/>
+              </a:lnSpc>
+            </a:pPr>
+            <a:endParaRPr lang="en-US" altLang="en-US" sz="1100">
+              <a:latin typeface="Arial" panose="020B0604020202020204" pitchFamily="34" charset="0"/>
+            </a:endParaRPr>
+          </a:p>
+          <a:p>
+            <a:pPr>
+              <a:lnSpc>
+                <a:spcPct val="150000"/>
+              </a:lnSpc>
+            </a:pPr>
+            <a:endParaRPr lang="en-US" altLang="en-US" sz="1100">
+              <a:latin typeface="Arial" panose="020B0604020202020204" pitchFamily="34" charset="0"/>
+            </a:endParaRPr>
+          </a:p>
+          <a:p>
+            <a:pPr>
+              <a:lnSpc>
+                <a:spcPct val="150000"/>
+              </a:lnSpc>
+            </a:pPr>
+            <a:endParaRPr lang="en-US" altLang="en-US" sz="1100">
+              <a:latin typeface="Arial" panose="020B0604020202020204" pitchFamily="34" charset="0"/>
+            </a:endParaRPr>
+          </a:p>
+          <a:p>
+            <a:pPr>
+              <a:lnSpc>
+                <a:spcPct val="150000"/>
+              </a:lnSpc>
+            </a:pPr>
+            <a:endParaRPr kumimoji="0" lang="en-US" altLang="en-US" sz="1100" b="0" i="0" u="none" strike="noStrike" cap="none" normalizeH="0" baseline="0">
+              <a:ln>
+                <a:noFill/>
+              </a:ln>
+              <a:solidFill>
+                <a:schemeClr val="tx1"/>
+              </a:solidFill>
+              <a:effectLst/>
+              <a:latin typeface="Arial" panose="020B0604020202020204" pitchFamily="34" charset="0"/>
+            </a:endParaRPr>
+          </a:p>
+          <a:p>
+            <a:pPr>
+              <a:lnSpc>
+                <a:spcPct val="150000"/>
+              </a:lnSpc>
+            </a:pPr>
+            <a:endParaRPr kumimoji="0" lang="en-US" altLang="en-US" sz="1050" b="0" i="0" u="none" strike="noStrike" cap="none" normalizeH="0" baseline="0">
+              <a:ln>
+                <a:noFill/>
+              </a:ln>
+              <a:solidFill>
+                <a:schemeClr val="tx1"/>
+              </a:solidFill>
+              <a:effectLst/>
+              <a:latin typeface="Arial" panose="020B0604020202020204" pitchFamily="34" charset="0"/>
+            </a:endParaRPr>
+          </a:p>
+          <a:p>
+            <a:pPr>
+              <a:lnSpc>
+                <a:spcPct val="150000"/>
+              </a:lnSpc>
+            </a:pPr>
+            <a:r>
+              <a:rPr kumimoji="0" lang="en-US" altLang="en-US" sz="1050" b="1" i="0" u="none" strike="noStrike" cap="none" normalizeH="0" baseline="0">
+                <a:ln>
+                  <a:noFill/>
+                </a:ln>
+                <a:solidFill>
+                  <a:schemeClr val="tx1"/>
+                </a:solidFill>
+                <a:effectLst/>
+                <a:latin typeface="Arial" panose="020B0604020202020204" pitchFamily="34" charset="0"/>
+              </a:rPr>
+              <a:t>Açıqlama</a:t>
+            </a:r>
+            <a:r>
+              <a:rPr kumimoji="0" lang="en-US" altLang="en-US" sz="1050" b="0" i="0" u="none" strike="noStrike" cap="none" normalizeH="0" baseline="0">
+                <a:ln>
+                  <a:noFill/>
+                </a:ln>
+                <a:solidFill>
+                  <a:schemeClr val="tx1"/>
+                </a:solidFill>
+                <a:effectLst/>
+                <a:latin typeface="Arial" panose="020B0604020202020204" pitchFamily="34" charset="0"/>
+              </a:rPr>
+              <a:t>:</a:t>
+            </a:r>
+          </a:p>
+          <a:p>
+            <a:pPr>
+              <a:lnSpc>
+                <a:spcPct val="150000"/>
+              </a:lnSpc>
+            </a:pPr>
+            <a:endParaRPr kumimoji="0" lang="en-US" altLang="en-US" sz="1050" b="0" i="0" u="none" strike="noStrike" cap="none" normalizeH="0" baseline="0">
+              <a:ln>
+                <a:noFill/>
+              </a:ln>
+              <a:solidFill>
+                <a:schemeClr val="tx1"/>
+              </a:solidFill>
+              <a:effectLst/>
+              <a:latin typeface="Arial" panose="020B0604020202020204" pitchFamily="34" charset="0"/>
+            </a:endParaRPr>
+          </a:p>
+          <a:p>
+            <a:pPr>
+              <a:lnSpc>
+                <a:spcPct val="200000"/>
+              </a:lnSpc>
+            </a:pPr>
+            <a:r>
+              <a:rPr kumimoji="0" lang="en-US" altLang="en-US" sz="1050" b="1" i="0" u="none" strike="noStrike" cap="none" normalizeH="0" baseline="0">
+                <a:ln>
+                  <a:noFill/>
+                </a:ln>
+                <a:solidFill>
+                  <a:schemeClr val="tx1"/>
+                </a:solidFill>
+                <a:effectLst/>
+                <a:latin typeface="Arial" panose="020B0604020202020204" pitchFamily="34" charset="0"/>
+              </a:rPr>
+              <a:t>put('user_id', 35) </a:t>
+            </a:r>
+            <a:r>
+              <a:rPr kumimoji="0" lang="en-US" altLang="en-US" sz="1050" b="0" i="0" u="none" strike="noStrike" cap="none" normalizeH="0" baseline="0">
+                <a:ln>
+                  <a:noFill/>
+                </a:ln>
+                <a:solidFill>
+                  <a:schemeClr val="tx1"/>
+                </a:solidFill>
+                <a:effectLst/>
+                <a:latin typeface="Arial" panose="020B0604020202020204" pitchFamily="34" charset="0"/>
+              </a:rPr>
+              <a:t>— </a:t>
+            </a:r>
+            <a:r>
+              <a:rPr kumimoji="0" lang="en-US" altLang="en-US" sz="1050" b="1" i="0" u="none" strike="noStrike" cap="none" normalizeH="0" baseline="0">
+                <a:ln>
+                  <a:noFill/>
+                </a:ln>
+                <a:solidFill>
+                  <a:schemeClr val="tx1"/>
+                </a:solidFill>
+                <a:effectLst/>
+                <a:latin typeface="Arial" panose="020B0604020202020204" pitchFamily="34" charset="0"/>
+              </a:rPr>
+              <a:t>user_id </a:t>
+            </a:r>
+            <a:r>
+              <a:rPr kumimoji="0" lang="en-US" altLang="en-US" sz="1050" b="0" i="0" u="none" strike="noStrike" cap="none" normalizeH="0" baseline="0">
+                <a:ln>
+                  <a:noFill/>
+                </a:ln>
+                <a:solidFill>
+                  <a:schemeClr val="tx1"/>
+                </a:solidFill>
+                <a:effectLst/>
+                <a:latin typeface="Arial" panose="020B0604020202020204" pitchFamily="34" charset="0"/>
+              </a:rPr>
+              <a:t>adlı sessiya dəyişəni yaradılır və </a:t>
+            </a:r>
+            <a:r>
+              <a:rPr kumimoji="0" lang="en-US" altLang="en-US" sz="1050" b="1" i="0" u="none" strike="noStrike" cap="none" normalizeH="0" baseline="0">
+                <a:ln>
+                  <a:noFill/>
+                </a:ln>
+                <a:solidFill>
+                  <a:schemeClr val="tx1"/>
+                </a:solidFill>
+                <a:effectLst/>
+                <a:latin typeface="Arial" panose="020B0604020202020204" pitchFamily="34" charset="0"/>
+              </a:rPr>
+              <a:t>35</a:t>
+            </a:r>
+            <a:r>
+              <a:rPr kumimoji="0" lang="en-US" altLang="en-US" sz="1050" b="0" i="0" u="none" strike="noStrike" cap="none" normalizeH="0" baseline="0">
+                <a:ln>
+                  <a:noFill/>
+                </a:ln>
+                <a:solidFill>
+                  <a:schemeClr val="tx1"/>
+                </a:solidFill>
+                <a:effectLst/>
+                <a:latin typeface="Arial" panose="020B0604020202020204" pitchFamily="34" charset="0"/>
+              </a:rPr>
+              <a:t> dəyəri verilir.</a:t>
+            </a:r>
+          </a:p>
+          <a:p>
+            <a:pPr>
+              <a:lnSpc>
+                <a:spcPct val="200000"/>
+              </a:lnSpc>
+            </a:pPr>
+            <a:r>
+              <a:rPr kumimoji="0" lang="en-US" altLang="en-US" sz="1050" b="1" i="0" u="none" strike="noStrike" cap="none" normalizeH="0" baseline="0">
+                <a:ln>
+                  <a:noFill/>
+                </a:ln>
+                <a:solidFill>
+                  <a:schemeClr val="tx1"/>
+                </a:solidFill>
+                <a:effectLst/>
+                <a:latin typeface="Arial" panose="020B0604020202020204" pitchFamily="34" charset="0"/>
+              </a:rPr>
+              <a:t>redirect('get-session') </a:t>
+            </a:r>
+            <a:r>
+              <a:rPr kumimoji="0" lang="en-US" altLang="en-US" sz="1050" b="0" i="0" u="none" strike="noStrike" cap="none" normalizeH="0" baseline="0">
+                <a:ln>
+                  <a:noFill/>
+                </a:ln>
+                <a:solidFill>
+                  <a:schemeClr val="tx1"/>
+                </a:solidFill>
+                <a:effectLst/>
+                <a:latin typeface="Arial" panose="020B0604020202020204" pitchFamily="34" charset="0"/>
+              </a:rPr>
+              <a:t>ilə sessiyada saxlanmış </a:t>
+            </a:r>
+            <a:r>
+              <a:rPr kumimoji="0" lang="en-US" altLang="en-US" sz="1100" b="0" i="0" u="none" strike="noStrike" cap="none" normalizeH="0" baseline="0">
+                <a:ln>
+                  <a:noFill/>
+                </a:ln>
+                <a:solidFill>
+                  <a:schemeClr val="tx1"/>
+                </a:solidFill>
+                <a:effectLst/>
+                <a:latin typeface="Arial" panose="020B0604020202020204" pitchFamily="34" charset="0"/>
+              </a:rPr>
+              <a:t>məlumat </a:t>
+            </a:r>
+            <a:r>
+              <a:rPr kumimoji="0" lang="en-US" altLang="en-US" sz="1100" b="1" i="0" u="none" strike="noStrike" cap="none" normalizeH="0" baseline="0">
+                <a:ln>
+                  <a:noFill/>
+                </a:ln>
+                <a:solidFill>
+                  <a:schemeClr val="tx1"/>
+                </a:solidFill>
+                <a:effectLst/>
+                <a:latin typeface="Arial" panose="020B0604020202020204" pitchFamily="34" charset="0"/>
+              </a:rPr>
+              <a:t>dd()</a:t>
+            </a:r>
+            <a:r>
+              <a:rPr kumimoji="0" lang="en-US" altLang="en-US" sz="1100" b="0" i="0" u="none" strike="noStrike" cap="none" normalizeH="0" baseline="0">
+                <a:ln>
+                  <a:noFill/>
+                </a:ln>
+                <a:solidFill>
+                  <a:schemeClr val="tx1"/>
+                </a:solidFill>
+                <a:effectLst/>
+                <a:latin typeface="Arial" panose="020B0604020202020204" pitchFamily="34" charset="0"/>
+              </a:rPr>
+              <a:t> ilə göstərilir.</a:t>
+            </a:r>
+          </a:p>
+          <a:p>
+            <a:pPr>
+              <a:lnSpc>
+                <a:spcPct val="150000"/>
+              </a:lnSpc>
+            </a:pPr>
+            <a:endParaRPr lang="en-US" altLang="en-US" sz="1100">
+              <a:latin typeface="Arial" panose="020B0604020202020204" pitchFamily="34" charset="0"/>
+            </a:endParaRPr>
+          </a:p>
+          <a:p>
+            <a:pPr>
+              <a:lnSpc>
+                <a:spcPct val="150000"/>
+              </a:lnSpc>
+            </a:pPr>
+            <a:endParaRPr kumimoji="0" lang="en-US" altLang="en-US" sz="1100" b="0" i="0" u="none" strike="noStrike" cap="none" normalizeH="0" baseline="0">
+              <a:ln>
+                <a:noFill/>
+              </a:ln>
+              <a:solidFill>
+                <a:schemeClr val="tx1"/>
+              </a:solidFill>
+              <a:effectLst/>
+              <a:latin typeface="Arial" panose="020B0604020202020204" pitchFamily="34" charset="0"/>
+            </a:endParaRPr>
+          </a:p>
+        </p:txBody>
+      </p:sp>
+      <p:pic>
+        <p:nvPicPr>
+          <p:cNvPr id="4" name="Picture 3">
+            <a:extLst>
+              <a:ext uri="{FF2B5EF4-FFF2-40B4-BE49-F238E27FC236}">
+                <a16:creationId xmlns:a16="http://schemas.microsoft.com/office/drawing/2014/main" id="{A9783499-BD82-1F13-6D61-D9961C29267C}"/>
+              </a:ext>
+            </a:extLst>
+          </p:cNvPr>
+          <p:cNvPicPr>
+            <a:picLocks noChangeAspect="1"/>
+          </p:cNvPicPr>
+          <p:nvPr/>
+        </p:nvPicPr>
+        <p:blipFill>
+          <a:blip r:embed="rId2"/>
+          <a:stretch>
+            <a:fillRect/>
+          </a:stretch>
+        </p:blipFill>
+        <p:spPr>
+          <a:xfrm>
+            <a:off x="8420453" y="0"/>
+            <a:ext cx="3771547" cy="6858000"/>
+          </a:xfrm>
+          <a:prstGeom prst="rect">
+            <a:avLst/>
+          </a:prstGeom>
+        </p:spPr>
+      </p:pic>
+      <p:grpSp>
+        <p:nvGrpSpPr>
+          <p:cNvPr id="10" name="Group 9">
+            <a:extLst>
+              <a:ext uri="{FF2B5EF4-FFF2-40B4-BE49-F238E27FC236}">
+                <a16:creationId xmlns:a16="http://schemas.microsoft.com/office/drawing/2014/main" id="{3B96905E-F9CF-4B57-2D46-3E181AD82309}"/>
+              </a:ext>
+            </a:extLst>
+          </p:cNvPr>
+          <p:cNvGrpSpPr/>
+          <p:nvPr/>
+        </p:nvGrpSpPr>
+        <p:grpSpPr>
+          <a:xfrm>
+            <a:off x="5373278" y="4025244"/>
+            <a:ext cx="2833260" cy="2832755"/>
+            <a:chOff x="3771548" y="2903525"/>
+            <a:chExt cx="4029637" cy="3954475"/>
+          </a:xfrm>
+        </p:grpSpPr>
+        <p:pic>
+          <p:nvPicPr>
+            <p:cNvPr id="6" name="Picture 5">
+              <a:extLst>
+                <a:ext uri="{FF2B5EF4-FFF2-40B4-BE49-F238E27FC236}">
+                  <a16:creationId xmlns:a16="http://schemas.microsoft.com/office/drawing/2014/main" id="{6DF9D57C-39FB-120D-3CC6-6DAC9A732C4A}"/>
+                </a:ext>
+              </a:extLst>
+            </p:cNvPr>
+            <p:cNvPicPr>
+              <a:picLocks noChangeAspect="1"/>
+            </p:cNvPicPr>
+            <p:nvPr/>
+          </p:nvPicPr>
+          <p:blipFill>
+            <a:blip r:embed="rId3"/>
+            <a:stretch>
+              <a:fillRect/>
+            </a:stretch>
+          </p:blipFill>
+          <p:spPr>
+            <a:xfrm>
+              <a:off x="3771548" y="2903525"/>
+              <a:ext cx="4029637" cy="762106"/>
+            </a:xfrm>
+            <a:prstGeom prst="rect">
+              <a:avLst/>
+            </a:prstGeom>
+            <a:ln w="38100" cap="sq">
+              <a:solidFill>
+                <a:srgbClr val="000000"/>
+              </a:solidFill>
+              <a:prstDash val="solid"/>
+              <a:miter lim="800000"/>
+            </a:ln>
+            <a:effectLst>
+              <a:outerShdw blurRad="50800" dist="38100" dir="2700000" algn="tl" rotWithShape="0">
+                <a:srgbClr val="000000">
+                  <a:alpha val="43000"/>
+                </a:srgbClr>
+              </a:outerShdw>
+            </a:effectLst>
+          </p:spPr>
+        </p:pic>
+        <p:pic>
+          <p:nvPicPr>
+            <p:cNvPr id="8" name="Picture 7">
+              <a:extLst>
+                <a:ext uri="{FF2B5EF4-FFF2-40B4-BE49-F238E27FC236}">
+                  <a16:creationId xmlns:a16="http://schemas.microsoft.com/office/drawing/2014/main" id="{A595E873-BE3D-6C73-E65E-343BF5375880}"/>
+                </a:ext>
+              </a:extLst>
+            </p:cNvPr>
+            <p:cNvPicPr>
+              <a:picLocks noChangeAspect="1"/>
+            </p:cNvPicPr>
+            <p:nvPr/>
+          </p:nvPicPr>
+          <p:blipFill>
+            <a:blip r:embed="rId4"/>
+            <a:stretch>
+              <a:fillRect/>
+            </a:stretch>
+          </p:blipFill>
+          <p:spPr>
+            <a:xfrm>
+              <a:off x="3777374" y="4213781"/>
+              <a:ext cx="4023811" cy="2644219"/>
+            </a:xfrm>
+            <a:prstGeom prst="rect">
+              <a:avLst/>
+            </a:prstGeom>
+            <a:ln w="38100" cap="sq">
+              <a:solidFill>
+                <a:srgbClr val="000000"/>
+              </a:solidFill>
+              <a:prstDash val="solid"/>
+              <a:miter lim="800000"/>
+            </a:ln>
+            <a:effectLst>
+              <a:outerShdw blurRad="50800" dist="38100" dir="2700000" algn="tl" rotWithShape="0">
+                <a:srgbClr val="000000">
+                  <a:alpha val="43000"/>
+                </a:srgbClr>
+              </a:outerShdw>
+            </a:effectLst>
+          </p:spPr>
+        </p:pic>
+        <p:sp>
+          <p:nvSpPr>
+            <p:cNvPr id="9" name="Arrow: Down 8">
+              <a:extLst>
+                <a:ext uri="{FF2B5EF4-FFF2-40B4-BE49-F238E27FC236}">
+                  <a16:creationId xmlns:a16="http://schemas.microsoft.com/office/drawing/2014/main" id="{A5974E71-60A5-3D5B-46A0-AC7BCD3C4AF5}"/>
+                </a:ext>
+              </a:extLst>
+            </p:cNvPr>
+            <p:cNvSpPr/>
+            <p:nvPr/>
+          </p:nvSpPr>
+          <p:spPr>
+            <a:xfrm>
+              <a:off x="5626110" y="3762029"/>
+              <a:ext cx="320511" cy="355354"/>
+            </a:xfrm>
+            <a:prstGeom prst="downArrow">
+              <a:avLst/>
+            </a:prstGeom>
+          </p:spPr>
+          <p:style>
+            <a:lnRef idx="2">
+              <a:schemeClr val="dk1">
+                <a:shade val="15000"/>
+              </a:schemeClr>
+            </a:lnRef>
+            <a:fillRef idx="1">
+              <a:schemeClr val="dk1"/>
+            </a:fillRef>
+            <a:effectRef idx="0">
+              <a:schemeClr val="dk1"/>
+            </a:effectRef>
+            <a:fontRef idx="minor">
+              <a:schemeClr val="lt1"/>
+            </a:fontRef>
+          </p:style>
+          <p:txBody>
+            <a:bodyPr rtlCol="0" anchor="ctr"/>
+            <a:lstStyle/>
+            <a:p>
+              <a:pPr algn="ctr"/>
+              <a:endParaRPr lang="en-US" sz="1400"/>
+            </a:p>
+          </p:txBody>
+        </p:sp>
+      </p:grpSp>
+    </p:spTree>
+    <p:extLst>
+      <p:ext uri="{BB962C8B-B14F-4D97-AF65-F5344CB8AC3E}">
+        <p14:creationId xmlns:p14="http://schemas.microsoft.com/office/powerpoint/2010/main" val="2486611332"/>
+      </p:ext>
+    </p:extLst>
+  </p:cSld>
+  <p:clrMapOvr>
+    <a:masterClrMapping/>
+  </p:clrMapOvr>
+</p:sld>
+</file>
+
+<file path=ppt/slides/slide10.xml><?xml version="1.0" encoding="utf-8"?>
+<p:sld xmlns:a="http://schemas.openxmlformats.org/drawingml/2006/main" xmlns:r="http://schemas.openxmlformats.org/officeDocument/2006/relationships" xmlns:p="http://schemas.openxmlformats.org/presentationml/2006/main">
+  <p:cSld>
+    <p:spTree>
+      <p:nvGrpSpPr>
+        <p:cNvPr id="1" name="">
+          <a:extLst>
+            <a:ext uri="{FF2B5EF4-FFF2-40B4-BE49-F238E27FC236}">
+              <a16:creationId xmlns:a16="http://schemas.microsoft.com/office/drawing/2014/main" id="{27A3425B-36E7-C297-A941-1CE9AA4B1252}"/>
+            </a:ext>
+          </a:extLst>
+        </p:cNvPr>
+        <p:cNvGrpSpPr/>
+        <p:nvPr/>
+      </p:nvGrpSpPr>
+      <p:grpSpPr>
+        <a:xfrm>
+          <a:off x="0" y="0"/>
+          <a:ext cx="0" cy="0"/>
+          <a:chOff x="0" y="0"/>
+          <a:chExt cx="0" cy="0"/>
+        </a:xfrm>
+      </p:grpSpPr>
+      <p:sp>
+        <p:nvSpPr>
+          <p:cNvPr id="3" name="TextBox 2">
+            <a:extLst>
+              <a:ext uri="{FF2B5EF4-FFF2-40B4-BE49-F238E27FC236}">
+                <a16:creationId xmlns:a16="http://schemas.microsoft.com/office/drawing/2014/main" id="{40A94772-0E92-1914-D97F-0CF222A30993}"/>
+              </a:ext>
+            </a:extLst>
+          </p:cNvPr>
+          <p:cNvSpPr txBox="1"/>
+          <p:nvPr/>
+        </p:nvSpPr>
+        <p:spPr>
+          <a:xfrm>
             <a:off x="217714" y="255046"/>
             <a:ext cx="11756571" cy="355354"/>
           </a:xfrm>
@@ -3387,7 +4791,93 @@
     </p:spTree>
     <p:extLst>
       <p:ext uri="{BB962C8B-B14F-4D97-AF65-F5344CB8AC3E}">
-        <p14:creationId xmlns:p14="http://schemas.microsoft.com/office/powerpoint/2010/main" val="2486611332"/>
+        <p14:creationId xmlns:p14="http://schemas.microsoft.com/office/powerpoint/2010/main" val="800308461"/>
+      </p:ext>
+    </p:extLst>
+  </p:cSld>
+  <p:clrMapOvr>
+    <a:masterClrMapping/>
+  </p:clrMapOvr>
+</p:sld>
+</file>
+
+<file path=ppt/slides/slide11.xml><?xml version="1.0" encoding="utf-8"?>
+<p:sld xmlns:a="http://schemas.openxmlformats.org/drawingml/2006/main" xmlns:r="http://schemas.openxmlformats.org/officeDocument/2006/relationships" xmlns:p="http://schemas.openxmlformats.org/presentationml/2006/main">
+  <p:cSld>
+    <p:spTree>
+      <p:nvGrpSpPr>
+        <p:cNvPr id="1" name="">
+          <a:extLst>
+            <a:ext uri="{FF2B5EF4-FFF2-40B4-BE49-F238E27FC236}">
+              <a16:creationId xmlns:a16="http://schemas.microsoft.com/office/drawing/2014/main" id="{B1AF3A29-DC91-3A90-7443-58C7FA291FD0}"/>
+            </a:ext>
+          </a:extLst>
+        </p:cNvPr>
+        <p:cNvGrpSpPr/>
+        <p:nvPr/>
+      </p:nvGrpSpPr>
+      <p:grpSpPr>
+        <a:xfrm>
+          <a:off x="0" y="0"/>
+          <a:ext cx="0" cy="0"/>
+          <a:chOff x="0" y="0"/>
+          <a:chExt cx="0" cy="0"/>
+        </a:xfrm>
+      </p:grpSpPr>
+      <p:sp>
+        <p:nvSpPr>
+          <p:cNvPr id="3" name="TextBox 2">
+            <a:extLst>
+              <a:ext uri="{FF2B5EF4-FFF2-40B4-BE49-F238E27FC236}">
+                <a16:creationId xmlns:a16="http://schemas.microsoft.com/office/drawing/2014/main" id="{4BABC221-976C-A0DD-30E7-FACFF7D3D8F0}"/>
+              </a:ext>
+            </a:extLst>
+          </p:cNvPr>
+          <p:cNvSpPr txBox="1"/>
+          <p:nvPr/>
+        </p:nvSpPr>
+        <p:spPr>
+          <a:xfrm>
+            <a:off x="217714" y="255046"/>
+            <a:ext cx="11756571" cy="355354"/>
+          </a:xfrm>
+          <a:prstGeom prst="rect">
+            <a:avLst/>
+          </a:prstGeom>
+          <a:noFill/>
+        </p:spPr>
+        <p:txBody>
+          <a:bodyPr wrap="square">
+            <a:spAutoFit/>
+          </a:bodyPr>
+          <a:lstStyle/>
+          <a:p>
+            <a:pPr>
+              <a:lnSpc>
+                <a:spcPct val="150000"/>
+              </a:lnSpc>
+              <a:buNone/>
+            </a:pPr>
+            <a:r>
+              <a:rPr kumimoji="0" lang="en-US" altLang="en-US" sz="1300" b="0" i="0" u="none" strike="noStrike" cap="none" normalizeH="0" baseline="0">
+                <a:ln>
+                  <a:noFill/>
+                </a:ln>
+                <a:solidFill>
+                  <a:schemeClr val="tx1"/>
+                </a:solidFill>
+                <a:effectLst/>
+                <a:latin typeface="Arial" panose="020B0604020202020204" pitchFamily="34" charset="0"/>
+              </a:rPr>
+              <a:t>.</a:t>
+            </a:r>
+          </a:p>
+        </p:txBody>
+      </p:sp>
+    </p:spTree>
+    <p:extLst>
+      <p:ext uri="{BB962C8B-B14F-4D97-AF65-F5344CB8AC3E}">
+        <p14:creationId xmlns:p14="http://schemas.microsoft.com/office/powerpoint/2010/main" val="2130435534"/>
       </p:ext>
     </p:extLst>
   </p:cSld>
@@ -3435,7 +4925,7 @@
         <p:spPr>
           <a:xfrm>
             <a:off x="217714" y="255046"/>
-            <a:ext cx="11756571" cy="355354"/>
+            <a:ext cx="11756571" cy="2455929"/>
           </a:xfrm>
           <a:prstGeom prst="rect">
             <a:avLst/>
@@ -3455,6 +4945,19 @@
               <a:buNone/>
             </a:pPr>
             <a:r>
+              <a:rPr kumimoji="0" lang="en-US" altLang="en-US" sz="1300" b="1" i="0" u="none" strike="noStrike" cap="none" normalizeH="0" baseline="0">
+                <a:ln>
+                  <a:noFill/>
+                </a:ln>
+                <a:solidFill>
+                  <a:schemeClr val="tx1"/>
+                </a:solidFill>
+                <a:effectLst/>
+                <a:latin typeface="Arial" panose="020B0604020202020204" pitchFamily="34" charset="0"/>
+              </a:rPr>
+              <a:t>Açıqlama</a:t>
+            </a:r>
+            <a:r>
               <a:rPr kumimoji="0" lang="en-US" altLang="en-US" sz="1300" b="0" i="0" u="none" strike="noStrike" cap="none" normalizeH="0" baseline="0">
                 <a:ln>
                   <a:noFill/>
@@ -3465,11 +4968,359 @@
                 <a:effectLst/>
                 <a:latin typeface="Arial" panose="020B0604020202020204" pitchFamily="34" charset="0"/>
               </a:rPr>
-              <a:t>.</a:t>
-            </a:r>
+              <a:t>:</a:t>
+            </a:r>
+          </a:p>
+          <a:p>
+            <a:pPr>
+              <a:lnSpc>
+                <a:spcPct val="150000"/>
+              </a:lnSpc>
+              <a:buNone/>
+            </a:pPr>
+            <a:endParaRPr kumimoji="0" lang="en-US" altLang="en-US" sz="1300" b="0" i="0" u="none" strike="noStrike" cap="none" normalizeH="0" baseline="0">
+              <a:ln>
+                <a:noFill/>
+              </a:ln>
+              <a:solidFill>
+                <a:schemeClr val="tx1"/>
+              </a:solidFill>
+              <a:effectLst/>
+              <a:latin typeface="Arial" panose="020B0604020202020204" pitchFamily="34" charset="0"/>
+            </a:endParaRPr>
+          </a:p>
+          <a:p>
+            <a:pPr>
+              <a:lnSpc>
+                <a:spcPct val="150000"/>
+              </a:lnSpc>
+              <a:buNone/>
+            </a:pPr>
+            <a:r>
+              <a:rPr kumimoji="0" lang="en-US" altLang="en-US" sz="1300" b="1" i="0" u="none" strike="noStrike" cap="none" normalizeH="0" baseline="0">
+                <a:ln>
+                  <a:noFill/>
+                </a:ln>
+                <a:solidFill>
+                  <a:schemeClr val="tx1"/>
+                </a:solidFill>
+                <a:effectLst/>
+                <a:latin typeface="Arial" panose="020B0604020202020204" pitchFamily="34" charset="0"/>
+              </a:rPr>
+              <a:t>put([ 'a' =&gt; 'b', 'c' =&gt; 'd' ]) </a:t>
+            </a:r>
+            <a:r>
+              <a:rPr kumimoji="0" lang="en-US" altLang="en-US" sz="1300" b="0" i="0" u="none" strike="noStrike" cap="none" normalizeH="0" baseline="0">
+                <a:ln>
+                  <a:noFill/>
+                </a:ln>
+                <a:solidFill>
+                  <a:schemeClr val="tx1"/>
+                </a:solidFill>
+                <a:effectLst/>
+                <a:latin typeface="Arial" panose="020B0604020202020204" pitchFamily="34" charset="0"/>
+              </a:rPr>
+              <a:t>metodu ilə birdən çox </a:t>
+            </a:r>
+            <a:r>
+              <a:rPr kumimoji="0" lang="en-US" altLang="en-US" sz="1300" b="1" i="0" u="none" strike="noStrike" cap="none" normalizeH="0" baseline="0">
+                <a:ln>
+                  <a:noFill/>
+                </a:ln>
+                <a:solidFill>
+                  <a:schemeClr val="tx1"/>
+                </a:solidFill>
+                <a:effectLst/>
+                <a:latin typeface="Arial" panose="020B0604020202020204" pitchFamily="34" charset="0"/>
+              </a:rPr>
+              <a:t>key=&gt;value </a:t>
+            </a:r>
+            <a:r>
+              <a:rPr kumimoji="0" lang="en-US" altLang="en-US" sz="1300" b="0" i="0" u="none" strike="noStrike" cap="none" normalizeH="0" baseline="0">
+                <a:ln>
+                  <a:noFill/>
+                </a:ln>
+                <a:solidFill>
+                  <a:schemeClr val="tx1"/>
+                </a:solidFill>
+                <a:effectLst/>
+                <a:latin typeface="Arial" panose="020B0604020202020204" pitchFamily="34" charset="0"/>
+              </a:rPr>
+              <a:t>cütü sessiyaya bir anda yazılır.</a:t>
+            </a:r>
+          </a:p>
+          <a:p>
+            <a:pPr>
+              <a:lnSpc>
+                <a:spcPct val="150000"/>
+              </a:lnSpc>
+              <a:buNone/>
+            </a:pPr>
+            <a:endParaRPr kumimoji="0" lang="en-US" altLang="en-US" sz="1300" b="0" i="0" u="none" strike="noStrike" cap="none" normalizeH="0" baseline="0">
+              <a:ln>
+                <a:noFill/>
+              </a:ln>
+              <a:solidFill>
+                <a:schemeClr val="tx1"/>
+              </a:solidFill>
+              <a:effectLst/>
+              <a:latin typeface="Arial" panose="020B0604020202020204" pitchFamily="34" charset="0"/>
+            </a:endParaRPr>
+          </a:p>
+          <a:p>
+            <a:pPr>
+              <a:lnSpc>
+                <a:spcPct val="150000"/>
+              </a:lnSpc>
+              <a:buNone/>
+            </a:pPr>
+            <a:r>
+              <a:rPr kumimoji="0" lang="en-US" altLang="en-US" sz="1300" b="0" i="0" u="none" strike="noStrike" cap="none" normalizeH="0" baseline="0">
+                <a:ln>
+                  <a:noFill/>
+                </a:ln>
+                <a:solidFill>
+                  <a:schemeClr val="tx1"/>
+                </a:solidFill>
+                <a:effectLst/>
+                <a:latin typeface="Arial" panose="020B0604020202020204" pitchFamily="34" charset="0"/>
+              </a:rPr>
+              <a:t>Əvvəlki sessiya məlumatları silinmir — əlavə olunur və ya eyni açar varsa əvəzlənir.</a:t>
+            </a:r>
+          </a:p>
+          <a:p>
+            <a:pPr>
+              <a:lnSpc>
+                <a:spcPct val="150000"/>
+              </a:lnSpc>
+              <a:buNone/>
+            </a:pPr>
+            <a:endParaRPr lang="en-US" altLang="en-US" sz="1300">
+              <a:latin typeface="Arial" panose="020B0604020202020204" pitchFamily="34" charset="0"/>
+            </a:endParaRPr>
+          </a:p>
+          <a:p>
+            <a:pPr>
+              <a:lnSpc>
+                <a:spcPct val="150000"/>
+              </a:lnSpc>
+              <a:buNone/>
+            </a:pPr>
+            <a:endParaRPr kumimoji="0" lang="en-US" altLang="en-US" sz="1300" b="0" i="0" u="none" strike="noStrike" cap="none" normalizeH="0" baseline="0">
+              <a:ln>
+                <a:noFill/>
+              </a:ln>
+              <a:solidFill>
+                <a:schemeClr val="tx1"/>
+              </a:solidFill>
+              <a:effectLst/>
+              <a:latin typeface="Arial" panose="020B0604020202020204" pitchFamily="34" charset="0"/>
+            </a:endParaRPr>
+          </a:p>
+          <a:p>
+            <a:pPr>
+              <a:lnSpc>
+                <a:spcPct val="150000"/>
+              </a:lnSpc>
+              <a:buNone/>
+            </a:pPr>
+            <a:endParaRPr kumimoji="0" lang="en-US" altLang="en-US" sz="1300" b="0" i="0" u="none" strike="noStrike" cap="none" normalizeH="0" baseline="0">
+              <a:ln>
+                <a:noFill/>
+              </a:ln>
+              <a:solidFill>
+                <a:schemeClr val="tx1"/>
+              </a:solidFill>
+              <a:effectLst/>
+              <a:latin typeface="Arial" panose="020B0604020202020204" pitchFamily="34" charset="0"/>
+            </a:endParaRPr>
           </a:p>
         </p:txBody>
       </p:sp>
+      <p:pic>
+        <p:nvPicPr>
+          <p:cNvPr id="4" name="Picture 3">
+            <a:extLst>
+              <a:ext uri="{FF2B5EF4-FFF2-40B4-BE49-F238E27FC236}">
+                <a16:creationId xmlns:a16="http://schemas.microsoft.com/office/drawing/2014/main" id="{8A817624-E8BB-A44E-CD63-88CF46B8D585}"/>
+              </a:ext>
+            </a:extLst>
+          </p:cNvPr>
+          <p:cNvPicPr>
+            <a:picLocks noChangeAspect="1"/>
+          </p:cNvPicPr>
+          <p:nvPr/>
+        </p:nvPicPr>
+        <p:blipFill>
+          <a:blip r:embed="rId2"/>
+          <a:stretch>
+            <a:fillRect/>
+          </a:stretch>
+        </p:blipFill>
+        <p:spPr>
+          <a:xfrm>
+            <a:off x="8562123" y="0"/>
+            <a:ext cx="3629877" cy="6858000"/>
+          </a:xfrm>
+          <a:prstGeom prst="rect">
+            <a:avLst/>
+          </a:prstGeom>
+        </p:spPr>
+      </p:pic>
+      <p:grpSp>
+        <p:nvGrpSpPr>
+          <p:cNvPr id="10" name="Group 9">
+            <a:extLst>
+              <a:ext uri="{FF2B5EF4-FFF2-40B4-BE49-F238E27FC236}">
+                <a16:creationId xmlns:a16="http://schemas.microsoft.com/office/drawing/2014/main" id="{496BAFD2-D444-204A-254A-C2F9806D5F9C}"/>
+              </a:ext>
+            </a:extLst>
+          </p:cNvPr>
+          <p:cNvGrpSpPr/>
+          <p:nvPr/>
+        </p:nvGrpSpPr>
+        <p:grpSpPr>
+          <a:xfrm>
+            <a:off x="4709507" y="2801178"/>
+            <a:ext cx="3641254" cy="3986122"/>
+            <a:chOff x="4492691" y="2867166"/>
+            <a:chExt cx="3641254" cy="3986122"/>
+          </a:xfrm>
+        </p:grpSpPr>
+        <p:pic>
+          <p:nvPicPr>
+            <p:cNvPr id="6" name="Picture 5">
+              <a:extLst>
+                <a:ext uri="{FF2B5EF4-FFF2-40B4-BE49-F238E27FC236}">
+                  <a16:creationId xmlns:a16="http://schemas.microsoft.com/office/drawing/2014/main" id="{437D944D-0B01-A77A-E04E-42BB397F6599}"/>
+                </a:ext>
+              </a:extLst>
+            </p:cNvPr>
+            <p:cNvPicPr>
+              <a:picLocks noChangeAspect="1"/>
+            </p:cNvPicPr>
+            <p:nvPr/>
+          </p:nvPicPr>
+          <p:blipFill>
+            <a:blip r:embed="rId3"/>
+            <a:stretch>
+              <a:fillRect/>
+            </a:stretch>
+          </p:blipFill>
+          <p:spPr>
+            <a:xfrm>
+              <a:off x="4504068" y="2867166"/>
+              <a:ext cx="3629877" cy="792308"/>
+            </a:xfrm>
+            <a:prstGeom prst="rect">
+              <a:avLst/>
+            </a:prstGeom>
+            <a:ln w="38100" cap="sq">
+              <a:solidFill>
+                <a:srgbClr val="000000"/>
+              </a:solidFill>
+              <a:prstDash val="solid"/>
+              <a:miter lim="800000"/>
+            </a:ln>
+            <a:effectLst>
+              <a:outerShdw blurRad="50800" dist="38100" dir="2700000" algn="tl" rotWithShape="0">
+                <a:srgbClr val="000000">
+                  <a:alpha val="43000"/>
+                </a:srgbClr>
+              </a:outerShdw>
+            </a:effectLst>
+          </p:spPr>
+        </p:pic>
+        <p:pic>
+          <p:nvPicPr>
+            <p:cNvPr id="8" name="Picture 7">
+              <a:extLst>
+                <a:ext uri="{FF2B5EF4-FFF2-40B4-BE49-F238E27FC236}">
+                  <a16:creationId xmlns:a16="http://schemas.microsoft.com/office/drawing/2014/main" id="{62D21B5D-8BD2-A682-7633-4C2E65C3D002}"/>
+                </a:ext>
+              </a:extLst>
+            </p:cNvPr>
+            <p:cNvPicPr>
+              <a:picLocks noChangeAspect="1"/>
+            </p:cNvPicPr>
+            <p:nvPr/>
+          </p:nvPicPr>
+          <p:blipFill>
+            <a:blip r:embed="rId4"/>
+            <a:srcRect b="2431"/>
+            <a:stretch/>
+          </p:blipFill>
+          <p:spPr>
+            <a:xfrm>
+              <a:off x="4492691" y="4015819"/>
+              <a:ext cx="3641254" cy="2837469"/>
+            </a:xfrm>
+            <a:prstGeom prst="rect">
+              <a:avLst/>
+            </a:prstGeom>
+            <a:ln w="38100" cap="sq">
+              <a:solidFill>
+                <a:srgbClr val="000000"/>
+              </a:solidFill>
+              <a:prstDash val="solid"/>
+              <a:miter lim="800000"/>
+            </a:ln>
+            <a:effectLst>
+              <a:outerShdw blurRad="50800" dist="38100" dir="2700000" algn="tl" rotWithShape="0">
+                <a:srgbClr val="000000">
+                  <a:alpha val="43000"/>
+                </a:srgbClr>
+              </a:outerShdw>
+            </a:effectLst>
+          </p:spPr>
+        </p:pic>
+        <p:sp>
+          <p:nvSpPr>
+            <p:cNvPr id="9" name="Arrow: Down 8">
+              <a:extLst>
+                <a:ext uri="{FF2B5EF4-FFF2-40B4-BE49-F238E27FC236}">
+                  <a16:creationId xmlns:a16="http://schemas.microsoft.com/office/drawing/2014/main" id="{CD14785B-6B01-6E25-B401-20007241BC9F}"/>
+                </a:ext>
+              </a:extLst>
+            </p:cNvPr>
+            <p:cNvSpPr/>
+            <p:nvPr/>
+          </p:nvSpPr>
+          <p:spPr>
+            <a:xfrm>
+              <a:off x="6231118" y="3683517"/>
+              <a:ext cx="349888" cy="308258"/>
+            </a:xfrm>
+            <a:prstGeom prst="downArrow">
+              <a:avLst/>
+            </a:prstGeom>
+          </p:spPr>
+          <p:style>
+            <a:lnRef idx="2">
+              <a:schemeClr val="dk1">
+                <a:shade val="15000"/>
+              </a:schemeClr>
+            </a:lnRef>
+            <a:fillRef idx="1">
+              <a:schemeClr val="dk1"/>
+            </a:fillRef>
+            <a:effectRef idx="0">
+              <a:schemeClr val="dk1"/>
+            </a:effectRef>
+            <a:fontRef idx="minor">
+              <a:schemeClr val="lt1"/>
+            </a:fontRef>
+          </p:style>
+          <p:txBody>
+            <a:bodyPr rtlCol="0" anchor="ctr"/>
+            <a:lstStyle/>
+            <a:p>
+              <a:pPr algn="ctr"/>
+              <a:endParaRPr lang="en-US"/>
+            </a:p>
+          </p:txBody>
+        </p:sp>
+      </p:grpSp>
     </p:spTree>
     <p:extLst>
       <p:ext uri="{BB962C8B-B14F-4D97-AF65-F5344CB8AC3E}">
@@ -3521,6 +5372,525 @@
         <p:spPr>
           <a:xfrm>
             <a:off x="217714" y="255046"/>
+            <a:ext cx="7606533" cy="3333092"/>
+          </a:xfrm>
+          <a:prstGeom prst="rect">
+            <a:avLst/>
+          </a:prstGeom>
+          <a:noFill/>
+        </p:spPr>
+        <p:txBody>
+          <a:bodyPr wrap="square">
+            <a:spAutoFit/>
+          </a:bodyPr>
+          <a:lstStyle/>
+          <a:p>
+            <a:pPr>
+              <a:lnSpc>
+                <a:spcPct val="150000"/>
+              </a:lnSpc>
+              <a:buNone/>
+            </a:pPr>
+            <a:r>
+              <a:rPr kumimoji="0" lang="en-US" altLang="en-US" sz="1100" b="1" i="0" u="none" strike="noStrike" cap="none" normalizeH="0" baseline="0">
+                <a:ln>
+                  <a:noFill/>
+                </a:ln>
+                <a:solidFill>
+                  <a:schemeClr val="tx1"/>
+                </a:solidFill>
+                <a:effectLst/>
+                <a:latin typeface="Arial" panose="020B0604020202020204" pitchFamily="34" charset="0"/>
+              </a:rPr>
+              <a:t>Açıqlama</a:t>
+            </a:r>
+            <a:r>
+              <a:rPr kumimoji="0" lang="en-US" altLang="en-US" sz="1100" b="0" i="0" u="none" strike="noStrike" cap="none" normalizeH="0" baseline="0">
+                <a:ln>
+                  <a:noFill/>
+                </a:ln>
+                <a:solidFill>
+                  <a:schemeClr val="tx1"/>
+                </a:solidFill>
+                <a:effectLst/>
+                <a:latin typeface="Arial" panose="020B0604020202020204" pitchFamily="34" charset="0"/>
+              </a:rPr>
+              <a:t>:</a:t>
+            </a:r>
+          </a:p>
+          <a:p>
+            <a:pPr>
+              <a:lnSpc>
+                <a:spcPct val="150000"/>
+              </a:lnSpc>
+              <a:buNone/>
+            </a:pPr>
+            <a:endParaRPr kumimoji="0" lang="en-US" altLang="en-US" sz="1100" b="0" i="0" u="none" strike="noStrike" cap="none" normalizeH="0" baseline="0">
+              <a:ln>
+                <a:noFill/>
+              </a:ln>
+              <a:solidFill>
+                <a:schemeClr val="tx1"/>
+              </a:solidFill>
+              <a:effectLst/>
+              <a:latin typeface="Arial" panose="020B0604020202020204" pitchFamily="34" charset="0"/>
+            </a:endParaRPr>
+          </a:p>
+          <a:p>
+            <a:pPr marL="171450" indent="-171450">
+              <a:lnSpc>
+                <a:spcPct val="150000"/>
+              </a:lnSpc>
+              <a:buFont typeface="Arial" panose="020B0604020202020204" pitchFamily="34" charset="0"/>
+              <a:buChar char="•"/>
+            </a:pPr>
+            <a:r>
+              <a:rPr kumimoji="0" lang="en-US" altLang="en-US" sz="1100" b="0" i="0" u="none" strike="noStrike" cap="none" normalizeH="0" baseline="0">
+                <a:ln>
+                  <a:noFill/>
+                </a:ln>
+                <a:solidFill>
+                  <a:schemeClr val="tx1"/>
+                </a:solidFill>
+                <a:effectLst/>
+                <a:latin typeface="Arial" panose="020B0604020202020204" pitchFamily="34" charset="0"/>
+              </a:rPr>
+              <a:t>Burada </a:t>
+            </a:r>
+            <a:r>
+              <a:rPr kumimoji="0" lang="en-US" altLang="en-US" sz="1100" b="1" i="0" u="none" strike="noStrike" cap="none" normalizeH="0" baseline="0">
+                <a:ln>
+                  <a:noFill/>
+                </a:ln>
+                <a:solidFill>
+                  <a:schemeClr val="tx1"/>
+                </a:solidFill>
+                <a:effectLst/>
+                <a:latin typeface="Arial" panose="020B0604020202020204" pitchFamily="34" charset="0"/>
+              </a:rPr>
+              <a:t>$request </a:t>
+            </a:r>
+            <a:r>
+              <a:rPr kumimoji="0" lang="en-US" altLang="en-US" sz="1100" b="0" i="0" u="none" strike="noStrike" cap="none" normalizeH="0" baseline="0">
+                <a:ln>
+                  <a:noFill/>
+                </a:ln>
+                <a:solidFill>
+                  <a:schemeClr val="tx1"/>
+                </a:solidFill>
+                <a:effectLst/>
+                <a:latin typeface="Arial" panose="020B0604020202020204" pitchFamily="34" charset="0"/>
+              </a:rPr>
+              <a:t>obyektinə ehtiyac yoxdur.</a:t>
+            </a:r>
+          </a:p>
+          <a:p>
+            <a:pPr marL="171450" indent="-171450">
+              <a:lnSpc>
+                <a:spcPct val="150000"/>
+              </a:lnSpc>
+              <a:buFont typeface="Arial" panose="020B0604020202020204" pitchFamily="34" charset="0"/>
+              <a:buChar char="•"/>
+            </a:pPr>
+            <a:endParaRPr kumimoji="0" lang="en-US" altLang="en-US" sz="1100" b="0" i="0" u="none" strike="noStrike" cap="none" normalizeH="0" baseline="0">
+              <a:ln>
+                <a:noFill/>
+              </a:ln>
+              <a:solidFill>
+                <a:schemeClr val="tx1"/>
+              </a:solidFill>
+              <a:effectLst/>
+              <a:latin typeface="Arial" panose="020B0604020202020204" pitchFamily="34" charset="0"/>
+            </a:endParaRPr>
+          </a:p>
+          <a:p>
+            <a:pPr marL="171450" indent="-171450">
+              <a:lnSpc>
+                <a:spcPct val="150000"/>
+              </a:lnSpc>
+              <a:buFont typeface="Arial" panose="020B0604020202020204" pitchFamily="34" charset="0"/>
+              <a:buChar char="•"/>
+            </a:pPr>
+            <a:r>
+              <a:rPr kumimoji="0" lang="en-US" altLang="en-US" sz="1100" b="1" i="0" u="none" strike="noStrike" cap="none" normalizeH="0" baseline="0">
+                <a:ln>
+                  <a:noFill/>
+                </a:ln>
+                <a:solidFill>
+                  <a:schemeClr val="tx1"/>
+                </a:solidFill>
+                <a:effectLst/>
+                <a:latin typeface="Arial" panose="020B0604020202020204" pitchFamily="34" charset="0"/>
+              </a:rPr>
+              <a:t>session(['key' =&gt; 'value'])</a:t>
+            </a:r>
+            <a:r>
+              <a:rPr kumimoji="0" lang="en-US" altLang="en-US" sz="1100" b="0" i="0" u="none" strike="noStrike" cap="none" normalizeH="0" baseline="0">
+                <a:ln>
+                  <a:noFill/>
+                </a:ln>
+                <a:solidFill>
+                  <a:schemeClr val="tx1"/>
+                </a:solidFill>
+                <a:effectLst/>
+                <a:latin typeface="Arial" panose="020B0604020202020204" pitchFamily="34" charset="0"/>
+              </a:rPr>
+              <a:t> ilə sessiya məlumatları əlavə edilir.</a:t>
+            </a:r>
+          </a:p>
+          <a:p>
+            <a:pPr marL="171450" indent="-171450">
+              <a:lnSpc>
+                <a:spcPct val="150000"/>
+              </a:lnSpc>
+              <a:buFont typeface="Arial" panose="020B0604020202020204" pitchFamily="34" charset="0"/>
+              <a:buChar char="•"/>
+            </a:pPr>
+            <a:endParaRPr kumimoji="0" lang="en-US" altLang="en-US" sz="1100" b="0" i="0" u="none" strike="noStrike" cap="none" normalizeH="0" baseline="0">
+              <a:ln>
+                <a:noFill/>
+              </a:ln>
+              <a:solidFill>
+                <a:schemeClr val="tx1"/>
+              </a:solidFill>
+              <a:effectLst/>
+              <a:latin typeface="Arial" panose="020B0604020202020204" pitchFamily="34" charset="0"/>
+            </a:endParaRPr>
+          </a:p>
+          <a:p>
+            <a:pPr marL="171450" indent="-171450">
+              <a:lnSpc>
+                <a:spcPct val="150000"/>
+              </a:lnSpc>
+              <a:buFont typeface="Arial" panose="020B0604020202020204" pitchFamily="34" charset="0"/>
+              <a:buChar char="•"/>
+            </a:pPr>
+            <a:r>
+              <a:rPr kumimoji="0" lang="en-US" altLang="en-US" sz="1100" b="0" i="0" u="none" strike="noStrike" cap="none" normalizeH="0" baseline="0">
+                <a:ln>
+                  <a:noFill/>
+                </a:ln>
+                <a:solidFill>
+                  <a:schemeClr val="tx1"/>
+                </a:solidFill>
+                <a:effectLst/>
+                <a:latin typeface="Arial" panose="020B0604020202020204" pitchFamily="34" charset="0"/>
+              </a:rPr>
+              <a:t>Bu metod daha qısa və oxunaqlıdır, lakin Laravel arxada yenə də eyni </a:t>
+            </a:r>
+            <a:r>
+              <a:rPr kumimoji="0" lang="en-US" altLang="en-US" sz="1100" b="1" i="0" u="none" strike="noStrike" cap="none" normalizeH="0" baseline="0">
+                <a:ln>
+                  <a:noFill/>
+                </a:ln>
+                <a:solidFill>
+                  <a:srgbClr val="FF0000"/>
+                </a:solidFill>
+                <a:effectLst/>
+                <a:latin typeface="Arial" panose="020B0604020202020204" pitchFamily="34" charset="0"/>
+              </a:rPr>
+              <a:t>SessionManager</a:t>
+            </a:r>
+            <a:r>
+              <a:rPr kumimoji="0" lang="en-US" altLang="en-US" sz="1100" b="0" i="0" u="none" strike="noStrike" cap="none" normalizeH="0" baseline="0">
+                <a:ln>
+                  <a:noFill/>
+                </a:ln>
+                <a:solidFill>
+                  <a:schemeClr val="tx1"/>
+                </a:solidFill>
+                <a:effectLst/>
+                <a:latin typeface="Arial" panose="020B0604020202020204" pitchFamily="34" charset="0"/>
+              </a:rPr>
+              <a:t> obyektindən istifadə edir.</a:t>
+            </a:r>
+          </a:p>
+          <a:p>
+            <a:pPr>
+              <a:lnSpc>
+                <a:spcPct val="150000"/>
+              </a:lnSpc>
+              <a:buNone/>
+            </a:pPr>
+            <a:endParaRPr lang="en-US" altLang="en-US" sz="1300">
+              <a:latin typeface="Arial" panose="020B0604020202020204" pitchFamily="34" charset="0"/>
+            </a:endParaRPr>
+          </a:p>
+          <a:p>
+            <a:pPr>
+              <a:lnSpc>
+                <a:spcPct val="150000"/>
+              </a:lnSpc>
+              <a:buNone/>
+            </a:pPr>
+            <a:endParaRPr kumimoji="0" lang="en-US" altLang="en-US" sz="1300" b="0" i="0" u="none" strike="noStrike" cap="none" normalizeH="0" baseline="0">
+              <a:ln>
+                <a:noFill/>
+              </a:ln>
+              <a:solidFill>
+                <a:schemeClr val="tx1"/>
+              </a:solidFill>
+              <a:effectLst/>
+              <a:latin typeface="Arial" panose="020B0604020202020204" pitchFamily="34" charset="0"/>
+            </a:endParaRPr>
+          </a:p>
+          <a:p>
+            <a:pPr>
+              <a:lnSpc>
+                <a:spcPct val="150000"/>
+              </a:lnSpc>
+              <a:buNone/>
+            </a:pPr>
+            <a:endParaRPr lang="en-US" altLang="en-US" sz="1300">
+              <a:latin typeface="Arial" panose="020B0604020202020204" pitchFamily="34" charset="0"/>
+            </a:endParaRPr>
+          </a:p>
+          <a:p>
+            <a:pPr>
+              <a:lnSpc>
+                <a:spcPct val="150000"/>
+              </a:lnSpc>
+              <a:buNone/>
+            </a:pPr>
+            <a:endParaRPr kumimoji="0" lang="en-US" altLang="en-US" sz="1300" b="0" i="0" u="none" strike="noStrike" cap="none" normalizeH="0" baseline="0">
+              <a:ln>
+                <a:noFill/>
+              </a:ln>
+              <a:solidFill>
+                <a:schemeClr val="tx1"/>
+              </a:solidFill>
+              <a:effectLst/>
+              <a:latin typeface="Arial" panose="020B0604020202020204" pitchFamily="34" charset="0"/>
+            </a:endParaRPr>
+          </a:p>
+          <a:p>
+            <a:pPr>
+              <a:lnSpc>
+                <a:spcPct val="150000"/>
+              </a:lnSpc>
+              <a:buNone/>
+            </a:pPr>
+            <a:endParaRPr kumimoji="0" lang="en-US" altLang="en-US" sz="1300" b="0" i="0" u="none" strike="noStrike" cap="none" normalizeH="0" baseline="0">
+              <a:ln>
+                <a:noFill/>
+              </a:ln>
+              <a:solidFill>
+                <a:schemeClr val="tx1"/>
+              </a:solidFill>
+              <a:effectLst/>
+              <a:latin typeface="Arial" panose="020B0604020202020204" pitchFamily="34" charset="0"/>
+            </a:endParaRPr>
+          </a:p>
+        </p:txBody>
+      </p:sp>
+      <p:pic>
+        <p:nvPicPr>
+          <p:cNvPr id="4" name="Picture 3">
+            <a:extLst>
+              <a:ext uri="{FF2B5EF4-FFF2-40B4-BE49-F238E27FC236}">
+                <a16:creationId xmlns:a16="http://schemas.microsoft.com/office/drawing/2014/main" id="{0DBFB77E-2DAB-CAA6-9DC5-782B632D392B}"/>
+              </a:ext>
+            </a:extLst>
+          </p:cNvPr>
+          <p:cNvPicPr>
+            <a:picLocks noChangeAspect="1"/>
+          </p:cNvPicPr>
+          <p:nvPr/>
+        </p:nvPicPr>
+        <p:blipFill>
+          <a:blip r:embed="rId2"/>
+          <a:stretch>
+            <a:fillRect/>
+          </a:stretch>
+        </p:blipFill>
+        <p:spPr>
+          <a:xfrm>
+            <a:off x="8011494" y="0"/>
+            <a:ext cx="4180506" cy="6858000"/>
+          </a:xfrm>
+          <a:prstGeom prst="rect">
+            <a:avLst/>
+          </a:prstGeom>
+        </p:spPr>
+      </p:pic>
+      <p:grpSp>
+        <p:nvGrpSpPr>
+          <p:cNvPr id="10" name="Group 9">
+            <a:extLst>
+              <a:ext uri="{FF2B5EF4-FFF2-40B4-BE49-F238E27FC236}">
+                <a16:creationId xmlns:a16="http://schemas.microsoft.com/office/drawing/2014/main" id="{9124B397-4289-25C0-F184-78A08A7A7DD2}"/>
+              </a:ext>
+            </a:extLst>
+          </p:cNvPr>
+          <p:cNvGrpSpPr/>
+          <p:nvPr/>
+        </p:nvGrpSpPr>
+        <p:grpSpPr>
+          <a:xfrm>
+            <a:off x="4008044" y="2734176"/>
+            <a:ext cx="3685718" cy="4123824"/>
+            <a:chOff x="3876069" y="2734176"/>
+            <a:chExt cx="3685718" cy="4123824"/>
+          </a:xfrm>
+        </p:grpSpPr>
+        <p:pic>
+          <p:nvPicPr>
+            <p:cNvPr id="6" name="Picture 5">
+              <a:extLst>
+                <a:ext uri="{FF2B5EF4-FFF2-40B4-BE49-F238E27FC236}">
+                  <a16:creationId xmlns:a16="http://schemas.microsoft.com/office/drawing/2014/main" id="{841EB03B-D0BC-0AAF-97BA-F8FE69AC545B}"/>
+                </a:ext>
+              </a:extLst>
+            </p:cNvPr>
+            <p:cNvPicPr>
+              <a:picLocks noChangeAspect="1"/>
+            </p:cNvPicPr>
+            <p:nvPr/>
+          </p:nvPicPr>
+          <p:blipFill>
+            <a:blip r:embed="rId3"/>
+            <a:stretch>
+              <a:fillRect/>
+            </a:stretch>
+          </p:blipFill>
+          <p:spPr>
+            <a:xfrm>
+              <a:off x="3876069" y="2734176"/>
+              <a:ext cx="3685718" cy="650421"/>
+            </a:xfrm>
+            <a:prstGeom prst="rect">
+              <a:avLst/>
+            </a:prstGeom>
+          </p:spPr>
+        </p:pic>
+        <p:pic>
+          <p:nvPicPr>
+            <p:cNvPr id="8" name="Picture 7">
+              <a:extLst>
+                <a:ext uri="{FF2B5EF4-FFF2-40B4-BE49-F238E27FC236}">
+                  <a16:creationId xmlns:a16="http://schemas.microsoft.com/office/drawing/2014/main" id="{0AF84A4C-B93F-C16D-00BF-7FE3B96A6413}"/>
+                </a:ext>
+              </a:extLst>
+            </p:cNvPr>
+            <p:cNvPicPr>
+              <a:picLocks noChangeAspect="1"/>
+            </p:cNvPicPr>
+            <p:nvPr/>
+          </p:nvPicPr>
+          <p:blipFill>
+            <a:blip r:embed="rId4"/>
+            <a:stretch>
+              <a:fillRect/>
+            </a:stretch>
+          </p:blipFill>
+          <p:spPr>
+            <a:xfrm>
+              <a:off x="3876069" y="3798613"/>
+              <a:ext cx="3685718" cy="3059387"/>
+            </a:xfrm>
+            <a:prstGeom prst="rect">
+              <a:avLst/>
+            </a:prstGeom>
+          </p:spPr>
+        </p:pic>
+        <p:sp>
+          <p:nvSpPr>
+            <p:cNvPr id="9" name="Arrow: Down 8">
+              <a:extLst>
+                <a:ext uri="{FF2B5EF4-FFF2-40B4-BE49-F238E27FC236}">
+                  <a16:creationId xmlns:a16="http://schemas.microsoft.com/office/drawing/2014/main" id="{CC340814-9690-FA4C-9929-61054537318A}"/>
+                </a:ext>
+              </a:extLst>
+            </p:cNvPr>
+            <p:cNvSpPr/>
+            <p:nvPr/>
+          </p:nvSpPr>
+          <p:spPr>
+            <a:xfrm>
+              <a:off x="5558672" y="3429000"/>
+              <a:ext cx="320511" cy="355354"/>
+            </a:xfrm>
+            <a:prstGeom prst="downArrow">
+              <a:avLst/>
+            </a:prstGeom>
+          </p:spPr>
+          <p:style>
+            <a:lnRef idx="2">
+              <a:schemeClr val="dk1">
+                <a:shade val="15000"/>
+              </a:schemeClr>
+            </a:lnRef>
+            <a:fillRef idx="1">
+              <a:schemeClr val="dk1"/>
+            </a:fillRef>
+            <a:effectRef idx="0">
+              <a:schemeClr val="dk1"/>
+            </a:effectRef>
+            <a:fontRef idx="minor">
+              <a:schemeClr val="lt1"/>
+            </a:fontRef>
+          </p:style>
+          <p:txBody>
+            <a:bodyPr rtlCol="0" anchor="ctr"/>
+            <a:lstStyle/>
+            <a:p>
+              <a:pPr algn="ctr"/>
+              <a:endParaRPr lang="en-US"/>
+            </a:p>
+          </p:txBody>
+        </p:sp>
+      </p:grpSp>
+    </p:spTree>
+    <p:extLst>
+      <p:ext uri="{BB962C8B-B14F-4D97-AF65-F5344CB8AC3E}">
+        <p14:creationId xmlns:p14="http://schemas.microsoft.com/office/powerpoint/2010/main" val="3095838342"/>
+      </p:ext>
+    </p:extLst>
+  </p:cSld>
+  <p:clrMapOvr>
+    <a:masterClrMapping/>
+  </p:clrMapOvr>
+</p:sld>
+</file>
+
+<file path=ppt/slides/slide4.xml><?xml version="1.0" encoding="utf-8"?>
+<p:sld xmlns:a="http://schemas.openxmlformats.org/drawingml/2006/main" xmlns:r="http://schemas.openxmlformats.org/officeDocument/2006/relationships" xmlns:p="http://schemas.openxmlformats.org/presentationml/2006/main">
+  <p:cSld>
+    <p:spTree>
+      <p:nvGrpSpPr>
+        <p:cNvPr id="1" name="">
+          <a:extLst>
+            <a:ext uri="{FF2B5EF4-FFF2-40B4-BE49-F238E27FC236}">
+              <a16:creationId xmlns:a16="http://schemas.microsoft.com/office/drawing/2014/main" id="{4CC435DD-2CD5-A90C-190A-5817C34C5FFC}"/>
+            </a:ext>
+          </a:extLst>
+        </p:cNvPr>
+        <p:cNvGrpSpPr/>
+        <p:nvPr/>
+      </p:nvGrpSpPr>
+      <p:grpSpPr>
+        <a:xfrm>
+          <a:off x="0" y="0"/>
+          <a:ext cx="0" cy="0"/>
+          <a:chOff x="0" y="0"/>
+          <a:chExt cx="0" cy="0"/>
+        </a:xfrm>
+      </p:grpSpPr>
+      <p:sp>
+        <p:nvSpPr>
+          <p:cNvPr id="3" name="TextBox 2">
+            <a:extLst>
+              <a:ext uri="{FF2B5EF4-FFF2-40B4-BE49-F238E27FC236}">
+                <a16:creationId xmlns:a16="http://schemas.microsoft.com/office/drawing/2014/main" id="{16C4BC2B-F2C6-6F7C-730A-37C31F8F22A6}"/>
+              </a:ext>
+            </a:extLst>
+          </p:cNvPr>
+          <p:cNvSpPr txBox="1"/>
+          <p:nvPr/>
+        </p:nvSpPr>
+        <p:spPr>
+          <a:xfrm>
+            <a:off x="217714" y="255046"/>
             <a:ext cx="11756571" cy="355354"/>
           </a:xfrm>
           <a:prstGeom prst="rect">
@@ -3541,6 +5911,19 @@
               <a:buNone/>
             </a:pPr>
             <a:r>
+              <a:rPr kumimoji="0" lang="en-US" altLang="en-US" sz="1300" b="1" i="0" u="none" strike="noStrike" cap="none" normalizeH="0" baseline="0">
+                <a:ln>
+                  <a:noFill/>
+                </a:ln>
+                <a:solidFill>
+                  <a:schemeClr val="tx1"/>
+                </a:solidFill>
+                <a:effectLst/>
+                <a:latin typeface="Arial" panose="020B0604020202020204" pitchFamily="34" charset="0"/>
+              </a:rPr>
+              <a:t>Fərqlərin Cədvəli</a:t>
+            </a:r>
+            <a:r>
               <a:rPr kumimoji="0" lang="en-US" altLang="en-US" sz="1300" b="0" i="0" u="none" strike="noStrike" cap="none" normalizeH="0" baseline="0">
                 <a:ln>
                   <a:noFill/>
@@ -3551,15 +5934,3146 @@
                 <a:effectLst/>
                 <a:latin typeface="Arial" panose="020B0604020202020204" pitchFamily="34" charset="0"/>
               </a:rPr>
-              <a:t>.</a:t>
-            </a:r>
+              <a:t>:</a:t>
+            </a:r>
+          </a:p>
+        </p:txBody>
+      </p:sp>
+      <p:graphicFrame>
+        <p:nvGraphicFramePr>
+          <p:cNvPr id="2" name="Table 1">
+            <a:extLst>
+              <a:ext uri="{FF2B5EF4-FFF2-40B4-BE49-F238E27FC236}">
+                <a16:creationId xmlns:a16="http://schemas.microsoft.com/office/drawing/2014/main" id="{0AC2ECAA-98FE-C88B-4148-F82D41FCF962}"/>
+              </a:ext>
+            </a:extLst>
+          </p:cNvPr>
+          <p:cNvGraphicFramePr>
+            <a:graphicFrameLocks noGrp="1"/>
+          </p:cNvGraphicFramePr>
+          <p:nvPr>
+            <p:extLst>
+              <p:ext uri="{D42A27DB-BD31-4B8C-83A1-F6EECF244321}">
+                <p14:modId xmlns:p14="http://schemas.microsoft.com/office/powerpoint/2010/main" val="2845583017"/>
+              </p:ext>
+            </p:extLst>
+          </p:nvPr>
+        </p:nvGraphicFramePr>
+        <p:xfrm>
+          <a:off x="217714" y="983301"/>
+          <a:ext cx="11635706" cy="2342004"/>
+        </p:xfrm>
+        <a:graphic>
+          <a:graphicData uri="http://schemas.openxmlformats.org/drawingml/2006/table">
+            <a:tbl>
+              <a:tblPr/>
+              <a:tblGrid>
+                <a:gridCol w="919426">
+                  <a:extLst>
+                    <a:ext uri="{9D8B030D-6E8A-4147-A177-3AD203B41FA5}">
+                      <a16:colId xmlns:a16="http://schemas.microsoft.com/office/drawing/2014/main" val="699910080"/>
+                    </a:ext>
+                  </a:extLst>
+                </a:gridCol>
+                <a:gridCol w="5358140">
+                  <a:extLst>
+                    <a:ext uri="{9D8B030D-6E8A-4147-A177-3AD203B41FA5}">
+                      <a16:colId xmlns:a16="http://schemas.microsoft.com/office/drawing/2014/main" val="2180009960"/>
+                    </a:ext>
+                  </a:extLst>
+                </a:gridCol>
+                <a:gridCol w="5358140">
+                  <a:extLst>
+                    <a:ext uri="{9D8B030D-6E8A-4147-A177-3AD203B41FA5}">
+                      <a16:colId xmlns:a16="http://schemas.microsoft.com/office/drawing/2014/main" val="3978951132"/>
+                    </a:ext>
+                  </a:extLst>
+                </a:gridCol>
+              </a:tblGrid>
+              <a:tr h="585501">
+                <a:tc>
+                  <a:txBody>
+                    <a:bodyPr/>
+                    <a:lstStyle/>
+                    <a:p>
+                      <a:r>
+                        <a:rPr lang="en-US" b="1"/>
+                        <a:t>Kod</a:t>
+                      </a:r>
+                    </a:p>
+                  </a:txBody>
+                  <a:tcPr anchor="ctr">
+                    <a:lnL w="12700" cap="flat" cmpd="sng" algn="ctr">
+                      <a:solidFill>
+                        <a:schemeClr val="tx1"/>
+                      </a:solidFill>
+                      <a:prstDash val="solid"/>
+                      <a:round/>
+                      <a:headEnd type="none" w="med" len="med"/>
+                      <a:tailEnd type="none" w="med" len="med"/>
+                    </a:lnL>
+                    <a:lnR w="12700" cap="flat" cmpd="sng" algn="ctr">
+                      <a:solidFill>
+                        <a:schemeClr val="tx1"/>
+                      </a:solidFill>
+                      <a:prstDash val="solid"/>
+                      <a:round/>
+                      <a:headEnd type="none" w="med" len="med"/>
+                      <a:tailEnd type="none" w="med" len="med"/>
+                    </a:lnR>
+                    <a:lnT w="12700" cap="flat" cmpd="sng" algn="ctr">
+                      <a:solidFill>
+                        <a:schemeClr val="tx1"/>
+                      </a:solidFill>
+                      <a:prstDash val="solid"/>
+                      <a:round/>
+                      <a:headEnd type="none" w="med" len="med"/>
+                      <a:tailEnd type="none" w="med" len="med"/>
+                    </a:lnT>
+                    <a:lnB w="12700" cap="flat" cmpd="sng" algn="ctr">
+                      <a:solidFill>
+                        <a:schemeClr val="tx1"/>
+                      </a:solidFill>
+                      <a:prstDash val="solid"/>
+                      <a:round/>
+                      <a:headEnd type="none" w="med" len="med"/>
+                      <a:tailEnd type="none" w="med" len="med"/>
+                    </a:lnB>
+                    <a:solidFill>
+                      <a:schemeClr val="accent2"/>
+                    </a:solidFill>
+                  </a:tcPr>
+                </a:tc>
+                <a:tc>
+                  <a:txBody>
+                    <a:bodyPr/>
+                    <a:lstStyle/>
+                    <a:p>
+                      <a:r>
+                        <a:rPr lang="en-US" b="1"/>
+                        <a:t>Metod</a:t>
+                      </a:r>
+                    </a:p>
+                  </a:txBody>
+                  <a:tcPr anchor="ctr">
+                    <a:lnL w="12700" cap="flat" cmpd="sng" algn="ctr">
+                      <a:solidFill>
+                        <a:schemeClr val="tx1"/>
+                      </a:solidFill>
+                      <a:prstDash val="solid"/>
+                      <a:round/>
+                      <a:headEnd type="none" w="med" len="med"/>
+                      <a:tailEnd type="none" w="med" len="med"/>
+                    </a:lnL>
+                    <a:lnR w="12700" cap="flat" cmpd="sng" algn="ctr">
+                      <a:solidFill>
+                        <a:schemeClr val="tx1"/>
+                      </a:solidFill>
+                      <a:prstDash val="solid"/>
+                      <a:round/>
+                      <a:headEnd type="none" w="med" len="med"/>
+                      <a:tailEnd type="none" w="med" len="med"/>
+                    </a:lnR>
+                    <a:lnT w="12700" cap="flat" cmpd="sng" algn="ctr">
+                      <a:solidFill>
+                        <a:schemeClr val="tx1"/>
+                      </a:solidFill>
+                      <a:prstDash val="solid"/>
+                      <a:round/>
+                      <a:headEnd type="none" w="med" len="med"/>
+                      <a:tailEnd type="none" w="med" len="med"/>
+                    </a:lnT>
+                    <a:lnB w="12700" cap="flat" cmpd="sng" algn="ctr">
+                      <a:solidFill>
+                        <a:schemeClr val="tx1"/>
+                      </a:solidFill>
+                      <a:prstDash val="solid"/>
+                      <a:round/>
+                      <a:headEnd type="none" w="med" len="med"/>
+                      <a:tailEnd type="none" w="med" len="med"/>
+                    </a:lnB>
+                    <a:solidFill>
+                      <a:schemeClr val="accent2"/>
+                    </a:solidFill>
+                  </a:tcPr>
+                </a:tc>
+                <a:tc>
+                  <a:txBody>
+                    <a:bodyPr/>
+                    <a:lstStyle/>
+                    <a:p>
+                      <a:r>
+                        <a:rPr lang="en-US" b="1"/>
+                        <a:t>İzah</a:t>
+                      </a:r>
+                    </a:p>
+                  </a:txBody>
+                  <a:tcPr anchor="ctr">
+                    <a:lnL w="12700" cap="flat" cmpd="sng" algn="ctr">
+                      <a:solidFill>
+                        <a:schemeClr val="tx1"/>
+                      </a:solidFill>
+                      <a:prstDash val="solid"/>
+                      <a:round/>
+                      <a:headEnd type="none" w="med" len="med"/>
+                      <a:tailEnd type="none" w="med" len="med"/>
+                    </a:lnL>
+                    <a:lnR w="12700" cap="flat" cmpd="sng" algn="ctr">
+                      <a:solidFill>
+                        <a:schemeClr val="tx1"/>
+                      </a:solidFill>
+                      <a:prstDash val="solid"/>
+                      <a:round/>
+                      <a:headEnd type="none" w="med" len="med"/>
+                      <a:tailEnd type="none" w="med" len="med"/>
+                    </a:lnR>
+                    <a:lnT w="12700" cap="flat" cmpd="sng" algn="ctr">
+                      <a:solidFill>
+                        <a:schemeClr val="tx1"/>
+                      </a:solidFill>
+                      <a:prstDash val="solid"/>
+                      <a:round/>
+                      <a:headEnd type="none" w="med" len="med"/>
+                      <a:tailEnd type="none" w="med" len="med"/>
+                    </a:lnT>
+                    <a:lnB w="12700" cap="flat" cmpd="sng" algn="ctr">
+                      <a:solidFill>
+                        <a:schemeClr val="tx1"/>
+                      </a:solidFill>
+                      <a:prstDash val="solid"/>
+                      <a:round/>
+                      <a:headEnd type="none" w="med" len="med"/>
+                      <a:tailEnd type="none" w="med" len="med"/>
+                    </a:lnB>
+                    <a:solidFill>
+                      <a:schemeClr val="accent2"/>
+                    </a:solidFill>
+                  </a:tcPr>
+                </a:tc>
+                <a:extLst>
+                  <a:ext uri="{0D108BD9-81ED-4DB2-BD59-A6C34878D82A}">
+                    <a16:rowId xmlns:a16="http://schemas.microsoft.com/office/drawing/2014/main" val="4186314503"/>
+                  </a:ext>
+                </a:extLst>
+              </a:tr>
+              <a:tr h="585501">
+                <a:tc>
+                  <a:txBody>
+                    <a:bodyPr/>
+                    <a:lstStyle/>
+                    <a:p>
+                      <a:r>
+                        <a:rPr lang="en-US" b="1"/>
+                        <a:t>a)</a:t>
+                      </a:r>
+                      <a:endParaRPr lang="en-US"/>
+                    </a:p>
+                  </a:txBody>
+                  <a:tcPr anchor="ctr">
+                    <a:lnL w="12700" cap="flat" cmpd="sng" algn="ctr">
+                      <a:solidFill>
+                        <a:schemeClr val="tx1"/>
+                      </a:solidFill>
+                      <a:prstDash val="solid"/>
+                      <a:round/>
+                      <a:headEnd type="none" w="med" len="med"/>
+                      <a:tailEnd type="none" w="med" len="med"/>
+                    </a:lnL>
+                    <a:lnR w="12700" cap="flat" cmpd="sng" algn="ctr">
+                      <a:solidFill>
+                        <a:schemeClr val="tx1"/>
+                      </a:solidFill>
+                      <a:prstDash val="solid"/>
+                      <a:round/>
+                      <a:headEnd type="none" w="med" len="med"/>
+                      <a:tailEnd type="none" w="med" len="med"/>
+                    </a:lnR>
+                    <a:lnT w="12700" cap="flat" cmpd="sng" algn="ctr">
+                      <a:solidFill>
+                        <a:schemeClr val="tx1"/>
+                      </a:solidFill>
+                      <a:prstDash val="solid"/>
+                      <a:round/>
+                      <a:headEnd type="none" w="med" len="med"/>
+                      <a:tailEnd type="none" w="med" len="med"/>
+                    </a:lnT>
+                    <a:lnB w="12700" cap="flat" cmpd="sng" algn="ctr">
+                      <a:solidFill>
+                        <a:schemeClr val="tx1"/>
+                      </a:solidFill>
+                      <a:prstDash val="solid"/>
+                      <a:round/>
+                      <a:headEnd type="none" w="med" len="med"/>
+                      <a:tailEnd type="none" w="med" len="med"/>
+                    </a:lnB>
+                    <a:noFill/>
+                  </a:tcPr>
+                </a:tc>
+                <a:tc>
+                  <a:txBody>
+                    <a:bodyPr/>
+                    <a:lstStyle/>
+                    <a:p>
+                      <a:r>
+                        <a:rPr lang="en-US"/>
+                        <a:t>$request-&gt;session()-&gt;put('key', val)</a:t>
+                      </a:r>
+                    </a:p>
+                  </a:txBody>
+                  <a:tcPr anchor="ctr">
+                    <a:lnL w="12700" cap="flat" cmpd="sng" algn="ctr">
+                      <a:solidFill>
+                        <a:schemeClr val="tx1"/>
+                      </a:solidFill>
+                      <a:prstDash val="solid"/>
+                      <a:round/>
+                      <a:headEnd type="none" w="med" len="med"/>
+                      <a:tailEnd type="none" w="med" len="med"/>
+                    </a:lnL>
+                    <a:lnR w="12700" cap="flat" cmpd="sng" algn="ctr">
+                      <a:solidFill>
+                        <a:schemeClr val="tx1"/>
+                      </a:solidFill>
+                      <a:prstDash val="solid"/>
+                      <a:round/>
+                      <a:headEnd type="none" w="med" len="med"/>
+                      <a:tailEnd type="none" w="med" len="med"/>
+                    </a:lnR>
+                    <a:lnT w="12700" cap="flat" cmpd="sng" algn="ctr">
+                      <a:solidFill>
+                        <a:schemeClr val="tx1"/>
+                      </a:solidFill>
+                      <a:prstDash val="solid"/>
+                      <a:round/>
+                      <a:headEnd type="none" w="med" len="med"/>
+                      <a:tailEnd type="none" w="med" len="med"/>
+                    </a:lnT>
+                    <a:lnB w="12700" cap="flat" cmpd="sng" algn="ctr">
+                      <a:solidFill>
+                        <a:schemeClr val="tx1"/>
+                      </a:solidFill>
+                      <a:prstDash val="solid"/>
+                      <a:round/>
+                      <a:headEnd type="none" w="med" len="med"/>
+                      <a:tailEnd type="none" w="med" len="med"/>
+                    </a:lnB>
+                    <a:noFill/>
+                  </a:tcPr>
+                </a:tc>
+                <a:tc>
+                  <a:txBody>
+                    <a:bodyPr/>
+                    <a:lstStyle/>
+                    <a:p>
+                      <a:r>
+                        <a:rPr lang="en-US"/>
+                        <a:t>Tək dəyər sessiyaya yazmaq</a:t>
+                      </a:r>
+                    </a:p>
+                  </a:txBody>
+                  <a:tcPr anchor="ctr">
+                    <a:lnL w="12700" cap="flat" cmpd="sng" algn="ctr">
+                      <a:solidFill>
+                        <a:schemeClr val="tx1"/>
+                      </a:solidFill>
+                      <a:prstDash val="solid"/>
+                      <a:round/>
+                      <a:headEnd type="none" w="med" len="med"/>
+                      <a:tailEnd type="none" w="med" len="med"/>
+                    </a:lnL>
+                    <a:lnR w="12700" cap="flat" cmpd="sng" algn="ctr">
+                      <a:solidFill>
+                        <a:schemeClr val="tx1"/>
+                      </a:solidFill>
+                      <a:prstDash val="solid"/>
+                      <a:round/>
+                      <a:headEnd type="none" w="med" len="med"/>
+                      <a:tailEnd type="none" w="med" len="med"/>
+                    </a:lnR>
+                    <a:lnT w="12700" cap="flat" cmpd="sng" algn="ctr">
+                      <a:solidFill>
+                        <a:schemeClr val="tx1"/>
+                      </a:solidFill>
+                      <a:prstDash val="solid"/>
+                      <a:round/>
+                      <a:headEnd type="none" w="med" len="med"/>
+                      <a:tailEnd type="none" w="med" len="med"/>
+                    </a:lnT>
+                    <a:lnB w="12700" cap="flat" cmpd="sng" algn="ctr">
+                      <a:solidFill>
+                        <a:schemeClr val="tx1"/>
+                      </a:solidFill>
+                      <a:prstDash val="solid"/>
+                      <a:round/>
+                      <a:headEnd type="none" w="med" len="med"/>
+                      <a:tailEnd type="none" w="med" len="med"/>
+                    </a:lnB>
+                    <a:noFill/>
+                  </a:tcPr>
+                </a:tc>
+                <a:extLst>
+                  <a:ext uri="{0D108BD9-81ED-4DB2-BD59-A6C34878D82A}">
+                    <a16:rowId xmlns:a16="http://schemas.microsoft.com/office/drawing/2014/main" val="3867815402"/>
+                  </a:ext>
+                </a:extLst>
+              </a:tr>
+              <a:tr h="585501">
+                <a:tc>
+                  <a:txBody>
+                    <a:bodyPr/>
+                    <a:lstStyle/>
+                    <a:p>
+                      <a:r>
+                        <a:rPr lang="en-US" b="1"/>
+                        <a:t>b)</a:t>
+                      </a:r>
+                      <a:endParaRPr lang="en-US"/>
+                    </a:p>
+                  </a:txBody>
+                  <a:tcPr anchor="ctr">
+                    <a:lnL w="12700" cap="flat" cmpd="sng" algn="ctr">
+                      <a:solidFill>
+                        <a:schemeClr val="tx1"/>
+                      </a:solidFill>
+                      <a:prstDash val="solid"/>
+                      <a:round/>
+                      <a:headEnd type="none" w="med" len="med"/>
+                      <a:tailEnd type="none" w="med" len="med"/>
+                    </a:lnL>
+                    <a:lnR w="12700" cap="flat" cmpd="sng" algn="ctr">
+                      <a:solidFill>
+                        <a:schemeClr val="tx1"/>
+                      </a:solidFill>
+                      <a:prstDash val="solid"/>
+                      <a:round/>
+                      <a:headEnd type="none" w="med" len="med"/>
+                      <a:tailEnd type="none" w="med" len="med"/>
+                    </a:lnR>
+                    <a:lnT w="12700" cap="flat" cmpd="sng" algn="ctr">
+                      <a:solidFill>
+                        <a:schemeClr val="tx1"/>
+                      </a:solidFill>
+                      <a:prstDash val="solid"/>
+                      <a:round/>
+                      <a:headEnd type="none" w="med" len="med"/>
+                      <a:tailEnd type="none" w="med" len="med"/>
+                    </a:lnT>
+                    <a:lnB w="12700" cap="flat" cmpd="sng" algn="ctr">
+                      <a:solidFill>
+                        <a:schemeClr val="tx1"/>
+                      </a:solidFill>
+                      <a:prstDash val="solid"/>
+                      <a:round/>
+                      <a:headEnd type="none" w="med" len="med"/>
+                      <a:tailEnd type="none" w="med" len="med"/>
+                    </a:lnB>
+                    <a:noFill/>
+                  </a:tcPr>
+                </a:tc>
+                <a:tc>
+                  <a:txBody>
+                    <a:bodyPr/>
+                    <a:lstStyle/>
+                    <a:p>
+                      <a:r>
+                        <a:rPr lang="en-US"/>
+                        <a:t>$request-&gt;session()-&gt;put([...])</a:t>
+                      </a:r>
+                    </a:p>
+                  </a:txBody>
+                  <a:tcPr anchor="ctr">
+                    <a:lnL w="12700" cap="flat" cmpd="sng" algn="ctr">
+                      <a:solidFill>
+                        <a:schemeClr val="tx1"/>
+                      </a:solidFill>
+                      <a:prstDash val="solid"/>
+                      <a:round/>
+                      <a:headEnd type="none" w="med" len="med"/>
+                      <a:tailEnd type="none" w="med" len="med"/>
+                    </a:lnL>
+                    <a:lnR w="12700" cap="flat" cmpd="sng" algn="ctr">
+                      <a:solidFill>
+                        <a:schemeClr val="tx1"/>
+                      </a:solidFill>
+                      <a:prstDash val="solid"/>
+                      <a:round/>
+                      <a:headEnd type="none" w="med" len="med"/>
+                      <a:tailEnd type="none" w="med" len="med"/>
+                    </a:lnR>
+                    <a:lnT w="12700" cap="flat" cmpd="sng" algn="ctr">
+                      <a:solidFill>
+                        <a:schemeClr val="tx1"/>
+                      </a:solidFill>
+                      <a:prstDash val="solid"/>
+                      <a:round/>
+                      <a:headEnd type="none" w="med" len="med"/>
+                      <a:tailEnd type="none" w="med" len="med"/>
+                    </a:lnT>
+                    <a:lnB w="12700" cap="flat" cmpd="sng" algn="ctr">
+                      <a:solidFill>
+                        <a:schemeClr val="tx1"/>
+                      </a:solidFill>
+                      <a:prstDash val="solid"/>
+                      <a:round/>
+                      <a:headEnd type="none" w="med" len="med"/>
+                      <a:tailEnd type="none" w="med" len="med"/>
+                    </a:lnB>
+                    <a:noFill/>
+                  </a:tcPr>
+                </a:tc>
+                <a:tc>
+                  <a:txBody>
+                    <a:bodyPr/>
+                    <a:lstStyle/>
+                    <a:p>
+                      <a:r>
+                        <a:rPr lang="en-US"/>
+                        <a:t>Birdən çox dəyəri bir anda yazmaq</a:t>
+                      </a:r>
+                    </a:p>
+                  </a:txBody>
+                  <a:tcPr anchor="ctr">
+                    <a:lnL w="12700" cap="flat" cmpd="sng" algn="ctr">
+                      <a:solidFill>
+                        <a:schemeClr val="tx1"/>
+                      </a:solidFill>
+                      <a:prstDash val="solid"/>
+                      <a:round/>
+                      <a:headEnd type="none" w="med" len="med"/>
+                      <a:tailEnd type="none" w="med" len="med"/>
+                    </a:lnL>
+                    <a:lnR w="12700" cap="flat" cmpd="sng" algn="ctr">
+                      <a:solidFill>
+                        <a:schemeClr val="tx1"/>
+                      </a:solidFill>
+                      <a:prstDash val="solid"/>
+                      <a:round/>
+                      <a:headEnd type="none" w="med" len="med"/>
+                      <a:tailEnd type="none" w="med" len="med"/>
+                    </a:lnR>
+                    <a:lnT w="12700" cap="flat" cmpd="sng" algn="ctr">
+                      <a:solidFill>
+                        <a:schemeClr val="tx1"/>
+                      </a:solidFill>
+                      <a:prstDash val="solid"/>
+                      <a:round/>
+                      <a:headEnd type="none" w="med" len="med"/>
+                      <a:tailEnd type="none" w="med" len="med"/>
+                    </a:lnT>
+                    <a:lnB w="12700" cap="flat" cmpd="sng" algn="ctr">
+                      <a:solidFill>
+                        <a:schemeClr val="tx1"/>
+                      </a:solidFill>
+                      <a:prstDash val="solid"/>
+                      <a:round/>
+                      <a:headEnd type="none" w="med" len="med"/>
+                      <a:tailEnd type="none" w="med" len="med"/>
+                    </a:lnB>
+                    <a:noFill/>
+                  </a:tcPr>
+                </a:tc>
+                <a:extLst>
+                  <a:ext uri="{0D108BD9-81ED-4DB2-BD59-A6C34878D82A}">
+                    <a16:rowId xmlns:a16="http://schemas.microsoft.com/office/drawing/2014/main" val="2907150072"/>
+                  </a:ext>
+                </a:extLst>
+              </a:tr>
+              <a:tr h="585501">
+                <a:tc>
+                  <a:txBody>
+                    <a:bodyPr/>
+                    <a:lstStyle/>
+                    <a:p>
+                      <a:r>
+                        <a:rPr lang="en-US" b="1"/>
+                        <a:t>c)</a:t>
+                      </a:r>
+                      <a:endParaRPr lang="en-US"/>
+                    </a:p>
+                  </a:txBody>
+                  <a:tcPr anchor="ctr">
+                    <a:lnL w="12700" cap="flat" cmpd="sng" algn="ctr">
+                      <a:solidFill>
+                        <a:schemeClr val="tx1"/>
+                      </a:solidFill>
+                      <a:prstDash val="solid"/>
+                      <a:round/>
+                      <a:headEnd type="none" w="med" len="med"/>
+                      <a:tailEnd type="none" w="med" len="med"/>
+                    </a:lnL>
+                    <a:lnR w="12700" cap="flat" cmpd="sng" algn="ctr">
+                      <a:solidFill>
+                        <a:schemeClr val="tx1"/>
+                      </a:solidFill>
+                      <a:prstDash val="solid"/>
+                      <a:round/>
+                      <a:headEnd type="none" w="med" len="med"/>
+                      <a:tailEnd type="none" w="med" len="med"/>
+                    </a:lnR>
+                    <a:lnT w="12700" cap="flat" cmpd="sng" algn="ctr">
+                      <a:solidFill>
+                        <a:schemeClr val="tx1"/>
+                      </a:solidFill>
+                      <a:prstDash val="solid"/>
+                      <a:round/>
+                      <a:headEnd type="none" w="med" len="med"/>
+                      <a:tailEnd type="none" w="med" len="med"/>
+                    </a:lnT>
+                    <a:lnB w="12700" cap="flat" cmpd="sng" algn="ctr">
+                      <a:solidFill>
+                        <a:schemeClr val="tx1"/>
+                      </a:solidFill>
+                      <a:prstDash val="solid"/>
+                      <a:round/>
+                      <a:headEnd type="none" w="med" len="med"/>
+                      <a:tailEnd type="none" w="med" len="med"/>
+                    </a:lnB>
+                    <a:noFill/>
+                  </a:tcPr>
+                </a:tc>
+                <a:tc>
+                  <a:txBody>
+                    <a:bodyPr/>
+                    <a:lstStyle/>
+                    <a:p>
+                      <a:r>
+                        <a:rPr lang="en-US"/>
+                        <a:t>session(['key' =&gt; val])</a:t>
+                      </a:r>
+                    </a:p>
+                  </a:txBody>
+                  <a:tcPr anchor="ctr">
+                    <a:lnL w="12700" cap="flat" cmpd="sng" algn="ctr">
+                      <a:solidFill>
+                        <a:schemeClr val="tx1"/>
+                      </a:solidFill>
+                      <a:prstDash val="solid"/>
+                      <a:round/>
+                      <a:headEnd type="none" w="med" len="med"/>
+                      <a:tailEnd type="none" w="med" len="med"/>
+                    </a:lnL>
+                    <a:lnR w="12700" cap="flat" cmpd="sng" algn="ctr">
+                      <a:solidFill>
+                        <a:schemeClr val="tx1"/>
+                      </a:solidFill>
+                      <a:prstDash val="solid"/>
+                      <a:round/>
+                      <a:headEnd type="none" w="med" len="med"/>
+                      <a:tailEnd type="none" w="med" len="med"/>
+                    </a:lnR>
+                    <a:lnT w="12700" cap="flat" cmpd="sng" algn="ctr">
+                      <a:solidFill>
+                        <a:schemeClr val="tx1"/>
+                      </a:solidFill>
+                      <a:prstDash val="solid"/>
+                      <a:round/>
+                      <a:headEnd type="none" w="med" len="med"/>
+                      <a:tailEnd type="none" w="med" len="med"/>
+                    </a:lnT>
+                    <a:lnB w="12700" cap="flat" cmpd="sng" algn="ctr">
+                      <a:solidFill>
+                        <a:schemeClr val="tx1"/>
+                      </a:solidFill>
+                      <a:prstDash val="solid"/>
+                      <a:round/>
+                      <a:headEnd type="none" w="med" len="med"/>
+                      <a:tailEnd type="none" w="med" len="med"/>
+                    </a:lnB>
+                    <a:noFill/>
+                  </a:tcPr>
+                </a:tc>
+                <a:tc>
+                  <a:txBody>
+                    <a:bodyPr/>
+                    <a:lstStyle/>
+                    <a:p>
+                      <a:r>
+                        <a:rPr lang="en-US"/>
+                        <a:t>Qlobal helper, daha qısa və rahat yazılış</a:t>
+                      </a:r>
+                    </a:p>
+                  </a:txBody>
+                  <a:tcPr anchor="ctr">
+                    <a:lnL w="12700" cap="flat" cmpd="sng" algn="ctr">
+                      <a:solidFill>
+                        <a:schemeClr val="tx1"/>
+                      </a:solidFill>
+                      <a:prstDash val="solid"/>
+                      <a:round/>
+                      <a:headEnd type="none" w="med" len="med"/>
+                      <a:tailEnd type="none" w="med" len="med"/>
+                    </a:lnL>
+                    <a:lnR w="12700" cap="flat" cmpd="sng" algn="ctr">
+                      <a:solidFill>
+                        <a:schemeClr val="tx1"/>
+                      </a:solidFill>
+                      <a:prstDash val="solid"/>
+                      <a:round/>
+                      <a:headEnd type="none" w="med" len="med"/>
+                      <a:tailEnd type="none" w="med" len="med"/>
+                    </a:lnR>
+                    <a:lnT w="12700" cap="flat" cmpd="sng" algn="ctr">
+                      <a:solidFill>
+                        <a:schemeClr val="tx1"/>
+                      </a:solidFill>
+                      <a:prstDash val="solid"/>
+                      <a:round/>
+                      <a:headEnd type="none" w="med" len="med"/>
+                      <a:tailEnd type="none" w="med" len="med"/>
+                    </a:lnT>
+                    <a:lnB w="12700" cap="flat" cmpd="sng" algn="ctr">
+                      <a:solidFill>
+                        <a:schemeClr val="tx1"/>
+                      </a:solidFill>
+                      <a:prstDash val="solid"/>
+                      <a:round/>
+                      <a:headEnd type="none" w="med" len="med"/>
+                      <a:tailEnd type="none" w="med" len="med"/>
+                    </a:lnB>
+                    <a:noFill/>
+                  </a:tcPr>
+                </a:tc>
+                <a:extLst>
+                  <a:ext uri="{0D108BD9-81ED-4DB2-BD59-A6C34878D82A}">
+                    <a16:rowId xmlns:a16="http://schemas.microsoft.com/office/drawing/2014/main" val="3103727485"/>
+                  </a:ext>
+                </a:extLst>
+              </a:tr>
+            </a:tbl>
+          </a:graphicData>
+        </a:graphic>
+      </p:graphicFrame>
+    </p:spTree>
+    <p:extLst>
+      <p:ext uri="{BB962C8B-B14F-4D97-AF65-F5344CB8AC3E}">
+        <p14:creationId xmlns:p14="http://schemas.microsoft.com/office/powerpoint/2010/main" val="2571694140"/>
+      </p:ext>
+    </p:extLst>
+  </p:cSld>
+  <p:clrMapOvr>
+    <a:masterClrMapping/>
+  </p:clrMapOvr>
+</p:sld>
+</file>
+
+<file path=ppt/slides/slide5.xml><?xml version="1.0" encoding="utf-8"?>
+<p:sld xmlns:a="http://schemas.openxmlformats.org/drawingml/2006/main" xmlns:r="http://schemas.openxmlformats.org/officeDocument/2006/relationships" xmlns:p="http://schemas.openxmlformats.org/presentationml/2006/main">
+  <p:cSld>
+    <p:spTree>
+      <p:nvGrpSpPr>
+        <p:cNvPr id="1" name="">
+          <a:extLst>
+            <a:ext uri="{FF2B5EF4-FFF2-40B4-BE49-F238E27FC236}">
+              <a16:creationId xmlns:a16="http://schemas.microsoft.com/office/drawing/2014/main" id="{8570CD74-C43A-5686-069E-AD2715D32D49}"/>
+            </a:ext>
+          </a:extLst>
+        </p:cNvPr>
+        <p:cNvGrpSpPr/>
+        <p:nvPr/>
+      </p:nvGrpSpPr>
+      <p:grpSpPr>
+        <a:xfrm>
+          <a:off x="0" y="0"/>
+          <a:ext cx="0" cy="0"/>
+          <a:chOff x="0" y="0"/>
+          <a:chExt cx="0" cy="0"/>
+        </a:xfrm>
+      </p:grpSpPr>
+      <p:sp>
+        <p:nvSpPr>
+          <p:cNvPr id="3" name="TextBox 2">
+            <a:extLst>
+              <a:ext uri="{FF2B5EF4-FFF2-40B4-BE49-F238E27FC236}">
+                <a16:creationId xmlns:a16="http://schemas.microsoft.com/office/drawing/2014/main" id="{3D7E8AF5-DD6B-D1BE-F28D-A111B4966E70}"/>
+              </a:ext>
+            </a:extLst>
+          </p:cNvPr>
+          <p:cNvSpPr txBox="1"/>
+          <p:nvPr/>
+        </p:nvSpPr>
+        <p:spPr>
+          <a:xfrm>
+            <a:off x="217714" y="255046"/>
+            <a:ext cx="11756571" cy="2756011"/>
+          </a:xfrm>
+          <a:prstGeom prst="rect">
+            <a:avLst/>
+          </a:prstGeom>
+          <a:noFill/>
+        </p:spPr>
+        <p:txBody>
+          <a:bodyPr wrap="square">
+            <a:spAutoFit/>
+          </a:bodyPr>
+          <a:lstStyle/>
+          <a:p>
+            <a:pPr>
+              <a:lnSpc>
+                <a:spcPct val="150000"/>
+              </a:lnSpc>
+              <a:buNone/>
+            </a:pPr>
+            <a:r>
+              <a:rPr kumimoji="0" lang="en-US" altLang="en-US" sz="1300" b="1" i="0" u="none" strike="noStrike" cap="none" normalizeH="0" baseline="0">
+                <a:ln>
+                  <a:noFill/>
+                </a:ln>
+                <a:solidFill>
+                  <a:srgbClr val="FF0000"/>
+                </a:solidFill>
+                <a:effectLst/>
+                <a:latin typeface="Arial" panose="020B0604020202020204" pitchFamily="34" charset="0"/>
+              </a:rPr>
+              <a:t>Əlavə Məlumat (Təhlükəsizlik və Təcrübə)</a:t>
+            </a:r>
+          </a:p>
+          <a:p>
+            <a:pPr>
+              <a:lnSpc>
+                <a:spcPct val="150000"/>
+              </a:lnSpc>
+              <a:buNone/>
+            </a:pPr>
+            <a:endParaRPr lang="en-US" altLang="en-US" sz="1300" b="1">
+              <a:solidFill>
+                <a:srgbClr val="FF0000"/>
+              </a:solidFill>
+              <a:latin typeface="Arial" panose="020B0604020202020204" pitchFamily="34" charset="0"/>
+            </a:endParaRPr>
+          </a:p>
+          <a:p>
+            <a:pPr>
+              <a:lnSpc>
+                <a:spcPct val="150000"/>
+              </a:lnSpc>
+              <a:buNone/>
+            </a:pPr>
+            <a:endParaRPr kumimoji="0" lang="en-US" altLang="en-US" sz="1300" b="0" i="0" u="none" strike="noStrike" cap="none" normalizeH="0" baseline="0">
+              <a:ln>
+                <a:noFill/>
+              </a:ln>
+              <a:solidFill>
+                <a:schemeClr val="tx1"/>
+              </a:solidFill>
+              <a:effectLst/>
+              <a:latin typeface="Arial" panose="020B0604020202020204" pitchFamily="34" charset="0"/>
+            </a:endParaRPr>
+          </a:p>
+          <a:p>
+            <a:pPr marL="285750" indent="-285750">
+              <a:lnSpc>
+                <a:spcPct val="150000"/>
+              </a:lnSpc>
+              <a:buFont typeface="Arial" panose="020B0604020202020204" pitchFamily="34" charset="0"/>
+              <a:buChar char="•"/>
+            </a:pPr>
+            <a:r>
+              <a:rPr kumimoji="0" lang="en-US" altLang="en-US" sz="1300" i="0" u="none" strike="noStrike" cap="none" normalizeH="0" baseline="0">
+                <a:ln>
+                  <a:noFill/>
+                </a:ln>
+                <a:solidFill>
+                  <a:schemeClr val="tx1"/>
+                </a:solidFill>
+                <a:effectLst/>
+                <a:latin typeface="Arial" panose="020B0604020202020204" pitchFamily="34" charset="0"/>
+              </a:rPr>
+              <a:t>Sessiyaya</a:t>
+            </a:r>
+            <a:r>
+              <a:rPr kumimoji="0" lang="en-US" altLang="en-US" sz="1300" b="0" i="0" u="none" strike="noStrike" cap="none" normalizeH="0" baseline="0">
+                <a:ln>
+                  <a:noFill/>
+                </a:ln>
+                <a:solidFill>
+                  <a:schemeClr val="tx1"/>
+                </a:solidFill>
+                <a:effectLst/>
+                <a:latin typeface="Arial" panose="020B0604020202020204" pitchFamily="34" charset="0"/>
+              </a:rPr>
+              <a:t> şifrəli məlumat saxlamaq istəyirsinizsə, </a:t>
+            </a:r>
+            <a:r>
+              <a:rPr kumimoji="0" lang="en-US" altLang="en-US" sz="1300" b="1" i="0" u="none" strike="noStrike" cap="none" normalizeH="0" baseline="0">
+                <a:ln>
+                  <a:noFill/>
+                </a:ln>
+                <a:solidFill>
+                  <a:schemeClr val="tx1"/>
+                </a:solidFill>
+                <a:effectLst/>
+                <a:latin typeface="Arial" panose="020B0604020202020204" pitchFamily="34" charset="0"/>
+              </a:rPr>
+              <a:t>encrypt</a:t>
+            </a:r>
+            <a:r>
+              <a:rPr kumimoji="0" lang="en-US" altLang="en-US" sz="1300" b="0" i="0" u="none" strike="noStrike" cap="none" normalizeH="0" baseline="0">
+                <a:ln>
+                  <a:noFill/>
+                </a:ln>
+                <a:solidFill>
+                  <a:schemeClr val="tx1"/>
+                </a:solidFill>
+                <a:effectLst/>
+                <a:latin typeface="Arial" panose="020B0604020202020204" pitchFamily="34" charset="0"/>
+              </a:rPr>
+              <a:t> konfiqurasiyasını aktiv edin (</a:t>
+            </a:r>
+            <a:r>
+              <a:rPr kumimoji="0" lang="en-US" altLang="en-US" sz="1300" b="1" i="0" u="none" strike="noStrike" cap="none" normalizeH="0" baseline="0">
+                <a:ln>
+                  <a:noFill/>
+                </a:ln>
+                <a:solidFill>
+                  <a:schemeClr val="accent2"/>
+                </a:solidFill>
+                <a:effectLst/>
+                <a:latin typeface="Arial" panose="020B0604020202020204" pitchFamily="34" charset="0"/>
+              </a:rPr>
+              <a:t>config/session.php – 'encrypt' =&gt; true</a:t>
+            </a:r>
+            <a:r>
+              <a:rPr kumimoji="0" lang="en-US" altLang="en-US" sz="1300" b="0" i="0" u="none" strike="noStrike" cap="none" normalizeH="0" baseline="0">
+                <a:ln>
+                  <a:noFill/>
+                </a:ln>
+                <a:solidFill>
+                  <a:schemeClr val="tx1"/>
+                </a:solidFill>
+                <a:effectLst/>
+                <a:latin typeface="Arial" panose="020B0604020202020204" pitchFamily="34" charset="0"/>
+              </a:rPr>
+              <a:t>).</a:t>
+            </a:r>
+          </a:p>
+          <a:p>
+            <a:pPr marL="285750" indent="-285750">
+              <a:lnSpc>
+                <a:spcPct val="150000"/>
+              </a:lnSpc>
+              <a:buFont typeface="Arial" panose="020B0604020202020204" pitchFamily="34" charset="0"/>
+              <a:buChar char="•"/>
+            </a:pPr>
+            <a:endParaRPr kumimoji="0" lang="en-US" altLang="en-US" sz="1300" b="0" i="0" u="none" strike="noStrike" cap="none" normalizeH="0" baseline="0">
+              <a:ln>
+                <a:noFill/>
+              </a:ln>
+              <a:solidFill>
+                <a:schemeClr val="tx1"/>
+              </a:solidFill>
+              <a:effectLst/>
+              <a:latin typeface="Arial" panose="020B0604020202020204" pitchFamily="34" charset="0"/>
+            </a:endParaRPr>
+          </a:p>
+          <a:p>
+            <a:pPr marL="285750" indent="-285750">
+              <a:lnSpc>
+                <a:spcPct val="150000"/>
+              </a:lnSpc>
+              <a:buFont typeface="Arial" panose="020B0604020202020204" pitchFamily="34" charset="0"/>
+              <a:buChar char="•"/>
+            </a:pPr>
+            <a:r>
+              <a:rPr kumimoji="0" lang="en-US" altLang="en-US" sz="1300" b="0" i="0" u="none" strike="noStrike" cap="none" normalizeH="0" baseline="0">
+                <a:ln>
+                  <a:noFill/>
+                </a:ln>
+                <a:solidFill>
+                  <a:schemeClr val="tx1"/>
+                </a:solidFill>
+                <a:effectLst/>
+                <a:latin typeface="Arial" panose="020B0604020202020204" pitchFamily="34" charset="0"/>
+              </a:rPr>
+              <a:t>Şəxsi və ya kritik məlumatları (şifrə, token və s.) sessiyada birbaşa </a:t>
+            </a:r>
+            <a:r>
+              <a:rPr kumimoji="0" lang="en-US" altLang="en-US" sz="1300" b="1" i="0" u="none" strike="noStrike" cap="none" normalizeH="0" baseline="0">
+                <a:ln>
+                  <a:noFill/>
+                </a:ln>
+                <a:solidFill>
+                  <a:schemeClr val="tx1"/>
+                </a:solidFill>
+                <a:effectLst/>
+                <a:latin typeface="Arial" panose="020B0604020202020204" pitchFamily="34" charset="0"/>
+              </a:rPr>
+              <a:t>saxlamamaq</a:t>
+            </a:r>
+            <a:r>
+              <a:rPr kumimoji="0" lang="en-US" altLang="en-US" sz="1300" b="0" i="0" u="none" strike="noStrike" cap="none" normalizeH="0" baseline="0">
+                <a:ln>
+                  <a:noFill/>
+                </a:ln>
+                <a:solidFill>
+                  <a:schemeClr val="tx1"/>
+                </a:solidFill>
+                <a:effectLst/>
+                <a:latin typeface="Arial" panose="020B0604020202020204" pitchFamily="34" charset="0"/>
+              </a:rPr>
+              <a:t> tövsiyə olunur — əvəzində </a:t>
+            </a:r>
+            <a:r>
+              <a:rPr kumimoji="0" lang="en-US" altLang="en-US" sz="1300" b="1" i="0" u="none" strike="noStrike" cap="none" normalizeH="0" baseline="0">
+                <a:ln>
+                  <a:noFill/>
+                </a:ln>
+                <a:solidFill>
+                  <a:schemeClr val="tx1"/>
+                </a:solidFill>
+                <a:effectLst/>
+                <a:latin typeface="Arial" panose="020B0604020202020204" pitchFamily="34" charset="0"/>
+              </a:rPr>
+              <a:t>user_id </a:t>
+            </a:r>
+            <a:r>
+              <a:rPr kumimoji="0" lang="en-US" altLang="en-US" sz="1300" b="0" i="0" u="none" strike="noStrike" cap="none" normalizeH="0" baseline="0">
+                <a:ln>
+                  <a:noFill/>
+                </a:ln>
+                <a:solidFill>
+                  <a:schemeClr val="tx1"/>
+                </a:solidFill>
+                <a:effectLst/>
+                <a:latin typeface="Arial" panose="020B0604020202020204" pitchFamily="34" charset="0"/>
+              </a:rPr>
+              <a:t>saxlayıb, lazım olan məlumatları </a:t>
+            </a:r>
+            <a:r>
+              <a:rPr kumimoji="0" lang="en-US" altLang="en-US" sz="1300" b="1" i="0" u="none" strike="noStrike" cap="none" normalizeH="0" baseline="0">
+                <a:ln>
+                  <a:noFill/>
+                </a:ln>
+                <a:solidFill>
+                  <a:schemeClr val="tx1"/>
+                </a:solidFill>
+                <a:effectLst/>
+                <a:latin typeface="Arial" panose="020B0604020202020204" pitchFamily="34" charset="0"/>
+              </a:rPr>
+              <a:t>verilənlər bazasından </a:t>
+            </a:r>
+            <a:r>
+              <a:rPr kumimoji="0" lang="en-US" altLang="en-US" sz="1300" b="0" i="0" u="none" strike="noStrike" cap="none" normalizeH="0" baseline="0">
+                <a:ln>
+                  <a:noFill/>
+                </a:ln>
+                <a:solidFill>
+                  <a:schemeClr val="tx1"/>
+                </a:solidFill>
+                <a:effectLst/>
+                <a:latin typeface="Arial" panose="020B0604020202020204" pitchFamily="34" charset="0"/>
+              </a:rPr>
+              <a:t>çəkə bilərsiniz.</a:t>
+            </a:r>
+            <a:endParaRPr lang="en-US" altLang="en-US" sz="1300">
+              <a:latin typeface="Arial" panose="020B0604020202020204" pitchFamily="34" charset="0"/>
+            </a:endParaRPr>
+          </a:p>
+          <a:p>
+            <a:pPr>
+              <a:lnSpc>
+                <a:spcPct val="150000"/>
+              </a:lnSpc>
+              <a:buNone/>
+            </a:pPr>
+            <a:endParaRPr kumimoji="0" lang="en-US" altLang="en-US" sz="1300" b="0" i="0" u="none" strike="noStrike" cap="none" normalizeH="0" baseline="0">
+              <a:ln>
+                <a:noFill/>
+              </a:ln>
+              <a:solidFill>
+                <a:schemeClr val="tx1"/>
+              </a:solidFill>
+              <a:effectLst/>
+              <a:latin typeface="Arial" panose="020B0604020202020204" pitchFamily="34" charset="0"/>
+            </a:endParaRPr>
+          </a:p>
+          <a:p>
+            <a:pPr>
+              <a:lnSpc>
+                <a:spcPct val="150000"/>
+              </a:lnSpc>
+              <a:buNone/>
+            </a:pPr>
+            <a:endParaRPr kumimoji="0" lang="en-US" altLang="en-US" sz="1300" b="0" i="0" u="none" strike="noStrike" cap="none" normalizeH="0" baseline="0">
+              <a:ln>
+                <a:noFill/>
+              </a:ln>
+              <a:solidFill>
+                <a:schemeClr val="tx1"/>
+              </a:solidFill>
+              <a:effectLst/>
+              <a:latin typeface="Arial" panose="020B0604020202020204" pitchFamily="34" charset="0"/>
+            </a:endParaRPr>
           </a:p>
         </p:txBody>
       </p:sp>
     </p:spTree>
     <p:extLst>
       <p:ext uri="{BB962C8B-B14F-4D97-AF65-F5344CB8AC3E}">
-        <p14:creationId xmlns:p14="http://schemas.microsoft.com/office/powerpoint/2010/main" val="3095838342"/>
+        <p14:creationId xmlns:p14="http://schemas.microsoft.com/office/powerpoint/2010/main" val="3753351432"/>
+      </p:ext>
+    </p:extLst>
+  </p:cSld>
+  <p:clrMapOvr>
+    <a:masterClrMapping/>
+  </p:clrMapOvr>
+</p:sld>
+</file>
+
+<file path=ppt/slides/slide6.xml><?xml version="1.0" encoding="utf-8"?>
+<p:sld xmlns:a="http://schemas.openxmlformats.org/drawingml/2006/main" xmlns:r="http://schemas.openxmlformats.org/officeDocument/2006/relationships" xmlns:p="http://schemas.openxmlformats.org/presentationml/2006/main">
+  <p:cSld>
+    <p:spTree>
+      <p:nvGrpSpPr>
+        <p:cNvPr id="1" name="">
+          <a:extLst>
+            <a:ext uri="{FF2B5EF4-FFF2-40B4-BE49-F238E27FC236}">
+              <a16:creationId xmlns:a16="http://schemas.microsoft.com/office/drawing/2014/main" id="{6DDDC148-3EBC-2C36-BEAA-8B1093AB4BE0}"/>
+            </a:ext>
+          </a:extLst>
+        </p:cNvPr>
+        <p:cNvGrpSpPr/>
+        <p:nvPr/>
+      </p:nvGrpSpPr>
+      <p:grpSpPr>
+        <a:xfrm>
+          <a:off x="0" y="0"/>
+          <a:ext cx="0" cy="0"/>
+          <a:chOff x="0" y="0"/>
+          <a:chExt cx="0" cy="0"/>
+        </a:xfrm>
+      </p:grpSpPr>
+      <p:sp>
+        <p:nvSpPr>
+          <p:cNvPr id="3" name="TextBox 2">
+            <a:extLst>
+              <a:ext uri="{FF2B5EF4-FFF2-40B4-BE49-F238E27FC236}">
+                <a16:creationId xmlns:a16="http://schemas.microsoft.com/office/drawing/2014/main" id="{6C851024-34EB-980F-6E31-A4E1FB82BFFC}"/>
+              </a:ext>
+            </a:extLst>
+          </p:cNvPr>
+          <p:cNvSpPr txBox="1"/>
+          <p:nvPr/>
+        </p:nvSpPr>
+        <p:spPr>
+          <a:xfrm>
+            <a:off x="217714" y="255046"/>
+            <a:ext cx="11756571" cy="5756832"/>
+          </a:xfrm>
+          <a:prstGeom prst="rect">
+            <a:avLst/>
+          </a:prstGeom>
+          <a:noFill/>
+        </p:spPr>
+        <p:txBody>
+          <a:bodyPr wrap="square">
+            <a:spAutoFit/>
+          </a:bodyPr>
+          <a:lstStyle/>
+          <a:p>
+            <a:pPr>
+              <a:lnSpc>
+                <a:spcPct val="150000"/>
+              </a:lnSpc>
+              <a:buNone/>
+            </a:pPr>
+            <a:r>
+              <a:rPr kumimoji="0" lang="en-US" altLang="en-US" sz="1300" b="1" i="0" u="none" strike="noStrike" cap="none" normalizeH="0" baseline="0">
+                <a:ln>
+                  <a:noFill/>
+                </a:ln>
+                <a:solidFill>
+                  <a:srgbClr val="FF0000"/>
+                </a:solidFill>
+                <a:effectLst/>
+                <a:latin typeface="Arial" panose="020B0604020202020204" pitchFamily="34" charset="0"/>
+              </a:rPr>
+              <a:t>Kritik Məlumatları Sessiyada Saxlamamaq nə deməkdir?</a:t>
+            </a:r>
+          </a:p>
+          <a:p>
+            <a:pPr>
+              <a:lnSpc>
+                <a:spcPct val="150000"/>
+              </a:lnSpc>
+              <a:buNone/>
+            </a:pPr>
+            <a:endParaRPr lang="en-US" altLang="en-US" sz="1300" b="1">
+              <a:solidFill>
+                <a:srgbClr val="FF0000"/>
+              </a:solidFill>
+              <a:latin typeface="Arial" panose="020B0604020202020204" pitchFamily="34" charset="0"/>
+            </a:endParaRPr>
+          </a:p>
+          <a:p>
+            <a:pPr>
+              <a:lnSpc>
+                <a:spcPct val="150000"/>
+              </a:lnSpc>
+              <a:buNone/>
+            </a:pPr>
+            <a:r>
+              <a:rPr kumimoji="0" lang="en-US" altLang="en-US" sz="1300" b="0" i="0" u="none" strike="noStrike" cap="none" normalizeH="0" baseline="0">
+                <a:ln>
+                  <a:noFill/>
+                </a:ln>
+                <a:solidFill>
+                  <a:schemeClr val="tx1"/>
+                </a:solidFill>
+                <a:effectLst/>
+                <a:latin typeface="Arial" panose="020B0604020202020204" pitchFamily="34" charset="0"/>
+              </a:rPr>
+              <a:t>Laravel sessiya sistemində istənilən məlumatı saxlamaq mümkündür. </a:t>
+            </a:r>
+            <a:r>
+              <a:rPr kumimoji="0" lang="en-US" altLang="en-US" sz="1300" b="1" i="0" u="none" strike="noStrike" cap="none" normalizeH="0" baseline="0">
+                <a:ln>
+                  <a:noFill/>
+                </a:ln>
+                <a:solidFill>
+                  <a:schemeClr val="tx1"/>
+                </a:solidFill>
+                <a:effectLst/>
+                <a:latin typeface="Arial" panose="020B0604020202020204" pitchFamily="34" charset="0"/>
+              </a:rPr>
+              <a:t>Məsələn</a:t>
+            </a:r>
+            <a:r>
+              <a:rPr kumimoji="0" lang="en-US" altLang="en-US" sz="1300" b="0" i="0" u="none" strike="noStrike" cap="none" normalizeH="0" baseline="0">
+                <a:ln>
+                  <a:noFill/>
+                </a:ln>
+                <a:solidFill>
+                  <a:schemeClr val="tx1"/>
+                </a:solidFill>
+                <a:effectLst/>
+                <a:latin typeface="Arial" panose="020B0604020202020204" pitchFamily="34" charset="0"/>
+              </a:rPr>
+              <a:t>:</a:t>
+            </a:r>
+          </a:p>
+          <a:p>
+            <a:pPr>
+              <a:lnSpc>
+                <a:spcPct val="150000"/>
+              </a:lnSpc>
+              <a:buNone/>
+            </a:pPr>
+            <a:endParaRPr lang="en-US" altLang="en-US" sz="1300">
+              <a:latin typeface="Arial" panose="020B0604020202020204" pitchFamily="34" charset="0"/>
+            </a:endParaRPr>
+          </a:p>
+          <a:p>
+            <a:pPr>
+              <a:lnSpc>
+                <a:spcPct val="150000"/>
+              </a:lnSpc>
+              <a:buNone/>
+            </a:pPr>
+            <a:endParaRPr kumimoji="0" lang="en-US" altLang="en-US" sz="1300" b="0" i="0" u="none" strike="noStrike" cap="none" normalizeH="0" baseline="0">
+              <a:ln>
+                <a:noFill/>
+              </a:ln>
+              <a:solidFill>
+                <a:schemeClr val="tx1"/>
+              </a:solidFill>
+              <a:effectLst/>
+              <a:latin typeface="Arial" panose="020B0604020202020204" pitchFamily="34" charset="0"/>
+            </a:endParaRPr>
+          </a:p>
+          <a:p>
+            <a:pPr>
+              <a:lnSpc>
+                <a:spcPct val="150000"/>
+              </a:lnSpc>
+              <a:buNone/>
+            </a:pPr>
+            <a:endParaRPr lang="en-US" altLang="en-US" sz="1300">
+              <a:latin typeface="Arial" panose="020B0604020202020204" pitchFamily="34" charset="0"/>
+            </a:endParaRPr>
+          </a:p>
+          <a:p>
+            <a:pPr>
+              <a:lnSpc>
+                <a:spcPct val="150000"/>
+              </a:lnSpc>
+              <a:buNone/>
+            </a:pPr>
+            <a:endParaRPr kumimoji="0" lang="en-US" altLang="en-US" sz="1300" b="0" i="0" u="none" strike="noStrike" cap="none" normalizeH="0" baseline="0">
+              <a:ln>
+                <a:noFill/>
+              </a:ln>
+              <a:solidFill>
+                <a:schemeClr val="tx1"/>
+              </a:solidFill>
+              <a:effectLst/>
+              <a:latin typeface="Arial" panose="020B0604020202020204" pitchFamily="34" charset="0"/>
+            </a:endParaRPr>
+          </a:p>
+          <a:p>
+            <a:pPr>
+              <a:lnSpc>
+                <a:spcPct val="150000"/>
+              </a:lnSpc>
+              <a:buNone/>
+            </a:pPr>
+            <a:endParaRPr lang="en-US" altLang="en-US" sz="1300">
+              <a:latin typeface="Arial" panose="020B0604020202020204" pitchFamily="34" charset="0"/>
+            </a:endParaRPr>
+          </a:p>
+          <a:p>
+            <a:pPr>
+              <a:lnSpc>
+                <a:spcPct val="150000"/>
+              </a:lnSpc>
+              <a:buNone/>
+            </a:pPr>
+            <a:endParaRPr lang="en-US" altLang="en-US" sz="1300">
+              <a:latin typeface="Arial" panose="020B0604020202020204" pitchFamily="34" charset="0"/>
+            </a:endParaRPr>
+          </a:p>
+          <a:p>
+            <a:pPr>
+              <a:lnSpc>
+                <a:spcPct val="150000"/>
+              </a:lnSpc>
+              <a:buNone/>
+            </a:pPr>
+            <a:r>
+              <a:rPr kumimoji="0" lang="en-US" altLang="en-US" sz="1300" b="0" i="0" u="none" strike="noStrike" cap="none" normalizeH="0" baseline="0">
+                <a:ln>
+                  <a:noFill/>
+                </a:ln>
+                <a:solidFill>
+                  <a:schemeClr val="tx1"/>
+                </a:solidFill>
+                <a:effectLst/>
+                <a:latin typeface="Arial" panose="020B0604020202020204" pitchFamily="34" charset="0"/>
+              </a:rPr>
+              <a:t>Bu üsulla kritik (şəxsi, gizli) məlumatları sessiyaya yazmaq mümkündür. Amma bu təhlükəli və səhv yanaşmadır.</a:t>
+            </a:r>
+          </a:p>
+          <a:p>
+            <a:pPr>
+              <a:lnSpc>
+                <a:spcPct val="150000"/>
+              </a:lnSpc>
+              <a:buNone/>
+            </a:pPr>
+            <a:endParaRPr lang="en-US" altLang="en-US" sz="1300">
+              <a:latin typeface="Arial" panose="020B0604020202020204" pitchFamily="34" charset="0"/>
+            </a:endParaRPr>
+          </a:p>
+          <a:p>
+            <a:pPr>
+              <a:lnSpc>
+                <a:spcPct val="150000"/>
+              </a:lnSpc>
+              <a:buNone/>
+            </a:pPr>
+            <a:endParaRPr kumimoji="0" lang="en-US" altLang="en-US" sz="1300" b="0" i="0" u="none" strike="noStrike" cap="none" normalizeH="0" baseline="0">
+              <a:ln>
+                <a:noFill/>
+              </a:ln>
+              <a:solidFill>
+                <a:schemeClr val="tx1"/>
+              </a:solidFill>
+              <a:effectLst/>
+              <a:latin typeface="Arial" panose="020B0604020202020204" pitchFamily="34" charset="0"/>
+            </a:endParaRPr>
+          </a:p>
+          <a:p>
+            <a:pPr>
+              <a:lnSpc>
+                <a:spcPct val="150000"/>
+              </a:lnSpc>
+              <a:buNone/>
+            </a:pPr>
+            <a:r>
+              <a:rPr kumimoji="0" lang="en-US" altLang="en-US" sz="1300" b="0" i="0" u="none" strike="noStrike" cap="none" normalizeH="0" baseline="0">
+                <a:ln>
+                  <a:noFill/>
+                </a:ln>
+                <a:solidFill>
+                  <a:schemeClr val="tx1"/>
+                </a:solidFill>
+                <a:effectLst/>
+                <a:latin typeface="Arial" panose="020B0604020202020204" pitchFamily="34" charset="0"/>
+              </a:rPr>
+              <a:t>❌ Niyə təhlükəlidir?</a:t>
+            </a:r>
+          </a:p>
+          <a:p>
+            <a:pPr marL="285750" indent="-285750">
+              <a:lnSpc>
+                <a:spcPct val="150000"/>
+              </a:lnSpc>
+              <a:buFont typeface="Wingdings" panose="05000000000000000000" pitchFamily="2" charset="2"/>
+              <a:buChar char="q"/>
+            </a:pPr>
+            <a:r>
+              <a:rPr kumimoji="0" lang="en-US" altLang="en-US" sz="1300" b="0" i="0" u="none" strike="noStrike" cap="none" normalizeH="0" baseline="0">
+                <a:ln>
+                  <a:noFill/>
+                </a:ln>
+                <a:solidFill>
+                  <a:schemeClr val="tx1"/>
+                </a:solidFill>
+                <a:effectLst/>
+                <a:latin typeface="Arial" panose="020B0604020202020204" pitchFamily="34" charset="0"/>
+              </a:rPr>
+              <a:t>Sessiya </a:t>
+            </a:r>
+            <a:r>
+              <a:rPr kumimoji="0" lang="en-US" altLang="en-US" sz="1300" b="1" i="0" u="none" strike="noStrike" cap="none" normalizeH="0" baseline="0">
+                <a:ln>
+                  <a:noFill/>
+                </a:ln>
+                <a:solidFill>
+                  <a:schemeClr val="tx1"/>
+                </a:solidFill>
+                <a:effectLst/>
+                <a:latin typeface="Arial" panose="020B0604020202020204" pitchFamily="34" charset="0"/>
+              </a:rPr>
+              <a:t>sərt disklərdə </a:t>
+            </a:r>
+            <a:r>
+              <a:rPr kumimoji="0" lang="en-US" altLang="en-US" sz="1300" b="0" i="0" u="none" strike="noStrike" cap="none" normalizeH="0" baseline="0">
+                <a:ln>
+                  <a:noFill/>
+                </a:ln>
+                <a:solidFill>
+                  <a:schemeClr val="tx1"/>
+                </a:solidFill>
+                <a:effectLst/>
+                <a:latin typeface="Arial" panose="020B0604020202020204" pitchFamily="34" charset="0"/>
+              </a:rPr>
+              <a:t>(file driver), </a:t>
+            </a:r>
+            <a:r>
+              <a:rPr kumimoji="0" lang="en-US" altLang="en-US" sz="1300" b="1" i="0" u="none" strike="noStrike" cap="none" normalizeH="0" baseline="0">
+                <a:ln>
+                  <a:noFill/>
+                </a:ln>
+                <a:solidFill>
+                  <a:schemeClr val="tx1"/>
+                </a:solidFill>
+                <a:effectLst/>
+                <a:latin typeface="Arial" panose="020B0604020202020204" pitchFamily="34" charset="0"/>
+              </a:rPr>
+              <a:t>verilənlər bazasında </a:t>
+            </a:r>
+            <a:r>
+              <a:rPr kumimoji="0" lang="en-US" altLang="en-US" sz="1300" b="0" i="0" u="none" strike="noStrike" cap="none" normalizeH="0" baseline="0">
+                <a:ln>
+                  <a:noFill/>
+                </a:ln>
+                <a:solidFill>
+                  <a:schemeClr val="tx1"/>
+                </a:solidFill>
+                <a:effectLst/>
+                <a:latin typeface="Arial" panose="020B0604020202020204" pitchFamily="34" charset="0"/>
+              </a:rPr>
+              <a:t>(database driver), </a:t>
+            </a:r>
+            <a:r>
+              <a:rPr kumimoji="0" lang="en-US" altLang="en-US" sz="1300" b="1" i="0" u="none" strike="noStrike" cap="none" normalizeH="0" baseline="0">
+                <a:ln>
+                  <a:noFill/>
+                </a:ln>
+                <a:solidFill>
+                  <a:schemeClr val="tx1"/>
+                </a:solidFill>
+                <a:effectLst/>
+                <a:latin typeface="Arial" panose="020B0604020202020204" pitchFamily="34" charset="0"/>
+              </a:rPr>
+              <a:t>Redis</a:t>
+            </a:r>
+            <a:r>
+              <a:rPr kumimoji="0" lang="en-US" altLang="en-US" sz="1300" b="0" i="0" u="none" strike="noStrike" cap="none" normalizeH="0" baseline="0">
+                <a:ln>
+                  <a:noFill/>
+                </a:ln>
+                <a:solidFill>
+                  <a:schemeClr val="tx1"/>
+                </a:solidFill>
+                <a:effectLst/>
+                <a:latin typeface="Arial" panose="020B0604020202020204" pitchFamily="34" charset="0"/>
+              </a:rPr>
+              <a:t>, </a:t>
+            </a:r>
+            <a:r>
+              <a:rPr kumimoji="0" lang="en-US" altLang="en-US" sz="1300" b="1" i="0" u="none" strike="noStrike" cap="none" normalizeH="0" baseline="0">
+                <a:ln>
+                  <a:noFill/>
+                </a:ln>
+                <a:solidFill>
+                  <a:schemeClr val="tx1"/>
+                </a:solidFill>
+                <a:effectLst/>
+                <a:latin typeface="Arial" panose="020B0604020202020204" pitchFamily="34" charset="0"/>
+              </a:rPr>
+              <a:t>Memcached</a:t>
+            </a:r>
+            <a:r>
+              <a:rPr kumimoji="0" lang="en-US" altLang="en-US" sz="1300" b="0" i="0" u="none" strike="noStrike" cap="none" normalizeH="0" baseline="0">
+                <a:ln>
+                  <a:noFill/>
+                </a:ln>
+                <a:solidFill>
+                  <a:schemeClr val="tx1"/>
+                </a:solidFill>
+                <a:effectLst/>
+                <a:latin typeface="Arial" panose="020B0604020202020204" pitchFamily="34" charset="0"/>
+              </a:rPr>
+              <a:t> kimi sistemlərdə saxlanılır.</a:t>
+            </a:r>
+          </a:p>
+          <a:p>
+            <a:pPr marL="285750" indent="-285750">
+              <a:lnSpc>
+                <a:spcPct val="150000"/>
+              </a:lnSpc>
+              <a:buFont typeface="Wingdings" panose="05000000000000000000" pitchFamily="2" charset="2"/>
+              <a:buChar char="q"/>
+            </a:pPr>
+            <a:r>
+              <a:rPr kumimoji="0" lang="en-US" altLang="en-US" sz="1300" b="0" i="0" u="none" strike="noStrike" cap="none" normalizeH="0" baseline="0">
+                <a:ln>
+                  <a:noFill/>
+                </a:ln>
+                <a:solidFill>
+                  <a:schemeClr val="tx1"/>
+                </a:solidFill>
+                <a:effectLst/>
+                <a:latin typeface="Arial" panose="020B0604020202020204" pitchFamily="34" charset="0"/>
+              </a:rPr>
+              <a:t>Əgər bu sistemlərdən biri </a:t>
+            </a:r>
+            <a:r>
+              <a:rPr kumimoji="0" lang="en-US" altLang="en-US" sz="1300" b="1" i="0" u="none" strike="noStrike" cap="none" normalizeH="0" baseline="0">
+                <a:ln>
+                  <a:noFill/>
+                </a:ln>
+                <a:solidFill>
+                  <a:schemeClr val="tx1"/>
+                </a:solidFill>
+                <a:effectLst/>
+                <a:latin typeface="Arial" panose="020B0604020202020204" pitchFamily="34" charset="0"/>
+              </a:rPr>
+              <a:t>kompromisə</a:t>
+            </a:r>
+            <a:r>
+              <a:rPr kumimoji="0" lang="en-US" altLang="en-US" sz="1300" b="0" i="0" u="none" strike="noStrike" cap="none" normalizeH="0" baseline="0">
+                <a:ln>
+                  <a:noFill/>
+                </a:ln>
+                <a:solidFill>
+                  <a:schemeClr val="tx1"/>
+                </a:solidFill>
+                <a:effectLst/>
+                <a:latin typeface="Arial" panose="020B0604020202020204" pitchFamily="34" charset="0"/>
+              </a:rPr>
+              <a:t> uğrasa (məsələn, server </a:t>
+            </a:r>
+            <a:r>
+              <a:rPr kumimoji="0" lang="en-US" altLang="en-US" sz="1300" b="1" i="0" u="none" strike="noStrike" cap="none" normalizeH="0" baseline="0">
+                <a:ln>
+                  <a:noFill/>
+                </a:ln>
+                <a:solidFill>
+                  <a:schemeClr val="tx1"/>
+                </a:solidFill>
+                <a:effectLst/>
+                <a:latin typeface="Arial" panose="020B0604020202020204" pitchFamily="34" charset="0"/>
+              </a:rPr>
+              <a:t>hack</a:t>
+            </a:r>
+            <a:r>
+              <a:rPr kumimoji="0" lang="en-US" altLang="en-US" sz="1300" b="0" i="0" u="none" strike="noStrike" cap="none" normalizeH="0" baseline="0">
+                <a:ln>
+                  <a:noFill/>
+                </a:ln>
+                <a:solidFill>
+                  <a:schemeClr val="tx1"/>
+                </a:solidFill>
+                <a:effectLst/>
+                <a:latin typeface="Arial" panose="020B0604020202020204" pitchFamily="34" charset="0"/>
+              </a:rPr>
+              <a:t> olunsa), istifadəçilərin </a:t>
+            </a:r>
+            <a:r>
+              <a:rPr kumimoji="0" lang="en-US" altLang="en-US" sz="1300" b="1" i="0" u="none" strike="noStrike" cap="none" normalizeH="0" baseline="0">
+                <a:ln>
+                  <a:noFill/>
+                </a:ln>
+                <a:solidFill>
+                  <a:schemeClr val="tx1"/>
+                </a:solidFill>
+                <a:effectLst/>
+                <a:latin typeface="Arial" panose="020B0604020202020204" pitchFamily="34" charset="0"/>
+              </a:rPr>
+              <a:t>şifrələri</a:t>
+            </a:r>
+            <a:r>
+              <a:rPr kumimoji="0" lang="en-US" altLang="en-US" sz="1300" b="0" i="0" u="none" strike="noStrike" cap="none" normalizeH="0" baseline="0">
+                <a:ln>
+                  <a:noFill/>
+                </a:ln>
+                <a:solidFill>
+                  <a:schemeClr val="tx1"/>
+                </a:solidFill>
+                <a:effectLst/>
+                <a:latin typeface="Arial" panose="020B0604020202020204" pitchFamily="34" charset="0"/>
+              </a:rPr>
+              <a:t> və </a:t>
+            </a:r>
+            <a:r>
+              <a:rPr kumimoji="0" lang="en-US" altLang="en-US" sz="1300" b="1" i="0" u="none" strike="noStrike" cap="none" normalizeH="0" baseline="0">
+                <a:ln>
+                  <a:noFill/>
+                </a:ln>
+                <a:solidFill>
+                  <a:schemeClr val="tx1"/>
+                </a:solidFill>
+                <a:effectLst/>
+                <a:latin typeface="Arial" panose="020B0604020202020204" pitchFamily="34" charset="0"/>
+              </a:rPr>
+              <a:t>tokenləri</a:t>
+            </a:r>
+            <a:r>
+              <a:rPr kumimoji="0" lang="en-US" altLang="en-US" sz="1300" b="0" i="0" u="none" strike="noStrike" cap="none" normalizeH="0" baseline="0">
+                <a:ln>
+                  <a:noFill/>
+                </a:ln>
+                <a:solidFill>
+                  <a:schemeClr val="tx1"/>
+                </a:solidFill>
+                <a:effectLst/>
+                <a:latin typeface="Arial" panose="020B0604020202020204" pitchFamily="34" charset="0"/>
+              </a:rPr>
+              <a:t> əldə oluna bilər.</a:t>
+            </a:r>
+          </a:p>
+          <a:p>
+            <a:pPr marL="285750" indent="-285750">
+              <a:lnSpc>
+                <a:spcPct val="150000"/>
+              </a:lnSpc>
+              <a:buFont typeface="Wingdings" panose="05000000000000000000" pitchFamily="2" charset="2"/>
+              <a:buChar char="q"/>
+            </a:pPr>
+            <a:r>
+              <a:rPr kumimoji="0" lang="en-US" altLang="en-US" sz="1300" b="0" i="0" u="none" strike="noStrike" cap="none" normalizeH="0" baseline="0">
+                <a:ln>
+                  <a:noFill/>
+                </a:ln>
+                <a:solidFill>
+                  <a:schemeClr val="tx1"/>
+                </a:solidFill>
+                <a:effectLst/>
+                <a:latin typeface="Arial" panose="020B0604020202020204" pitchFamily="34" charset="0"/>
+              </a:rPr>
+              <a:t>Bu məlumatlar şifrələnməmiş və ya zəif qorunan şəkildə saxlanırsa, hücumçu onu rahatlıqla oxuya bilər.</a:t>
+            </a:r>
+            <a:endParaRPr lang="en-US" altLang="en-US" sz="1300">
+              <a:latin typeface="Arial" panose="020B0604020202020204" pitchFamily="34" charset="0"/>
+            </a:endParaRPr>
+          </a:p>
+          <a:p>
+            <a:pPr>
+              <a:lnSpc>
+                <a:spcPct val="150000"/>
+              </a:lnSpc>
+              <a:buNone/>
+            </a:pPr>
+            <a:endParaRPr kumimoji="0" lang="en-US" altLang="en-US" sz="1300" b="0" i="0" u="none" strike="noStrike" cap="none" normalizeH="0" baseline="0">
+              <a:ln>
+                <a:noFill/>
+              </a:ln>
+              <a:solidFill>
+                <a:schemeClr val="tx1"/>
+              </a:solidFill>
+              <a:effectLst/>
+              <a:latin typeface="Arial" panose="020B0604020202020204" pitchFamily="34" charset="0"/>
+            </a:endParaRPr>
+          </a:p>
+          <a:p>
+            <a:pPr>
+              <a:lnSpc>
+                <a:spcPct val="150000"/>
+              </a:lnSpc>
+              <a:buNone/>
+            </a:pPr>
+            <a:endParaRPr lang="en-US" altLang="en-US" sz="1300">
+              <a:latin typeface="Arial" panose="020B0604020202020204" pitchFamily="34" charset="0"/>
+            </a:endParaRPr>
+          </a:p>
+          <a:p>
+            <a:pPr>
+              <a:lnSpc>
+                <a:spcPct val="150000"/>
+              </a:lnSpc>
+              <a:buNone/>
+            </a:pPr>
+            <a:endParaRPr kumimoji="0" lang="en-US" altLang="en-US" sz="1300" b="0" i="0" u="none" strike="noStrike" cap="none" normalizeH="0" baseline="0">
+              <a:ln>
+                <a:noFill/>
+              </a:ln>
+              <a:solidFill>
+                <a:schemeClr val="tx1"/>
+              </a:solidFill>
+              <a:effectLst/>
+              <a:latin typeface="Arial" panose="020B0604020202020204" pitchFamily="34" charset="0"/>
+            </a:endParaRPr>
+          </a:p>
+        </p:txBody>
+      </p:sp>
+      <p:pic>
+        <p:nvPicPr>
+          <p:cNvPr id="4" name="Picture 3">
+            <a:extLst>
+              <a:ext uri="{FF2B5EF4-FFF2-40B4-BE49-F238E27FC236}">
+                <a16:creationId xmlns:a16="http://schemas.microsoft.com/office/drawing/2014/main" id="{05F854B0-340E-CF33-1266-F006EAD781CD}"/>
+              </a:ext>
+            </a:extLst>
+          </p:cNvPr>
+          <p:cNvPicPr>
+            <a:picLocks noChangeAspect="1"/>
+          </p:cNvPicPr>
+          <p:nvPr/>
+        </p:nvPicPr>
+        <p:blipFill>
+          <a:blip r:embed="rId2"/>
+          <a:stretch>
+            <a:fillRect/>
+          </a:stretch>
+        </p:blipFill>
+        <p:spPr>
+          <a:xfrm>
+            <a:off x="217714" y="1347738"/>
+            <a:ext cx="2905530" cy="1409897"/>
+          </a:xfrm>
+          <a:prstGeom prst="rect">
+            <a:avLst/>
+          </a:prstGeom>
+        </p:spPr>
+      </p:pic>
+    </p:spTree>
+    <p:extLst>
+      <p:ext uri="{BB962C8B-B14F-4D97-AF65-F5344CB8AC3E}">
+        <p14:creationId xmlns:p14="http://schemas.microsoft.com/office/powerpoint/2010/main" val="602505100"/>
+      </p:ext>
+    </p:extLst>
+  </p:cSld>
+  <p:clrMapOvr>
+    <a:masterClrMapping/>
+  </p:clrMapOvr>
+</p:sld>
+</file>
+
+<file path=ppt/slides/slide7.xml><?xml version="1.0" encoding="utf-8"?>
+<p:sld xmlns:a="http://schemas.openxmlformats.org/drawingml/2006/main" xmlns:r="http://schemas.openxmlformats.org/officeDocument/2006/relationships" xmlns:p="http://schemas.openxmlformats.org/presentationml/2006/main">
+  <p:cSld>
+    <p:spTree>
+      <p:nvGrpSpPr>
+        <p:cNvPr id="1" name="">
+          <a:extLst>
+            <a:ext uri="{FF2B5EF4-FFF2-40B4-BE49-F238E27FC236}">
+              <a16:creationId xmlns:a16="http://schemas.microsoft.com/office/drawing/2014/main" id="{F183F98C-7E99-095E-1DA4-BB46F61A5284}"/>
+            </a:ext>
+          </a:extLst>
+        </p:cNvPr>
+        <p:cNvGrpSpPr/>
+        <p:nvPr/>
+      </p:nvGrpSpPr>
+      <p:grpSpPr>
+        <a:xfrm>
+          <a:off x="0" y="0"/>
+          <a:ext cx="0" cy="0"/>
+          <a:chOff x="0" y="0"/>
+          <a:chExt cx="0" cy="0"/>
+        </a:xfrm>
+      </p:grpSpPr>
+      <p:sp>
+        <p:nvSpPr>
+          <p:cNvPr id="3" name="TextBox 2">
+            <a:extLst>
+              <a:ext uri="{FF2B5EF4-FFF2-40B4-BE49-F238E27FC236}">
+                <a16:creationId xmlns:a16="http://schemas.microsoft.com/office/drawing/2014/main" id="{B9DB5C6B-F9E9-D45B-B825-F3A2E2919E4F}"/>
+              </a:ext>
+            </a:extLst>
+          </p:cNvPr>
+          <p:cNvSpPr txBox="1"/>
+          <p:nvPr/>
+        </p:nvSpPr>
+        <p:spPr>
+          <a:xfrm>
+            <a:off x="217714" y="255046"/>
+            <a:ext cx="11756571" cy="6241580"/>
+          </a:xfrm>
+          <a:prstGeom prst="rect">
+            <a:avLst/>
+          </a:prstGeom>
+          <a:noFill/>
+        </p:spPr>
+        <p:txBody>
+          <a:bodyPr wrap="square">
+            <a:spAutoFit/>
+          </a:bodyPr>
+          <a:lstStyle/>
+          <a:p>
+            <a:pPr>
+              <a:lnSpc>
+                <a:spcPct val="150000"/>
+              </a:lnSpc>
+              <a:buNone/>
+            </a:pPr>
+            <a:r>
+              <a:rPr kumimoji="0" lang="en-US" altLang="en-US" sz="1300" b="1" i="0" u="none" strike="noStrike" cap="none" normalizeH="0" baseline="0">
+                <a:ln>
+                  <a:noFill/>
+                </a:ln>
+                <a:solidFill>
+                  <a:schemeClr val="tx1"/>
+                </a:solidFill>
+                <a:effectLst/>
+                <a:latin typeface="Arial" panose="020B0604020202020204" pitchFamily="34" charset="0"/>
+              </a:rPr>
+              <a:t>Doğru yanaşma nədir? </a:t>
+            </a:r>
+          </a:p>
+          <a:p>
+            <a:pPr>
+              <a:lnSpc>
+                <a:spcPct val="150000"/>
+              </a:lnSpc>
+              <a:buNone/>
+            </a:pPr>
+            <a:endParaRPr lang="en-US" altLang="en-US" sz="1300" b="1">
+              <a:latin typeface="Arial" panose="020B0604020202020204" pitchFamily="34" charset="0"/>
+            </a:endParaRPr>
+          </a:p>
+          <a:p>
+            <a:pPr>
+              <a:lnSpc>
+                <a:spcPct val="150000"/>
+              </a:lnSpc>
+              <a:buNone/>
+            </a:pPr>
+            <a:r>
+              <a:rPr kumimoji="0" lang="en-US" altLang="en-US" sz="1300" b="0" i="0" u="none" strike="noStrike" cap="none" normalizeH="0" baseline="0">
+                <a:ln>
+                  <a:noFill/>
+                </a:ln>
+                <a:solidFill>
+                  <a:schemeClr val="tx1"/>
+                </a:solidFill>
+                <a:effectLst/>
+                <a:latin typeface="Arial" panose="020B0604020202020204" pitchFamily="34" charset="0"/>
+              </a:rPr>
+              <a:t>Əvəzində sessiyada təkcə </a:t>
+            </a:r>
+            <a:r>
+              <a:rPr kumimoji="0" lang="en-US" altLang="en-US" sz="1300" b="1" i="0" u="none" strike="noStrike" cap="none" normalizeH="0" baseline="0">
+                <a:ln>
+                  <a:noFill/>
+                </a:ln>
+                <a:solidFill>
+                  <a:schemeClr val="tx1"/>
+                </a:solidFill>
+                <a:effectLst/>
+                <a:latin typeface="Arial" panose="020B0604020202020204" pitchFamily="34" charset="0"/>
+              </a:rPr>
+              <a:t>user_id </a:t>
+            </a:r>
+            <a:r>
+              <a:rPr kumimoji="0" lang="en-US" altLang="en-US" sz="1300" b="0" i="0" u="none" strike="noStrike" cap="none" normalizeH="0" baseline="0">
+                <a:ln>
+                  <a:noFill/>
+                </a:ln>
+                <a:solidFill>
+                  <a:schemeClr val="tx1"/>
+                </a:solidFill>
+                <a:effectLst/>
+                <a:latin typeface="Arial" panose="020B0604020202020204" pitchFamily="34" charset="0"/>
+              </a:rPr>
+              <a:t>və ya </a:t>
+            </a:r>
+            <a:r>
+              <a:rPr kumimoji="0" lang="en-US" altLang="en-US" sz="1300" b="1" i="0" u="none" strike="noStrike" cap="none" normalizeH="0" baseline="0">
+                <a:ln>
+                  <a:noFill/>
+                </a:ln>
+                <a:solidFill>
+                  <a:schemeClr val="tx1"/>
+                </a:solidFill>
+                <a:effectLst/>
+                <a:latin typeface="Arial" panose="020B0604020202020204" pitchFamily="34" charset="0"/>
+              </a:rPr>
+              <a:t>username</a:t>
+            </a:r>
+            <a:r>
+              <a:rPr kumimoji="0" lang="en-US" altLang="en-US" sz="1300" b="0" i="0" u="none" strike="noStrike" cap="none" normalizeH="0" baseline="0">
+                <a:ln>
+                  <a:noFill/>
+                </a:ln>
+                <a:solidFill>
+                  <a:schemeClr val="tx1"/>
+                </a:solidFill>
+                <a:effectLst/>
+                <a:latin typeface="Arial" panose="020B0604020202020204" pitchFamily="34" charset="0"/>
+              </a:rPr>
+              <a:t> kimi məlumat saxlamaq tövsiyə olunur. </a:t>
+            </a:r>
+            <a:r>
+              <a:rPr kumimoji="0" lang="en-US" altLang="en-US" sz="1300" b="1" i="0" u="none" strike="noStrike" cap="none" normalizeH="0" baseline="0">
+                <a:ln>
+                  <a:noFill/>
+                </a:ln>
+                <a:solidFill>
+                  <a:schemeClr val="tx1"/>
+                </a:solidFill>
+                <a:effectLst/>
+                <a:latin typeface="Arial" panose="020B0604020202020204" pitchFamily="34" charset="0"/>
+              </a:rPr>
+              <a:t>Məsələn</a:t>
+            </a:r>
+            <a:r>
+              <a:rPr kumimoji="0" lang="en-US" altLang="en-US" sz="1300" b="0" i="0" u="none" strike="noStrike" cap="none" normalizeH="0" baseline="0">
+                <a:ln>
+                  <a:noFill/>
+                </a:ln>
+                <a:solidFill>
+                  <a:schemeClr val="tx1"/>
+                </a:solidFill>
+                <a:effectLst/>
+                <a:latin typeface="Arial" panose="020B0604020202020204" pitchFamily="34" charset="0"/>
+              </a:rPr>
+              <a:t>:</a:t>
+            </a:r>
+          </a:p>
+          <a:p>
+            <a:pPr>
+              <a:lnSpc>
+                <a:spcPct val="150000"/>
+              </a:lnSpc>
+              <a:buNone/>
+            </a:pPr>
+            <a:endParaRPr lang="en-US" altLang="en-US" sz="1300">
+              <a:latin typeface="Arial" panose="020B0604020202020204" pitchFamily="34" charset="0"/>
+            </a:endParaRPr>
+          </a:p>
+          <a:p>
+            <a:pPr>
+              <a:lnSpc>
+                <a:spcPct val="150000"/>
+              </a:lnSpc>
+              <a:buNone/>
+            </a:pPr>
+            <a:endParaRPr kumimoji="0" lang="en-US" altLang="en-US" sz="1300" b="0" i="0" u="none" strike="noStrike" cap="none" normalizeH="0" baseline="0">
+              <a:ln>
+                <a:noFill/>
+              </a:ln>
+              <a:solidFill>
+                <a:schemeClr val="tx1"/>
+              </a:solidFill>
+              <a:effectLst/>
+              <a:latin typeface="Arial" panose="020B0604020202020204" pitchFamily="34" charset="0"/>
+            </a:endParaRPr>
+          </a:p>
+          <a:p>
+            <a:pPr>
+              <a:lnSpc>
+                <a:spcPct val="150000"/>
+              </a:lnSpc>
+              <a:buNone/>
+            </a:pPr>
+            <a:endParaRPr lang="en-US" altLang="en-US" sz="1300">
+              <a:latin typeface="Arial" panose="020B0604020202020204" pitchFamily="34" charset="0"/>
+            </a:endParaRPr>
+          </a:p>
+          <a:p>
+            <a:pPr>
+              <a:lnSpc>
+                <a:spcPct val="150000"/>
+              </a:lnSpc>
+              <a:buNone/>
+            </a:pPr>
+            <a:endParaRPr kumimoji="0" lang="en-US" altLang="en-US" sz="1300" b="0" i="0" u="none" strike="noStrike" cap="none" normalizeH="0" baseline="0">
+              <a:ln>
+                <a:noFill/>
+              </a:ln>
+              <a:solidFill>
+                <a:schemeClr val="tx1"/>
+              </a:solidFill>
+              <a:effectLst/>
+              <a:latin typeface="Arial" panose="020B0604020202020204" pitchFamily="34" charset="0"/>
+            </a:endParaRPr>
+          </a:p>
+          <a:p>
+            <a:pPr>
+              <a:lnSpc>
+                <a:spcPct val="150000"/>
+              </a:lnSpc>
+              <a:buNone/>
+            </a:pPr>
+            <a:endParaRPr lang="en-US" altLang="en-US" sz="1300">
+              <a:latin typeface="Arial" panose="020B0604020202020204" pitchFamily="34" charset="0"/>
+            </a:endParaRPr>
+          </a:p>
+          <a:p>
+            <a:pPr>
+              <a:lnSpc>
+                <a:spcPct val="150000"/>
+              </a:lnSpc>
+              <a:buNone/>
+            </a:pPr>
+            <a:r>
+              <a:rPr lang="en-US" sz="1400"/>
+              <a:t>Sonra lazım olan digər məlumatlar (email, rol, şifrə və s.) verilənlər bazasından çəkilir:</a:t>
+            </a:r>
+          </a:p>
+          <a:p>
+            <a:pPr>
+              <a:lnSpc>
+                <a:spcPct val="150000"/>
+              </a:lnSpc>
+              <a:buNone/>
+            </a:pPr>
+            <a:endParaRPr kumimoji="0" lang="en-US" altLang="en-US" sz="1400" b="0" i="0" u="none" strike="noStrike" cap="none" normalizeH="0" baseline="0">
+              <a:ln>
+                <a:noFill/>
+              </a:ln>
+              <a:solidFill>
+                <a:schemeClr val="tx1"/>
+              </a:solidFill>
+              <a:effectLst/>
+              <a:latin typeface="Arial" panose="020B0604020202020204" pitchFamily="34" charset="0"/>
+            </a:endParaRPr>
+          </a:p>
+          <a:p>
+            <a:pPr>
+              <a:lnSpc>
+                <a:spcPct val="150000"/>
+              </a:lnSpc>
+              <a:buNone/>
+            </a:pPr>
+            <a:endParaRPr lang="en-US" altLang="en-US" sz="1400">
+              <a:latin typeface="Arial" panose="020B0604020202020204" pitchFamily="34" charset="0"/>
+            </a:endParaRPr>
+          </a:p>
+          <a:p>
+            <a:pPr>
+              <a:lnSpc>
+                <a:spcPct val="150000"/>
+              </a:lnSpc>
+              <a:buNone/>
+            </a:pPr>
+            <a:endParaRPr kumimoji="0" lang="en-US" altLang="en-US" sz="1400" b="0" i="0" u="none" strike="noStrike" cap="none" normalizeH="0" baseline="0">
+              <a:ln>
+                <a:noFill/>
+              </a:ln>
+              <a:solidFill>
+                <a:schemeClr val="tx1"/>
+              </a:solidFill>
+              <a:effectLst/>
+              <a:latin typeface="Arial" panose="020B0604020202020204" pitchFamily="34" charset="0"/>
+            </a:endParaRPr>
+          </a:p>
+          <a:p>
+            <a:pPr>
+              <a:lnSpc>
+                <a:spcPct val="150000"/>
+              </a:lnSpc>
+              <a:buNone/>
+            </a:pPr>
+            <a:endParaRPr lang="en-US" altLang="en-US" sz="1400">
+              <a:latin typeface="Arial" panose="020B0604020202020204" pitchFamily="34" charset="0"/>
+            </a:endParaRPr>
+          </a:p>
+          <a:p>
+            <a:pPr>
+              <a:lnSpc>
+                <a:spcPct val="150000"/>
+              </a:lnSpc>
+              <a:buNone/>
+            </a:pPr>
+            <a:endParaRPr kumimoji="0" lang="en-US" altLang="en-US" sz="1400" b="0" i="0" u="none" strike="noStrike" cap="none" normalizeH="0" baseline="0">
+              <a:ln>
+                <a:noFill/>
+              </a:ln>
+              <a:solidFill>
+                <a:schemeClr val="tx1"/>
+              </a:solidFill>
+              <a:effectLst/>
+              <a:latin typeface="Arial" panose="020B0604020202020204" pitchFamily="34" charset="0"/>
+            </a:endParaRPr>
+          </a:p>
+          <a:p>
+            <a:pPr>
+              <a:lnSpc>
+                <a:spcPct val="150000"/>
+              </a:lnSpc>
+              <a:buNone/>
+            </a:pPr>
+            <a:endParaRPr lang="en-US" altLang="en-US" sz="1400">
+              <a:latin typeface="Arial" panose="020B0604020202020204" pitchFamily="34" charset="0"/>
+            </a:endParaRPr>
+          </a:p>
+          <a:p>
+            <a:pPr>
+              <a:lnSpc>
+                <a:spcPct val="150000"/>
+              </a:lnSpc>
+              <a:buNone/>
+            </a:pPr>
+            <a:r>
+              <a:rPr kumimoji="0" lang="en-US" altLang="en-US" sz="1300" b="1" i="0" u="none" strike="noStrike" cap="none" normalizeH="0" baseline="0">
+                <a:ln>
+                  <a:noFill/>
+                </a:ln>
+                <a:solidFill>
+                  <a:schemeClr val="tx1"/>
+                </a:solidFill>
+                <a:effectLst/>
+                <a:latin typeface="Arial" panose="020B0604020202020204" pitchFamily="34" charset="0"/>
+              </a:rPr>
+              <a:t>Real Həyat Nümunəsi ilə Təsəvvür Edin</a:t>
+            </a:r>
+            <a:r>
+              <a:rPr kumimoji="0" lang="en-US" altLang="en-US" sz="1300" b="0" i="0" u="none" strike="noStrike" cap="none" normalizeH="0" baseline="0">
+                <a:ln>
+                  <a:noFill/>
+                </a:ln>
+                <a:solidFill>
+                  <a:schemeClr val="tx1"/>
+                </a:solidFill>
+                <a:effectLst/>
+                <a:latin typeface="Arial" panose="020B0604020202020204" pitchFamily="34" charset="0"/>
+              </a:rPr>
+              <a:t>:</a:t>
+            </a:r>
+          </a:p>
+          <a:p>
+            <a:pPr>
+              <a:lnSpc>
+                <a:spcPct val="150000"/>
+              </a:lnSpc>
+              <a:buNone/>
+            </a:pPr>
+            <a:r>
+              <a:rPr kumimoji="0" lang="en-US" altLang="en-US" sz="1300" b="0" i="0" u="none" strike="noStrike" cap="none" normalizeH="0" baseline="0">
+                <a:ln>
+                  <a:noFill/>
+                </a:ln>
+                <a:solidFill>
+                  <a:schemeClr val="tx1"/>
+                </a:solidFill>
+                <a:effectLst/>
+                <a:latin typeface="Arial" panose="020B0604020202020204" pitchFamily="34" charset="0"/>
+              </a:rPr>
+              <a:t>🔐 </a:t>
+            </a:r>
+            <a:r>
+              <a:rPr kumimoji="0" lang="en-US" altLang="en-US" sz="1300" b="1" i="0" u="none" strike="noStrike" cap="none" normalizeH="0" baseline="0">
+                <a:ln>
+                  <a:noFill/>
+                </a:ln>
+                <a:solidFill>
+                  <a:schemeClr val="tx1"/>
+                </a:solidFill>
+                <a:effectLst/>
+                <a:latin typeface="Arial" panose="020B0604020202020204" pitchFamily="34" charset="0"/>
+              </a:rPr>
+              <a:t>Yanlış üsul </a:t>
+            </a:r>
+            <a:r>
+              <a:rPr kumimoji="0" lang="en-US" altLang="en-US" sz="1300" b="0" i="0" u="none" strike="noStrike" cap="none" normalizeH="0" baseline="0">
+                <a:ln>
+                  <a:noFill/>
+                </a:ln>
+                <a:solidFill>
+                  <a:schemeClr val="tx1"/>
+                </a:solidFill>
+                <a:effectLst/>
+                <a:latin typeface="Arial" panose="020B0604020202020204" pitchFamily="34" charset="0"/>
+              </a:rPr>
+              <a:t>– sən bank kartının </a:t>
+            </a:r>
+            <a:r>
+              <a:rPr kumimoji="0" lang="en-US" altLang="en-US" sz="1300" b="1" i="0" u="none" strike="noStrike" cap="none" normalizeH="0" baseline="0">
+                <a:ln>
+                  <a:noFill/>
+                </a:ln>
+                <a:solidFill>
+                  <a:schemeClr val="tx1"/>
+                </a:solidFill>
+                <a:effectLst/>
+                <a:latin typeface="Arial" panose="020B0604020202020204" pitchFamily="34" charset="0"/>
+              </a:rPr>
+              <a:t>PIN</a:t>
+            </a:r>
+            <a:r>
+              <a:rPr kumimoji="0" lang="en-US" altLang="en-US" sz="1300" b="0" i="0" u="none" strike="noStrike" cap="none" normalizeH="0" baseline="0">
+                <a:ln>
+                  <a:noFill/>
+                </a:ln>
+                <a:solidFill>
+                  <a:schemeClr val="tx1"/>
+                </a:solidFill>
+                <a:effectLst/>
+                <a:latin typeface="Arial" panose="020B0604020202020204" pitchFamily="34" charset="0"/>
+              </a:rPr>
+              <a:t> kodunu sessiyada saxlayırsan.</a:t>
+            </a:r>
+          </a:p>
+          <a:p>
+            <a:pPr>
+              <a:lnSpc>
+                <a:spcPct val="150000"/>
+              </a:lnSpc>
+              <a:buNone/>
+            </a:pPr>
+            <a:r>
+              <a:rPr kumimoji="0" lang="en-US" altLang="en-US" sz="1300" b="0" i="0" u="none" strike="noStrike" cap="none" normalizeH="0" baseline="0">
+                <a:ln>
+                  <a:noFill/>
+                </a:ln>
+                <a:solidFill>
+                  <a:schemeClr val="tx1"/>
+                </a:solidFill>
+                <a:effectLst/>
+                <a:latin typeface="Arial" panose="020B0604020202020204" pitchFamily="34" charset="0"/>
+              </a:rPr>
+              <a:t>✅ </a:t>
+            </a:r>
+            <a:r>
+              <a:rPr kumimoji="0" lang="en-US" altLang="en-US" sz="1300" b="1" i="0" u="none" strike="noStrike" cap="none" normalizeH="0" baseline="0">
+                <a:ln>
+                  <a:noFill/>
+                </a:ln>
+                <a:solidFill>
+                  <a:schemeClr val="tx1"/>
+                </a:solidFill>
+                <a:effectLst/>
+                <a:latin typeface="Arial" panose="020B0604020202020204" pitchFamily="34" charset="0"/>
+              </a:rPr>
+              <a:t>Doğru üsul </a:t>
+            </a:r>
+            <a:r>
+              <a:rPr kumimoji="0" lang="en-US" altLang="en-US" sz="1300" b="0" i="0" u="none" strike="noStrike" cap="none" normalizeH="0" baseline="0">
+                <a:ln>
+                  <a:noFill/>
+                </a:ln>
+                <a:solidFill>
+                  <a:schemeClr val="tx1"/>
+                </a:solidFill>
+                <a:effectLst/>
+                <a:latin typeface="Arial" panose="020B0604020202020204" pitchFamily="34" charset="0"/>
+              </a:rPr>
+              <a:t>– sən sadəcə istifadəçinin </a:t>
+            </a:r>
+            <a:r>
+              <a:rPr kumimoji="0" lang="en-US" altLang="en-US" sz="1300" b="1" i="0" u="none" strike="noStrike" cap="none" normalizeH="0" baseline="0">
+                <a:ln>
+                  <a:noFill/>
+                </a:ln>
+                <a:solidFill>
+                  <a:schemeClr val="tx1"/>
+                </a:solidFill>
+                <a:effectLst/>
+                <a:latin typeface="Arial" panose="020B0604020202020204" pitchFamily="34" charset="0"/>
+              </a:rPr>
+              <a:t>ID</a:t>
+            </a:r>
+            <a:r>
+              <a:rPr kumimoji="0" lang="en-US" altLang="en-US" sz="1300" b="0" i="0" u="none" strike="noStrike" cap="none" normalizeH="0" baseline="0">
+                <a:ln>
+                  <a:noFill/>
+                </a:ln>
+                <a:solidFill>
+                  <a:schemeClr val="tx1"/>
+                </a:solidFill>
+                <a:effectLst/>
+                <a:latin typeface="Arial" panose="020B0604020202020204" pitchFamily="34" charset="0"/>
+              </a:rPr>
+              <a:t>-sini saxlayırsan, digər məlumatları ehtiyac olduqda bank sistemindən soruşursan.</a:t>
+            </a:r>
+            <a:endParaRPr kumimoji="0" lang="en-US" altLang="en-US" sz="1400" b="0" i="0" u="none" strike="noStrike" cap="none" normalizeH="0" baseline="0">
+              <a:ln>
+                <a:noFill/>
+              </a:ln>
+              <a:solidFill>
+                <a:schemeClr val="tx1"/>
+              </a:solidFill>
+              <a:effectLst/>
+              <a:latin typeface="Arial" panose="020B0604020202020204" pitchFamily="34" charset="0"/>
+            </a:endParaRPr>
+          </a:p>
+          <a:p>
+            <a:pPr>
+              <a:lnSpc>
+                <a:spcPct val="150000"/>
+              </a:lnSpc>
+              <a:buNone/>
+            </a:pPr>
+            <a:endParaRPr lang="en-US" altLang="en-US" sz="1400">
+              <a:latin typeface="Arial" panose="020B0604020202020204" pitchFamily="34" charset="0"/>
+            </a:endParaRPr>
+          </a:p>
+          <a:p>
+            <a:pPr>
+              <a:lnSpc>
+                <a:spcPct val="150000"/>
+              </a:lnSpc>
+              <a:buNone/>
+            </a:pPr>
+            <a:endParaRPr kumimoji="0" lang="en-US" altLang="en-US" sz="1300" b="0" i="0" u="none" strike="noStrike" cap="none" normalizeH="0" baseline="0">
+              <a:ln>
+                <a:noFill/>
+              </a:ln>
+              <a:solidFill>
+                <a:schemeClr val="tx1"/>
+              </a:solidFill>
+              <a:effectLst/>
+              <a:latin typeface="Arial" panose="020B0604020202020204" pitchFamily="34" charset="0"/>
+            </a:endParaRPr>
+          </a:p>
+        </p:txBody>
+      </p:sp>
+      <p:pic>
+        <p:nvPicPr>
+          <p:cNvPr id="4" name="Picture 3">
+            <a:extLst>
+              <a:ext uri="{FF2B5EF4-FFF2-40B4-BE49-F238E27FC236}">
+                <a16:creationId xmlns:a16="http://schemas.microsoft.com/office/drawing/2014/main" id="{3A2B433E-E95A-B301-9863-010B7CEBB563}"/>
+              </a:ext>
+            </a:extLst>
+          </p:cNvPr>
+          <p:cNvPicPr>
+            <a:picLocks noChangeAspect="1"/>
+          </p:cNvPicPr>
+          <p:nvPr/>
+        </p:nvPicPr>
+        <p:blipFill>
+          <a:blip r:embed="rId2"/>
+          <a:stretch>
+            <a:fillRect/>
+          </a:stretch>
+        </p:blipFill>
+        <p:spPr>
+          <a:xfrm>
+            <a:off x="217714" y="1397261"/>
+            <a:ext cx="2105319" cy="952633"/>
+          </a:xfrm>
+          <a:prstGeom prst="rect">
+            <a:avLst/>
+          </a:prstGeom>
+        </p:spPr>
+      </p:pic>
+      <p:pic>
+        <p:nvPicPr>
+          <p:cNvPr id="6" name="Picture 5">
+            <a:extLst>
+              <a:ext uri="{FF2B5EF4-FFF2-40B4-BE49-F238E27FC236}">
+                <a16:creationId xmlns:a16="http://schemas.microsoft.com/office/drawing/2014/main" id="{59C714E0-6741-349C-FF30-CFE3F2D6CD1A}"/>
+              </a:ext>
+            </a:extLst>
+          </p:cNvPr>
+          <p:cNvPicPr>
+            <a:picLocks noChangeAspect="1"/>
+          </p:cNvPicPr>
+          <p:nvPr/>
+        </p:nvPicPr>
+        <p:blipFill>
+          <a:blip r:embed="rId3"/>
+          <a:stretch>
+            <a:fillRect/>
+          </a:stretch>
+        </p:blipFill>
+        <p:spPr>
+          <a:xfrm>
+            <a:off x="217714" y="3217529"/>
+            <a:ext cx="3267531" cy="781159"/>
+          </a:xfrm>
+          <a:prstGeom prst="rect">
+            <a:avLst/>
+          </a:prstGeom>
+        </p:spPr>
+      </p:pic>
+    </p:spTree>
+    <p:extLst>
+      <p:ext uri="{BB962C8B-B14F-4D97-AF65-F5344CB8AC3E}">
+        <p14:creationId xmlns:p14="http://schemas.microsoft.com/office/powerpoint/2010/main" val="4158655786"/>
+      </p:ext>
+    </p:extLst>
+  </p:cSld>
+  <p:clrMapOvr>
+    <a:masterClrMapping/>
+  </p:clrMapOvr>
+</p:sld>
+</file>
+
+<file path=ppt/slides/slide8.xml><?xml version="1.0" encoding="utf-8"?>
+<p:sld xmlns:a="http://schemas.openxmlformats.org/drawingml/2006/main" xmlns:r="http://schemas.openxmlformats.org/officeDocument/2006/relationships" xmlns:p="http://schemas.openxmlformats.org/presentationml/2006/main">
+  <p:cSld>
+    <p:spTree>
+      <p:nvGrpSpPr>
+        <p:cNvPr id="1" name="">
+          <a:extLst>
+            <a:ext uri="{FF2B5EF4-FFF2-40B4-BE49-F238E27FC236}">
+              <a16:creationId xmlns:a16="http://schemas.microsoft.com/office/drawing/2014/main" id="{9EC4B9CF-705C-2D76-B5C9-12D70FADCE37}"/>
+            </a:ext>
+          </a:extLst>
+        </p:cNvPr>
+        <p:cNvGrpSpPr/>
+        <p:nvPr/>
+      </p:nvGrpSpPr>
+      <p:grpSpPr>
+        <a:xfrm>
+          <a:off x="0" y="0"/>
+          <a:ext cx="0" cy="0"/>
+          <a:chOff x="0" y="0"/>
+          <a:chExt cx="0" cy="0"/>
+        </a:xfrm>
+      </p:grpSpPr>
+      <p:sp>
+        <p:nvSpPr>
+          <p:cNvPr id="3" name="TextBox 2">
+            <a:extLst>
+              <a:ext uri="{FF2B5EF4-FFF2-40B4-BE49-F238E27FC236}">
+                <a16:creationId xmlns:a16="http://schemas.microsoft.com/office/drawing/2014/main" id="{5B9E9FB4-B003-22F9-8DB1-458BDE6A95F7}"/>
+              </a:ext>
+            </a:extLst>
+          </p:cNvPr>
+          <p:cNvSpPr txBox="1"/>
+          <p:nvPr/>
+        </p:nvSpPr>
+        <p:spPr>
+          <a:xfrm>
+            <a:off x="217714" y="255046"/>
+            <a:ext cx="11756571" cy="955518"/>
+          </a:xfrm>
+          <a:prstGeom prst="rect">
+            <a:avLst/>
+          </a:prstGeom>
+          <a:noFill/>
+        </p:spPr>
+        <p:txBody>
+          <a:bodyPr wrap="square">
+            <a:spAutoFit/>
+          </a:bodyPr>
+          <a:lstStyle/>
+          <a:p>
+            <a:pPr>
+              <a:lnSpc>
+                <a:spcPct val="150000"/>
+              </a:lnSpc>
+              <a:buNone/>
+            </a:pPr>
+            <a:r>
+              <a:rPr kumimoji="0" lang="en-US" altLang="en-US" sz="1300" b="1" i="0" u="none" strike="noStrike" cap="none" normalizeH="0" baseline="0">
+                <a:ln>
+                  <a:noFill/>
+                </a:ln>
+                <a:solidFill>
+                  <a:schemeClr val="tx1"/>
+                </a:solidFill>
+                <a:effectLst/>
+                <a:latin typeface="Arial" panose="020B0604020202020204" pitchFamily="34" charset="0"/>
+              </a:rPr>
+              <a:t>Ümumi Qayda</a:t>
+            </a:r>
+            <a:r>
+              <a:rPr kumimoji="0" lang="en-US" altLang="en-US" sz="1300" b="0" i="0" u="none" strike="noStrike" cap="none" normalizeH="0" baseline="0">
+                <a:ln>
+                  <a:noFill/>
+                </a:ln>
+                <a:solidFill>
+                  <a:schemeClr val="tx1"/>
+                </a:solidFill>
+                <a:effectLst/>
+                <a:latin typeface="Arial" panose="020B0604020202020204" pitchFamily="34" charset="0"/>
+              </a:rPr>
+              <a:t>:</a:t>
+            </a:r>
+          </a:p>
+          <a:p>
+            <a:pPr>
+              <a:lnSpc>
+                <a:spcPct val="150000"/>
+              </a:lnSpc>
+              <a:buNone/>
+            </a:pPr>
+            <a:endParaRPr lang="en-US" altLang="en-US" sz="1300">
+              <a:latin typeface="Arial" panose="020B0604020202020204" pitchFamily="34" charset="0"/>
+            </a:endParaRPr>
+          </a:p>
+          <a:p>
+            <a:pPr>
+              <a:lnSpc>
+                <a:spcPct val="150000"/>
+              </a:lnSpc>
+              <a:buNone/>
+            </a:pPr>
+            <a:endParaRPr kumimoji="0" lang="en-US" altLang="en-US" sz="1300" b="0" i="0" u="none" strike="noStrike" cap="none" normalizeH="0" baseline="0">
+              <a:ln>
+                <a:noFill/>
+              </a:ln>
+              <a:solidFill>
+                <a:schemeClr val="tx1"/>
+              </a:solidFill>
+              <a:effectLst/>
+              <a:latin typeface="Arial" panose="020B0604020202020204" pitchFamily="34" charset="0"/>
+            </a:endParaRPr>
+          </a:p>
+        </p:txBody>
+      </p:sp>
+      <p:graphicFrame>
+        <p:nvGraphicFramePr>
+          <p:cNvPr id="2" name="Table 1">
+            <a:extLst>
+              <a:ext uri="{FF2B5EF4-FFF2-40B4-BE49-F238E27FC236}">
+                <a16:creationId xmlns:a16="http://schemas.microsoft.com/office/drawing/2014/main" id="{F3F4EBC3-FEAB-32C6-3B46-E8492C6EEB12}"/>
+              </a:ext>
+            </a:extLst>
+          </p:cNvPr>
+          <p:cNvGraphicFramePr>
+            <a:graphicFrameLocks noGrp="1"/>
+          </p:cNvGraphicFramePr>
+          <p:nvPr>
+            <p:extLst>
+              <p:ext uri="{D42A27DB-BD31-4B8C-83A1-F6EECF244321}">
+                <p14:modId xmlns:p14="http://schemas.microsoft.com/office/powerpoint/2010/main" val="2775543925"/>
+              </p:ext>
+            </p:extLst>
+          </p:nvPr>
+        </p:nvGraphicFramePr>
+        <p:xfrm>
+          <a:off x="217714" y="996500"/>
+          <a:ext cx="11756571" cy="1869246"/>
+        </p:xfrm>
+        <a:graphic>
+          <a:graphicData uri="http://schemas.openxmlformats.org/drawingml/2006/table">
+            <a:tbl>
+              <a:tblPr/>
+              <a:tblGrid>
+                <a:gridCol w="5391234">
+                  <a:extLst>
+                    <a:ext uri="{9D8B030D-6E8A-4147-A177-3AD203B41FA5}">
+                      <a16:colId xmlns:a16="http://schemas.microsoft.com/office/drawing/2014/main" val="440513709"/>
+                    </a:ext>
+                  </a:extLst>
+                </a:gridCol>
+                <a:gridCol w="2130458">
+                  <a:extLst>
+                    <a:ext uri="{9D8B030D-6E8A-4147-A177-3AD203B41FA5}">
+                      <a16:colId xmlns:a16="http://schemas.microsoft.com/office/drawing/2014/main" val="1285996696"/>
+                    </a:ext>
+                  </a:extLst>
+                </a:gridCol>
+                <a:gridCol w="4234879">
+                  <a:extLst>
+                    <a:ext uri="{9D8B030D-6E8A-4147-A177-3AD203B41FA5}">
+                      <a16:colId xmlns:a16="http://schemas.microsoft.com/office/drawing/2014/main" val="547759086"/>
+                    </a:ext>
+                  </a:extLst>
+                </a:gridCol>
+              </a:tblGrid>
+              <a:tr h="623082">
+                <a:tc>
+                  <a:txBody>
+                    <a:bodyPr/>
+                    <a:lstStyle/>
+                    <a:p>
+                      <a:r>
+                        <a:rPr lang="en-US" b="1"/>
+                        <a:t>Məlumat Növü</a:t>
+                      </a:r>
+                    </a:p>
+                  </a:txBody>
+                  <a:tcPr anchor="ctr">
+                    <a:lnL w="12700" cap="flat" cmpd="sng" algn="ctr">
+                      <a:solidFill>
+                        <a:schemeClr val="tx1"/>
+                      </a:solidFill>
+                      <a:prstDash val="solid"/>
+                      <a:round/>
+                      <a:headEnd type="none" w="med" len="med"/>
+                      <a:tailEnd type="none" w="med" len="med"/>
+                    </a:lnL>
+                    <a:lnR w="12700" cap="flat" cmpd="sng" algn="ctr">
+                      <a:solidFill>
+                        <a:schemeClr val="tx1"/>
+                      </a:solidFill>
+                      <a:prstDash val="solid"/>
+                      <a:round/>
+                      <a:headEnd type="none" w="med" len="med"/>
+                      <a:tailEnd type="none" w="med" len="med"/>
+                    </a:lnR>
+                    <a:lnT w="12700" cap="flat" cmpd="sng" algn="ctr">
+                      <a:solidFill>
+                        <a:schemeClr val="tx1"/>
+                      </a:solidFill>
+                      <a:prstDash val="solid"/>
+                      <a:round/>
+                      <a:headEnd type="none" w="med" len="med"/>
+                      <a:tailEnd type="none" w="med" len="med"/>
+                    </a:lnT>
+                    <a:lnB w="12700" cap="flat" cmpd="sng" algn="ctr">
+                      <a:solidFill>
+                        <a:schemeClr val="tx1"/>
+                      </a:solidFill>
+                      <a:prstDash val="solid"/>
+                      <a:round/>
+                      <a:headEnd type="none" w="med" len="med"/>
+                      <a:tailEnd type="none" w="med" len="med"/>
+                    </a:lnB>
+                    <a:solidFill>
+                      <a:schemeClr val="accent2"/>
+                    </a:solidFill>
+                  </a:tcPr>
+                </a:tc>
+                <a:tc>
+                  <a:txBody>
+                    <a:bodyPr/>
+                    <a:lstStyle/>
+                    <a:p>
+                      <a:r>
+                        <a:rPr lang="en-US" b="1"/>
+                        <a:t>Sessiyada Saxlamaq</a:t>
+                      </a:r>
+                    </a:p>
+                  </a:txBody>
+                  <a:tcPr anchor="ctr">
+                    <a:lnL w="12700" cap="flat" cmpd="sng" algn="ctr">
+                      <a:solidFill>
+                        <a:schemeClr val="tx1"/>
+                      </a:solidFill>
+                      <a:prstDash val="solid"/>
+                      <a:round/>
+                      <a:headEnd type="none" w="med" len="med"/>
+                      <a:tailEnd type="none" w="med" len="med"/>
+                    </a:lnL>
+                    <a:lnR w="12700" cap="flat" cmpd="sng" algn="ctr">
+                      <a:solidFill>
+                        <a:schemeClr val="tx1"/>
+                      </a:solidFill>
+                      <a:prstDash val="solid"/>
+                      <a:round/>
+                      <a:headEnd type="none" w="med" len="med"/>
+                      <a:tailEnd type="none" w="med" len="med"/>
+                    </a:lnR>
+                    <a:lnT w="12700" cap="flat" cmpd="sng" algn="ctr">
+                      <a:solidFill>
+                        <a:schemeClr val="tx1"/>
+                      </a:solidFill>
+                      <a:prstDash val="solid"/>
+                      <a:round/>
+                      <a:headEnd type="none" w="med" len="med"/>
+                      <a:tailEnd type="none" w="med" len="med"/>
+                    </a:lnT>
+                    <a:lnB w="12700" cap="flat" cmpd="sng" algn="ctr">
+                      <a:solidFill>
+                        <a:schemeClr val="tx1"/>
+                      </a:solidFill>
+                      <a:prstDash val="solid"/>
+                      <a:round/>
+                      <a:headEnd type="none" w="med" len="med"/>
+                      <a:tailEnd type="none" w="med" len="med"/>
+                    </a:lnB>
+                    <a:solidFill>
+                      <a:schemeClr val="accent2"/>
+                    </a:solidFill>
+                  </a:tcPr>
+                </a:tc>
+                <a:tc>
+                  <a:txBody>
+                    <a:bodyPr/>
+                    <a:lstStyle/>
+                    <a:p>
+                      <a:r>
+                        <a:rPr lang="en-US" b="1"/>
+                        <a:t>Qeyd</a:t>
+                      </a:r>
+                    </a:p>
+                  </a:txBody>
+                  <a:tcPr anchor="ctr">
+                    <a:lnL w="12700" cap="flat" cmpd="sng" algn="ctr">
+                      <a:solidFill>
+                        <a:schemeClr val="tx1"/>
+                      </a:solidFill>
+                      <a:prstDash val="solid"/>
+                      <a:round/>
+                      <a:headEnd type="none" w="med" len="med"/>
+                      <a:tailEnd type="none" w="med" len="med"/>
+                    </a:lnL>
+                    <a:lnR w="12700" cap="flat" cmpd="sng" algn="ctr">
+                      <a:solidFill>
+                        <a:schemeClr val="tx1"/>
+                      </a:solidFill>
+                      <a:prstDash val="solid"/>
+                      <a:round/>
+                      <a:headEnd type="none" w="med" len="med"/>
+                      <a:tailEnd type="none" w="med" len="med"/>
+                    </a:lnR>
+                    <a:lnT w="12700" cap="flat" cmpd="sng" algn="ctr">
+                      <a:solidFill>
+                        <a:schemeClr val="tx1"/>
+                      </a:solidFill>
+                      <a:prstDash val="solid"/>
+                      <a:round/>
+                      <a:headEnd type="none" w="med" len="med"/>
+                      <a:tailEnd type="none" w="med" len="med"/>
+                    </a:lnT>
+                    <a:lnB w="12700" cap="flat" cmpd="sng" algn="ctr">
+                      <a:solidFill>
+                        <a:schemeClr val="tx1"/>
+                      </a:solidFill>
+                      <a:prstDash val="solid"/>
+                      <a:round/>
+                      <a:headEnd type="none" w="med" len="med"/>
+                      <a:tailEnd type="none" w="med" len="med"/>
+                    </a:lnB>
+                    <a:solidFill>
+                      <a:schemeClr val="accent2"/>
+                    </a:solidFill>
+                  </a:tcPr>
+                </a:tc>
+                <a:extLst>
+                  <a:ext uri="{0D108BD9-81ED-4DB2-BD59-A6C34878D82A}">
+                    <a16:rowId xmlns:a16="http://schemas.microsoft.com/office/drawing/2014/main" val="730848180"/>
+                  </a:ext>
+                </a:extLst>
+              </a:tr>
+              <a:tr h="623082">
+                <a:tc>
+                  <a:txBody>
+                    <a:bodyPr/>
+                    <a:lstStyle/>
+                    <a:p>
+                      <a:r>
+                        <a:rPr lang="en-US"/>
+                        <a:t>user_id, locale, theme, cart_items</a:t>
+                      </a:r>
+                    </a:p>
+                  </a:txBody>
+                  <a:tcPr anchor="ctr">
+                    <a:lnL w="12700" cap="flat" cmpd="sng" algn="ctr">
+                      <a:solidFill>
+                        <a:schemeClr val="tx1"/>
+                      </a:solidFill>
+                      <a:prstDash val="solid"/>
+                      <a:round/>
+                      <a:headEnd type="none" w="med" len="med"/>
+                      <a:tailEnd type="none" w="med" len="med"/>
+                    </a:lnL>
+                    <a:lnR w="12700" cap="flat" cmpd="sng" algn="ctr">
+                      <a:solidFill>
+                        <a:schemeClr val="tx1"/>
+                      </a:solidFill>
+                      <a:prstDash val="solid"/>
+                      <a:round/>
+                      <a:headEnd type="none" w="med" len="med"/>
+                      <a:tailEnd type="none" w="med" len="med"/>
+                    </a:lnR>
+                    <a:lnT w="12700" cap="flat" cmpd="sng" algn="ctr">
+                      <a:solidFill>
+                        <a:schemeClr val="tx1"/>
+                      </a:solidFill>
+                      <a:prstDash val="solid"/>
+                      <a:round/>
+                      <a:headEnd type="none" w="med" len="med"/>
+                      <a:tailEnd type="none" w="med" len="med"/>
+                    </a:lnT>
+                    <a:lnB w="12700" cap="flat" cmpd="sng" algn="ctr">
+                      <a:solidFill>
+                        <a:schemeClr val="tx1"/>
+                      </a:solidFill>
+                      <a:prstDash val="solid"/>
+                      <a:round/>
+                      <a:headEnd type="none" w="med" len="med"/>
+                      <a:tailEnd type="none" w="med" len="med"/>
+                    </a:lnB>
+                    <a:noFill/>
+                  </a:tcPr>
+                </a:tc>
+                <a:tc>
+                  <a:txBody>
+                    <a:bodyPr/>
+                    <a:lstStyle/>
+                    <a:p>
+                      <a:r>
+                        <a:rPr lang="en-US"/>
+                        <a:t>✅ </a:t>
+                      </a:r>
+                      <a:r>
+                        <a:rPr lang="en-US" b="1"/>
+                        <a:t>Bəli</a:t>
+                      </a:r>
+                      <a:endParaRPr lang="en-US"/>
+                    </a:p>
+                  </a:txBody>
+                  <a:tcPr anchor="ctr">
+                    <a:lnL w="12700" cap="flat" cmpd="sng" algn="ctr">
+                      <a:solidFill>
+                        <a:schemeClr val="tx1"/>
+                      </a:solidFill>
+                      <a:prstDash val="solid"/>
+                      <a:round/>
+                      <a:headEnd type="none" w="med" len="med"/>
+                      <a:tailEnd type="none" w="med" len="med"/>
+                    </a:lnL>
+                    <a:lnR w="12700" cap="flat" cmpd="sng" algn="ctr">
+                      <a:solidFill>
+                        <a:schemeClr val="tx1"/>
+                      </a:solidFill>
+                      <a:prstDash val="solid"/>
+                      <a:round/>
+                      <a:headEnd type="none" w="med" len="med"/>
+                      <a:tailEnd type="none" w="med" len="med"/>
+                    </a:lnR>
+                    <a:lnT w="12700" cap="flat" cmpd="sng" algn="ctr">
+                      <a:solidFill>
+                        <a:schemeClr val="tx1"/>
+                      </a:solidFill>
+                      <a:prstDash val="solid"/>
+                      <a:round/>
+                      <a:headEnd type="none" w="med" len="med"/>
+                      <a:tailEnd type="none" w="med" len="med"/>
+                    </a:lnT>
+                    <a:lnB w="12700" cap="flat" cmpd="sng" algn="ctr">
+                      <a:solidFill>
+                        <a:schemeClr val="tx1"/>
+                      </a:solidFill>
+                      <a:prstDash val="solid"/>
+                      <a:round/>
+                      <a:headEnd type="none" w="med" len="med"/>
+                      <a:tailEnd type="none" w="med" len="med"/>
+                    </a:lnB>
+                    <a:noFill/>
+                  </a:tcPr>
+                </a:tc>
+                <a:tc>
+                  <a:txBody>
+                    <a:bodyPr/>
+                    <a:lstStyle/>
+                    <a:p>
+                      <a:r>
+                        <a:rPr lang="en-US"/>
+                        <a:t>Normal istifadə üçün uyğundur</a:t>
+                      </a:r>
+                    </a:p>
+                  </a:txBody>
+                  <a:tcPr anchor="ctr">
+                    <a:lnL w="12700" cap="flat" cmpd="sng" algn="ctr">
+                      <a:solidFill>
+                        <a:schemeClr val="tx1"/>
+                      </a:solidFill>
+                      <a:prstDash val="solid"/>
+                      <a:round/>
+                      <a:headEnd type="none" w="med" len="med"/>
+                      <a:tailEnd type="none" w="med" len="med"/>
+                    </a:lnL>
+                    <a:lnR w="12700" cap="flat" cmpd="sng" algn="ctr">
+                      <a:solidFill>
+                        <a:schemeClr val="tx1"/>
+                      </a:solidFill>
+                      <a:prstDash val="solid"/>
+                      <a:round/>
+                      <a:headEnd type="none" w="med" len="med"/>
+                      <a:tailEnd type="none" w="med" len="med"/>
+                    </a:lnR>
+                    <a:lnT w="12700" cap="flat" cmpd="sng" algn="ctr">
+                      <a:solidFill>
+                        <a:schemeClr val="tx1"/>
+                      </a:solidFill>
+                      <a:prstDash val="solid"/>
+                      <a:round/>
+                      <a:headEnd type="none" w="med" len="med"/>
+                      <a:tailEnd type="none" w="med" len="med"/>
+                    </a:lnT>
+                    <a:lnB w="12700" cap="flat" cmpd="sng" algn="ctr">
+                      <a:solidFill>
+                        <a:schemeClr val="tx1"/>
+                      </a:solidFill>
+                      <a:prstDash val="solid"/>
+                      <a:round/>
+                      <a:headEnd type="none" w="med" len="med"/>
+                      <a:tailEnd type="none" w="med" len="med"/>
+                    </a:lnB>
+                    <a:noFill/>
+                  </a:tcPr>
+                </a:tc>
+                <a:extLst>
+                  <a:ext uri="{0D108BD9-81ED-4DB2-BD59-A6C34878D82A}">
+                    <a16:rowId xmlns:a16="http://schemas.microsoft.com/office/drawing/2014/main" val="2932665714"/>
+                  </a:ext>
+                </a:extLst>
+              </a:tr>
+              <a:tr h="623082">
+                <a:tc>
+                  <a:txBody>
+                    <a:bodyPr/>
+                    <a:lstStyle/>
+                    <a:p>
+                      <a:r>
+                        <a:rPr lang="en-US"/>
+                        <a:t>password, token, secret_key, PIN, credit_card_number</a:t>
+                      </a:r>
+                    </a:p>
+                  </a:txBody>
+                  <a:tcPr anchor="ctr">
+                    <a:lnL w="12700" cap="flat" cmpd="sng" algn="ctr">
+                      <a:solidFill>
+                        <a:schemeClr val="tx1"/>
+                      </a:solidFill>
+                      <a:prstDash val="solid"/>
+                      <a:round/>
+                      <a:headEnd type="none" w="med" len="med"/>
+                      <a:tailEnd type="none" w="med" len="med"/>
+                    </a:lnL>
+                    <a:lnR w="12700" cap="flat" cmpd="sng" algn="ctr">
+                      <a:solidFill>
+                        <a:schemeClr val="tx1"/>
+                      </a:solidFill>
+                      <a:prstDash val="solid"/>
+                      <a:round/>
+                      <a:headEnd type="none" w="med" len="med"/>
+                      <a:tailEnd type="none" w="med" len="med"/>
+                    </a:lnR>
+                    <a:lnT w="12700" cap="flat" cmpd="sng" algn="ctr">
+                      <a:solidFill>
+                        <a:schemeClr val="tx1"/>
+                      </a:solidFill>
+                      <a:prstDash val="solid"/>
+                      <a:round/>
+                      <a:headEnd type="none" w="med" len="med"/>
+                      <a:tailEnd type="none" w="med" len="med"/>
+                    </a:lnT>
+                    <a:lnB w="12700" cap="flat" cmpd="sng" algn="ctr">
+                      <a:solidFill>
+                        <a:schemeClr val="tx1"/>
+                      </a:solidFill>
+                      <a:prstDash val="solid"/>
+                      <a:round/>
+                      <a:headEnd type="none" w="med" len="med"/>
+                      <a:tailEnd type="none" w="med" len="med"/>
+                    </a:lnB>
+                    <a:noFill/>
+                  </a:tcPr>
+                </a:tc>
+                <a:tc>
+                  <a:txBody>
+                    <a:bodyPr/>
+                    <a:lstStyle/>
+                    <a:p>
+                      <a:r>
+                        <a:rPr lang="en-US"/>
+                        <a:t>❌ </a:t>
+                      </a:r>
+                      <a:r>
+                        <a:rPr lang="en-US" b="1"/>
+                        <a:t>Xeyr</a:t>
+                      </a:r>
+                      <a:endParaRPr lang="en-US"/>
+                    </a:p>
+                  </a:txBody>
+                  <a:tcPr anchor="ctr">
+                    <a:lnL w="12700" cap="flat" cmpd="sng" algn="ctr">
+                      <a:solidFill>
+                        <a:schemeClr val="tx1"/>
+                      </a:solidFill>
+                      <a:prstDash val="solid"/>
+                      <a:round/>
+                      <a:headEnd type="none" w="med" len="med"/>
+                      <a:tailEnd type="none" w="med" len="med"/>
+                    </a:lnL>
+                    <a:lnR w="12700" cap="flat" cmpd="sng" algn="ctr">
+                      <a:solidFill>
+                        <a:schemeClr val="tx1"/>
+                      </a:solidFill>
+                      <a:prstDash val="solid"/>
+                      <a:round/>
+                      <a:headEnd type="none" w="med" len="med"/>
+                      <a:tailEnd type="none" w="med" len="med"/>
+                    </a:lnR>
+                    <a:lnT w="12700" cap="flat" cmpd="sng" algn="ctr">
+                      <a:solidFill>
+                        <a:schemeClr val="tx1"/>
+                      </a:solidFill>
+                      <a:prstDash val="solid"/>
+                      <a:round/>
+                      <a:headEnd type="none" w="med" len="med"/>
+                      <a:tailEnd type="none" w="med" len="med"/>
+                    </a:lnT>
+                    <a:lnB w="12700" cap="flat" cmpd="sng" algn="ctr">
+                      <a:solidFill>
+                        <a:schemeClr val="tx1"/>
+                      </a:solidFill>
+                      <a:prstDash val="solid"/>
+                      <a:round/>
+                      <a:headEnd type="none" w="med" len="med"/>
+                      <a:tailEnd type="none" w="med" len="med"/>
+                    </a:lnB>
+                    <a:noFill/>
+                  </a:tcPr>
+                </a:tc>
+                <a:tc>
+                  <a:txBody>
+                    <a:bodyPr/>
+                    <a:lstStyle/>
+                    <a:p>
+                      <a:r>
+                        <a:rPr lang="en-US" b="1"/>
+                        <a:t>Heç vaxt</a:t>
+                      </a:r>
+                      <a:r>
+                        <a:rPr lang="en-US"/>
+                        <a:t> birbaşa sessiyada saxlanmamalıdır</a:t>
+                      </a:r>
+                    </a:p>
+                  </a:txBody>
+                  <a:tcPr anchor="ctr">
+                    <a:lnL w="12700" cap="flat" cmpd="sng" algn="ctr">
+                      <a:solidFill>
+                        <a:schemeClr val="tx1"/>
+                      </a:solidFill>
+                      <a:prstDash val="solid"/>
+                      <a:round/>
+                      <a:headEnd type="none" w="med" len="med"/>
+                      <a:tailEnd type="none" w="med" len="med"/>
+                    </a:lnL>
+                    <a:lnR w="12700" cap="flat" cmpd="sng" algn="ctr">
+                      <a:solidFill>
+                        <a:schemeClr val="tx1"/>
+                      </a:solidFill>
+                      <a:prstDash val="solid"/>
+                      <a:round/>
+                      <a:headEnd type="none" w="med" len="med"/>
+                      <a:tailEnd type="none" w="med" len="med"/>
+                    </a:lnR>
+                    <a:lnT w="12700" cap="flat" cmpd="sng" algn="ctr">
+                      <a:solidFill>
+                        <a:schemeClr val="tx1"/>
+                      </a:solidFill>
+                      <a:prstDash val="solid"/>
+                      <a:round/>
+                      <a:headEnd type="none" w="med" len="med"/>
+                      <a:tailEnd type="none" w="med" len="med"/>
+                    </a:lnT>
+                    <a:lnB w="12700" cap="flat" cmpd="sng" algn="ctr">
+                      <a:solidFill>
+                        <a:schemeClr val="tx1"/>
+                      </a:solidFill>
+                      <a:prstDash val="solid"/>
+                      <a:round/>
+                      <a:headEnd type="none" w="med" len="med"/>
+                      <a:tailEnd type="none" w="med" len="med"/>
+                    </a:lnB>
+                    <a:noFill/>
+                  </a:tcPr>
+                </a:tc>
+                <a:extLst>
+                  <a:ext uri="{0D108BD9-81ED-4DB2-BD59-A6C34878D82A}">
+                    <a16:rowId xmlns:a16="http://schemas.microsoft.com/office/drawing/2014/main" val="2703583998"/>
+                  </a:ext>
+                </a:extLst>
+              </a:tr>
+            </a:tbl>
+          </a:graphicData>
+        </a:graphic>
+      </p:graphicFrame>
+    </p:spTree>
+    <p:extLst>
+      <p:ext uri="{BB962C8B-B14F-4D97-AF65-F5344CB8AC3E}">
+        <p14:creationId xmlns:p14="http://schemas.microsoft.com/office/powerpoint/2010/main" val="2367206094"/>
+      </p:ext>
+    </p:extLst>
+  </p:cSld>
+  <p:clrMapOvr>
+    <a:masterClrMapping/>
+  </p:clrMapOvr>
+</p:sld>
+</file>
+
+<file path=ppt/slides/slide9.xml><?xml version="1.0" encoding="utf-8"?>
+<p:sld xmlns:a="http://schemas.openxmlformats.org/drawingml/2006/main" xmlns:r="http://schemas.openxmlformats.org/officeDocument/2006/relationships" xmlns:p="http://schemas.openxmlformats.org/presentationml/2006/main">
+  <p:cSld>
+    <p:spTree>
+      <p:nvGrpSpPr>
+        <p:cNvPr id="1" name="">
+          <a:extLst>
+            <a:ext uri="{FF2B5EF4-FFF2-40B4-BE49-F238E27FC236}">
+              <a16:creationId xmlns:a16="http://schemas.microsoft.com/office/drawing/2014/main" id="{BF5315C4-B0AE-59C2-81CF-9E0F8A7F0F8C}"/>
+            </a:ext>
+          </a:extLst>
+        </p:cNvPr>
+        <p:cNvGrpSpPr/>
+        <p:nvPr/>
+      </p:nvGrpSpPr>
+      <p:grpSpPr>
+        <a:xfrm>
+          <a:off x="0" y="0"/>
+          <a:ext cx="0" cy="0"/>
+          <a:chOff x="0" y="0"/>
+          <a:chExt cx="0" cy="0"/>
+        </a:xfrm>
+      </p:grpSpPr>
+      <p:sp>
+        <p:nvSpPr>
+          <p:cNvPr id="3" name="TextBox 2">
+            <a:extLst>
+              <a:ext uri="{FF2B5EF4-FFF2-40B4-BE49-F238E27FC236}">
+                <a16:creationId xmlns:a16="http://schemas.microsoft.com/office/drawing/2014/main" id="{6E59DF7B-B7B9-C223-4B2B-46A6EDB1EB5B}"/>
+              </a:ext>
+            </a:extLst>
+          </p:cNvPr>
+          <p:cNvSpPr txBox="1"/>
+          <p:nvPr/>
+        </p:nvSpPr>
+        <p:spPr>
+          <a:xfrm>
+            <a:off x="217714" y="255046"/>
+            <a:ext cx="11756571" cy="355354"/>
+          </a:xfrm>
+          <a:prstGeom prst="rect">
+            <a:avLst/>
+          </a:prstGeom>
+          <a:noFill/>
+        </p:spPr>
+        <p:txBody>
+          <a:bodyPr wrap="square">
+            <a:spAutoFit/>
+          </a:bodyPr>
+          <a:lstStyle/>
+          <a:p>
+            <a:pPr>
+              <a:lnSpc>
+                <a:spcPct val="150000"/>
+              </a:lnSpc>
+              <a:buNone/>
+            </a:pPr>
+            <a:r>
+              <a:rPr kumimoji="0" lang="en-US" altLang="en-US" sz="1300" b="0" i="0" u="none" strike="noStrike" cap="none" normalizeH="0" baseline="0">
+                <a:ln>
+                  <a:noFill/>
+                </a:ln>
+                <a:solidFill>
+                  <a:schemeClr val="tx1"/>
+                </a:solidFill>
+                <a:effectLst/>
+                <a:latin typeface="Arial" panose="020B0604020202020204" pitchFamily="34" charset="0"/>
+              </a:rPr>
+              <a:t>.</a:t>
+            </a:r>
+          </a:p>
+        </p:txBody>
+      </p:sp>
+    </p:spTree>
+    <p:extLst>
+      <p:ext uri="{BB962C8B-B14F-4D97-AF65-F5344CB8AC3E}">
+        <p14:creationId xmlns:p14="http://schemas.microsoft.com/office/powerpoint/2010/main" val="2579650740"/>
       </p:ext>
     </p:extLst>
   </p:cSld>
